--- a/Prezentáció.pptx
+++ b/Prezentáció.pptx
@@ -22,9 +22,10 @@
     <p:sldId id="274" r:id="rId16"/>
     <p:sldId id="273" r:id="rId17"/>
     <p:sldId id="271" r:id="rId18"/>
-    <p:sldId id="275" r:id="rId19"/>
-    <p:sldId id="272" r:id="rId20"/>
-    <p:sldId id="257" r:id="rId21"/>
+    <p:sldId id="276" r:id="rId19"/>
+    <p:sldId id="275" r:id="rId20"/>
+    <p:sldId id="272" r:id="rId21"/>
+    <p:sldId id="257" r:id="rId22"/>
   </p:sldIdLst>
   <p:sldSz cx="12192000" cy="6858000"/>
   <p:notesSz cx="6858000" cy="9144000"/>
@@ -316,7 +317,7 @@
           <a:p>
             <a:fld id="{D25B39C7-3761-4B48-AAEE-5F77047FB7CA}" type="datetimeFigureOut">
               <a:rPr lang="hu-HU" smtClean="0"/>
-              <a:t>2026. 02. 03.</a:t>
+              <a:t>2026. 02. 17.</a:t>
             </a:fld>
             <a:endParaRPr lang="hu-HU" dirty="0"/>
           </a:p>
@@ -614,7 +615,7 @@
           <a:p>
             <a:fld id="{D25B39C7-3761-4B48-AAEE-5F77047FB7CA}" type="datetimeFigureOut">
               <a:rPr lang="hu-HU" smtClean="0"/>
-              <a:t>2026. 02. 03.</a:t>
+              <a:t>2026. 02. 17.</a:t>
             </a:fld>
             <a:endParaRPr lang="hu-HU" dirty="0"/>
           </a:p>
@@ -806,7 +807,7 @@
           <a:p>
             <a:fld id="{D25B39C7-3761-4B48-AAEE-5F77047FB7CA}" type="datetimeFigureOut">
               <a:rPr lang="hu-HU" smtClean="0"/>
-              <a:t>2026. 02. 03.</a:t>
+              <a:t>2026. 02. 17.</a:t>
             </a:fld>
             <a:endParaRPr lang="hu-HU" dirty="0"/>
           </a:p>
@@ -1067,7 +1068,7 @@
           <a:p>
             <a:fld id="{D25B39C7-3761-4B48-AAEE-5F77047FB7CA}" type="datetimeFigureOut">
               <a:rPr lang="hu-HU" smtClean="0"/>
-              <a:t>2026. 02. 03.</a:t>
+              <a:t>2026. 02. 17.</a:t>
             </a:fld>
             <a:endParaRPr lang="hu-HU" dirty="0"/>
           </a:p>
@@ -1491,7 +1492,7 @@
           <a:p>
             <a:fld id="{D25B39C7-3761-4B48-AAEE-5F77047FB7CA}" type="datetimeFigureOut">
               <a:rPr lang="hu-HU" smtClean="0"/>
-              <a:t>2026. 02. 03.</a:t>
+              <a:t>2026. 02. 17.</a:t>
             </a:fld>
             <a:endParaRPr lang="hu-HU" dirty="0"/>
           </a:p>
@@ -2028,7 +2029,7 @@
           <a:p>
             <a:fld id="{D25B39C7-3761-4B48-AAEE-5F77047FB7CA}" type="datetimeFigureOut">
               <a:rPr lang="hu-HU" smtClean="0"/>
-              <a:t>2026. 02. 03.</a:t>
+              <a:t>2026. 02. 17.</a:t>
             </a:fld>
             <a:endParaRPr lang="hu-HU" dirty="0"/>
           </a:p>
@@ -2892,7 +2893,7 @@
           <a:p>
             <a:fld id="{D25B39C7-3761-4B48-AAEE-5F77047FB7CA}" type="datetimeFigureOut">
               <a:rPr lang="hu-HU" smtClean="0"/>
-              <a:t>2026. 02. 03.</a:t>
+              <a:t>2026. 02. 17.</a:t>
             </a:fld>
             <a:endParaRPr lang="hu-HU" dirty="0"/>
           </a:p>
@@ -3062,7 +3063,7 @@
           <a:p>
             <a:fld id="{D25B39C7-3761-4B48-AAEE-5F77047FB7CA}" type="datetimeFigureOut">
               <a:rPr lang="hu-HU" smtClean="0"/>
-              <a:t>2026. 02. 03.</a:t>
+              <a:t>2026. 02. 17.</a:t>
             </a:fld>
             <a:endParaRPr lang="hu-HU" dirty="0"/>
           </a:p>
@@ -3246,7 +3247,7 @@
           <a:p>
             <a:fld id="{D25B39C7-3761-4B48-AAEE-5F77047FB7CA}" type="datetimeFigureOut">
               <a:rPr lang="hu-HU" smtClean="0"/>
-              <a:t>2026. 02. 03.</a:t>
+              <a:t>2026. 02. 17.</a:t>
             </a:fld>
             <a:endParaRPr lang="hu-HU" dirty="0"/>
           </a:p>
@@ -3416,7 +3417,7 @@
           <a:p>
             <a:fld id="{D25B39C7-3761-4B48-AAEE-5F77047FB7CA}" type="datetimeFigureOut">
               <a:rPr lang="hu-HU" smtClean="0"/>
-              <a:t>2026. 02. 03.</a:t>
+              <a:t>2026. 02. 17.</a:t>
             </a:fld>
             <a:endParaRPr lang="hu-HU" dirty="0"/>
           </a:p>
@@ -3660,7 +3661,7 @@
           <a:p>
             <a:fld id="{D25B39C7-3761-4B48-AAEE-5F77047FB7CA}" type="datetimeFigureOut">
               <a:rPr lang="hu-HU" smtClean="0"/>
-              <a:t>2026. 02. 03.</a:t>
+              <a:t>2026. 02. 17.</a:t>
             </a:fld>
             <a:endParaRPr lang="hu-HU" dirty="0"/>
           </a:p>
@@ -3896,7 +3897,7 @@
           <a:p>
             <a:fld id="{D25B39C7-3761-4B48-AAEE-5F77047FB7CA}" type="datetimeFigureOut">
               <a:rPr lang="hu-HU" smtClean="0"/>
-              <a:t>2026. 02. 03.</a:t>
+              <a:t>2026. 02. 17.</a:t>
             </a:fld>
             <a:endParaRPr lang="hu-HU" dirty="0"/>
           </a:p>
@@ -4362,7 +4363,7 @@
           <a:p>
             <a:fld id="{D25B39C7-3761-4B48-AAEE-5F77047FB7CA}" type="datetimeFigureOut">
               <a:rPr lang="hu-HU" smtClean="0"/>
-              <a:t>2026. 02. 03.</a:t>
+              <a:t>2026. 02. 17.</a:t>
             </a:fld>
             <a:endParaRPr lang="hu-HU" dirty="0"/>
           </a:p>
@@ -4480,7 +4481,7 @@
           <a:p>
             <a:fld id="{D25B39C7-3761-4B48-AAEE-5F77047FB7CA}" type="datetimeFigureOut">
               <a:rPr lang="hu-HU" smtClean="0"/>
-              <a:t>2026. 02. 03.</a:t>
+              <a:t>2026. 02. 17.</a:t>
             </a:fld>
             <a:endParaRPr lang="hu-HU" dirty="0"/>
           </a:p>
@@ -4575,7 +4576,7 @@
           <a:p>
             <a:fld id="{D25B39C7-3761-4B48-AAEE-5F77047FB7CA}" type="datetimeFigureOut">
               <a:rPr lang="hu-HU" smtClean="0"/>
-              <a:t>2026. 02. 03.</a:t>
+              <a:t>2026. 02. 17.</a:t>
             </a:fld>
             <a:endParaRPr lang="hu-HU" dirty="0"/>
           </a:p>
@@ -4830,7 +4831,7 @@
           <a:p>
             <a:fld id="{D25B39C7-3761-4B48-AAEE-5F77047FB7CA}" type="datetimeFigureOut">
               <a:rPr lang="hu-HU" smtClean="0"/>
-              <a:t>2026. 02. 03.</a:t>
+              <a:t>2026. 02. 17.</a:t>
             </a:fld>
             <a:endParaRPr lang="hu-HU" dirty="0"/>
           </a:p>
@@ -5130,7 +5131,7 @@
           <a:p>
             <a:fld id="{D25B39C7-3761-4B48-AAEE-5F77047FB7CA}" type="datetimeFigureOut">
               <a:rPr lang="hu-HU" smtClean="0"/>
-              <a:t>2026. 02. 03.</a:t>
+              <a:t>2026. 02. 17.</a:t>
             </a:fld>
             <a:endParaRPr lang="hu-HU" dirty="0"/>
           </a:p>
@@ -5364,7 +5365,7 @@
           <a:p>
             <a:fld id="{D25B39C7-3761-4B48-AAEE-5F77047FB7CA}" type="datetimeFigureOut">
               <a:rPr lang="hu-HU" smtClean="0"/>
-              <a:t>2026. 02. 03.</a:t>
+              <a:t>2026. 02. 17.</a:t>
             </a:fld>
             <a:endParaRPr lang="hu-HU" dirty="0"/>
           </a:p>
@@ -7603,6 +7604,224 @@
           <p:cNvPr id="2" name="Cím 1">
             <a:extLst>
               <a:ext uri="{FF2B5EF4-FFF2-40B4-BE49-F238E27FC236}">
+                <a16:creationId xmlns:a16="http://schemas.microsoft.com/office/drawing/2014/main" id="{2EF3F9A6-7B7F-7481-68DF-7B2FE7BDC601}"/>
+              </a:ext>
+            </a:extLst>
+          </p:cNvPr>
+          <p:cNvSpPr>
+            <a:spLocks noGrp="1"/>
+          </p:cNvSpPr>
+          <p:nvPr>
+            <p:ph type="title"/>
+          </p:nvPr>
+        </p:nvSpPr>
+        <p:spPr/>
+        <p:txBody>
+          <a:bodyPr/>
+          <a:lstStyle/>
+          <a:p>
+            <a:r>
+              <a:rPr lang="hu-HU" dirty="0"/>
+              <a:t>Windows és Linux Szerver</a:t>
+            </a:r>
+          </a:p>
+        </p:txBody>
+      </p:sp>
+      <p:sp>
+        <p:nvSpPr>
+          <p:cNvPr id="4" name="Tartalom helye 3">
+            <a:extLst>
+              <a:ext uri="{FF2B5EF4-FFF2-40B4-BE49-F238E27FC236}">
+                <a16:creationId xmlns:a16="http://schemas.microsoft.com/office/drawing/2014/main" id="{669FDB68-DD8A-EB12-BB1B-A7A0730B4392}"/>
+              </a:ext>
+            </a:extLst>
+          </p:cNvPr>
+          <p:cNvSpPr>
+            <a:spLocks noGrp="1"/>
+          </p:cNvSpPr>
+          <p:nvPr>
+            <p:ph sz="half" idx="2"/>
+          </p:nvPr>
+        </p:nvSpPr>
+        <p:spPr>
+          <a:xfrm>
+            <a:off x="3558343" y="1823757"/>
+            <a:ext cx="5064665" cy="2934441"/>
+          </a:xfrm>
+        </p:spPr>
+        <p:txBody>
+          <a:bodyPr>
+            <a:normAutofit lnSpcReduction="10000"/>
+          </a:bodyPr>
+          <a:lstStyle/>
+          <a:p>
+            <a:pPr algn="ctr"/>
+            <a:r>
+              <a:rPr lang="hu-HU" dirty="0"/>
+              <a:t>DHCP</a:t>
+            </a:r>
+          </a:p>
+          <a:p>
+            <a:pPr algn="ctr"/>
+            <a:r>
+              <a:rPr lang="hu-HU" dirty="0"/>
+              <a:t>DNS</a:t>
+            </a:r>
+          </a:p>
+          <a:p>
+            <a:pPr algn="ctr"/>
+            <a:r>
+              <a:rPr lang="hu-HU" dirty="0"/>
+              <a:t>IIS</a:t>
+            </a:r>
+          </a:p>
+          <a:p>
+            <a:pPr algn="ctr"/>
+            <a:r>
+              <a:rPr lang="hu-HU" dirty="0"/>
+              <a:t>Active-Directory</a:t>
+            </a:r>
+          </a:p>
+          <a:p>
+            <a:pPr algn="ctr"/>
+            <a:r>
+              <a:rPr lang="hu-HU" dirty="0"/>
+              <a:t>Printer Szerver</a:t>
+            </a:r>
+          </a:p>
+          <a:p>
+            <a:pPr algn="ctr"/>
+            <a:r>
+              <a:rPr lang="hu-HU" dirty="0"/>
+              <a:t>Backup Szerver</a:t>
+            </a:r>
+          </a:p>
+          <a:p>
+            <a:pPr algn="ctr"/>
+            <a:r>
+              <a:rPr lang="hu-HU" dirty="0"/>
+              <a:t>Group Policy Management</a:t>
+            </a:r>
+          </a:p>
+        </p:txBody>
+      </p:sp>
+      <p:pic>
+        <p:nvPicPr>
+          <p:cNvPr id="1026" name="Picture 2" descr="windows-server-logo">
+            <a:extLst>
+              <a:ext uri="{FF2B5EF4-FFF2-40B4-BE49-F238E27FC236}">
+                <a16:creationId xmlns:a16="http://schemas.microsoft.com/office/drawing/2014/main" id="{DD02D43E-5EC7-5B2A-6DC0-0BFFCEBCF131}"/>
+              </a:ext>
+            </a:extLst>
+          </p:cNvPr>
+          <p:cNvPicPr>
+            <a:picLocks noChangeAspect="1" noChangeArrowheads="1"/>
+          </p:cNvPicPr>
+          <p:nvPr/>
+        </p:nvPicPr>
+        <p:blipFill>
+          <a:blip r:embed="rId2">
+            <a:extLst>
+              <a:ext uri="{28A0092B-C50C-407E-A947-70E740481C1C}">
+                <a14:useLocalDpi xmlns:a14="http://schemas.microsoft.com/office/drawing/2010/main" val="0"/>
+              </a:ext>
+            </a:extLst>
+          </a:blip>
+          <a:srcRect/>
+          <a:stretch>
+            <a:fillRect/>
+          </a:stretch>
+        </p:blipFill>
+        <p:spPr bwMode="auto">
+          <a:xfrm>
+            <a:off x="1425462" y="4594508"/>
+            <a:ext cx="4037162" cy="2134754"/>
+          </a:xfrm>
+          <a:prstGeom prst="rect">
+            <a:avLst/>
+          </a:prstGeom>
+          <a:noFill/>
+          <a:extLst>
+            <a:ext uri="{909E8E84-426E-40DD-AFC4-6F175D3DCCD1}">
+              <a14:hiddenFill xmlns:a14="http://schemas.microsoft.com/office/drawing/2010/main">
+                <a:solidFill>
+                  <a:srgbClr val="FFFFFF"/>
+                </a:solidFill>
+              </a14:hiddenFill>
+            </a:ext>
+          </a:extLst>
+        </p:spPr>
+      </p:pic>
+      <p:pic>
+        <p:nvPicPr>
+          <p:cNvPr id="17" name="Tartalom helye 16" descr="A képen művészet, kör, Grafika, Színesség látható&#10;&#10;Előfordulhat, hogy a mesterséges intelligencia által létrehozott tartalom helytelen.">
+            <a:extLst>
+              <a:ext uri="{FF2B5EF4-FFF2-40B4-BE49-F238E27FC236}">
+                <a16:creationId xmlns:a16="http://schemas.microsoft.com/office/drawing/2014/main" id="{1C049FE0-AFFE-C61A-1737-BD2302C8A068}"/>
+              </a:ext>
+            </a:extLst>
+          </p:cNvPr>
+          <p:cNvPicPr>
+            <a:picLocks noGrp="1" noChangeAspect="1"/>
+          </p:cNvPicPr>
+          <p:nvPr>
+            <p:ph sz="half" idx="1"/>
+          </p:nvPr>
+        </p:nvPicPr>
+        <p:blipFill>
+          <a:blip r:embed="rId3">
+            <a:extLst>
+              <a:ext uri="{28A0092B-C50C-407E-A947-70E740481C1C}">
+                <a14:useLocalDpi xmlns:a14="http://schemas.microsoft.com/office/drawing/2010/main" val="0"/>
+              </a:ext>
+            </a:extLst>
+          </a:blip>
+          <a:stretch>
+            <a:fillRect/>
+          </a:stretch>
+        </p:blipFill>
+        <p:spPr>
+          <a:xfrm>
+            <a:off x="7977434" y="4594508"/>
+            <a:ext cx="1951570" cy="2134754"/>
+          </a:xfrm>
+        </p:spPr>
+      </p:pic>
+    </p:spTree>
+    <p:extLst>
+      <p:ext uri="{BB962C8B-B14F-4D97-AF65-F5344CB8AC3E}">
+        <p14:creationId xmlns:p14="http://schemas.microsoft.com/office/powerpoint/2010/main" val="4268629342"/>
+      </p:ext>
+    </p:extLst>
+  </p:cSld>
+  <p:clrMapOvr>
+    <a:masterClrMapping/>
+  </p:clrMapOvr>
+</p:sld>
+</file>
+
+<file path=ppt/slides/slide19.xml><?xml version="1.0" encoding="utf-8"?>
+<p:sld xmlns:a="http://schemas.openxmlformats.org/drawingml/2006/main" xmlns:r="http://schemas.openxmlformats.org/officeDocument/2006/relationships" xmlns:p="http://schemas.openxmlformats.org/presentationml/2006/main">
+  <p:cSld>
+    <p:spTree>
+      <p:nvGrpSpPr>
+        <p:cNvPr id="1" name=""/>
+        <p:cNvGrpSpPr/>
+        <p:nvPr/>
+      </p:nvGrpSpPr>
+      <p:grpSpPr>
+        <a:xfrm>
+          <a:off x="0" y="0"/>
+          <a:ext cx="0" cy="0"/>
+          <a:chOff x="0" y="0"/>
+          <a:chExt cx="0" cy="0"/>
+        </a:xfrm>
+      </p:grpSpPr>
+      <p:sp>
+        <p:nvSpPr>
+          <p:cNvPr id="2" name="Cím 1">
+            <a:extLst>
+              <a:ext uri="{FF2B5EF4-FFF2-40B4-BE49-F238E27FC236}">
                 <a16:creationId xmlns:a16="http://schemas.microsoft.com/office/drawing/2014/main" id="{53817A90-70AB-88FD-8997-FAE17BD069D6}"/>
               </a:ext>
             </a:extLst>
@@ -8034,101 +8253,6 @@
 </p:sld>
 </file>
 
-<file path=ppt/slides/slide19.xml><?xml version="1.0" encoding="utf-8"?>
-<p:sld xmlns:a="http://schemas.openxmlformats.org/drawingml/2006/main" xmlns:r="http://schemas.openxmlformats.org/officeDocument/2006/relationships" xmlns:p="http://schemas.openxmlformats.org/presentationml/2006/main">
-  <p:cSld>
-    <p:spTree>
-      <p:nvGrpSpPr>
-        <p:cNvPr id="1" name=""/>
-        <p:cNvGrpSpPr/>
-        <p:nvPr/>
-      </p:nvGrpSpPr>
-      <p:grpSpPr>
-        <a:xfrm>
-          <a:off x="0" y="0"/>
-          <a:ext cx="0" cy="0"/>
-          <a:chOff x="0" y="0"/>
-          <a:chExt cx="0" cy="0"/>
-        </a:xfrm>
-      </p:grpSpPr>
-      <p:sp>
-        <p:nvSpPr>
-          <p:cNvPr id="2" name="Cím 1">
-            <a:extLst>
-              <a:ext uri="{FF2B5EF4-FFF2-40B4-BE49-F238E27FC236}">
-                <a16:creationId xmlns:a16="http://schemas.microsoft.com/office/drawing/2014/main" id="{257AB2B2-57D3-A109-613B-792764AA5294}"/>
-              </a:ext>
-            </a:extLst>
-          </p:cNvPr>
-          <p:cNvSpPr>
-            <a:spLocks noGrp="1"/>
-          </p:cNvSpPr>
-          <p:nvPr>
-            <p:ph type="title"/>
-          </p:nvPr>
-        </p:nvSpPr>
-        <p:spPr/>
-        <p:txBody>
-          <a:bodyPr/>
-          <a:lstStyle/>
-          <a:p>
-            <a:pPr algn="ctr"/>
-            <a:r>
-              <a:rPr lang="hu-HU" dirty="0">
-                <a:solidFill>
-                  <a:schemeClr val="tx1"/>
-                </a:solidFill>
-              </a:rPr>
-              <a:t>Munkamegosztás</a:t>
-            </a:r>
-          </a:p>
-        </p:txBody>
-      </p:sp>
-      <p:pic>
-        <p:nvPicPr>
-          <p:cNvPr id="7" name="Kép 6">
-            <a:extLst>
-              <a:ext uri="{FF2B5EF4-FFF2-40B4-BE49-F238E27FC236}">
-                <a16:creationId xmlns:a16="http://schemas.microsoft.com/office/drawing/2014/main" id="{A736794A-A1C3-1C84-3D27-0ADA8C681D39}"/>
-              </a:ext>
-            </a:extLst>
-          </p:cNvPr>
-          <p:cNvPicPr>
-            <a:picLocks noChangeAspect="1"/>
-          </p:cNvPicPr>
-          <p:nvPr/>
-        </p:nvPicPr>
-        <p:blipFill>
-          <a:blip r:embed="rId2"/>
-          <a:srcRect t="4680"/>
-          <a:stretch/>
-        </p:blipFill>
-        <p:spPr>
-          <a:xfrm>
-            <a:off x="991783" y="1803628"/>
-            <a:ext cx="10197786" cy="4562666"/>
-          </a:xfrm>
-          <a:prstGeom prst="rect">
-            <a:avLst/>
-          </a:prstGeom>
-        </p:spPr>
-      </p:pic>
-    </p:spTree>
-    <p:extLst>
-      <p:ext uri="{BB962C8B-B14F-4D97-AF65-F5344CB8AC3E}">
-        <p14:creationId xmlns:p14="http://schemas.microsoft.com/office/powerpoint/2010/main" val="3928631734"/>
-      </p:ext>
-    </p:extLst>
-  </p:cSld>
-  <p:clrMapOvr>
-    <a:masterClrMapping/>
-  </p:clrMapOvr>
-  <p:transition spd="slow">
-    <p:push dir="u"/>
-  </p:transition>
-</p:sld>
-</file>
-
 <file path=ppt/slides/slide2.xml><?xml version="1.0" encoding="utf-8"?>
 <p:sld xmlns:a="http://schemas.openxmlformats.org/drawingml/2006/main" xmlns:r="http://schemas.openxmlformats.org/officeDocument/2006/relationships" xmlns:p="http://schemas.openxmlformats.org/presentationml/2006/main">
   <p:cSld>
@@ -8352,6 +8476,101 @@
 </file>
 
 <file path=ppt/slides/slide20.xml><?xml version="1.0" encoding="utf-8"?>
+<p:sld xmlns:a="http://schemas.openxmlformats.org/drawingml/2006/main" xmlns:r="http://schemas.openxmlformats.org/officeDocument/2006/relationships" xmlns:p="http://schemas.openxmlformats.org/presentationml/2006/main">
+  <p:cSld>
+    <p:spTree>
+      <p:nvGrpSpPr>
+        <p:cNvPr id="1" name=""/>
+        <p:cNvGrpSpPr/>
+        <p:nvPr/>
+      </p:nvGrpSpPr>
+      <p:grpSpPr>
+        <a:xfrm>
+          <a:off x="0" y="0"/>
+          <a:ext cx="0" cy="0"/>
+          <a:chOff x="0" y="0"/>
+          <a:chExt cx="0" cy="0"/>
+        </a:xfrm>
+      </p:grpSpPr>
+      <p:sp>
+        <p:nvSpPr>
+          <p:cNvPr id="2" name="Cím 1">
+            <a:extLst>
+              <a:ext uri="{FF2B5EF4-FFF2-40B4-BE49-F238E27FC236}">
+                <a16:creationId xmlns:a16="http://schemas.microsoft.com/office/drawing/2014/main" id="{257AB2B2-57D3-A109-613B-792764AA5294}"/>
+              </a:ext>
+            </a:extLst>
+          </p:cNvPr>
+          <p:cNvSpPr>
+            <a:spLocks noGrp="1"/>
+          </p:cNvSpPr>
+          <p:nvPr>
+            <p:ph type="title"/>
+          </p:nvPr>
+        </p:nvSpPr>
+        <p:spPr/>
+        <p:txBody>
+          <a:bodyPr/>
+          <a:lstStyle/>
+          <a:p>
+            <a:pPr algn="ctr"/>
+            <a:r>
+              <a:rPr lang="hu-HU" dirty="0">
+                <a:solidFill>
+                  <a:schemeClr val="tx1"/>
+                </a:solidFill>
+              </a:rPr>
+              <a:t>Munkamegosztás</a:t>
+            </a:r>
+          </a:p>
+        </p:txBody>
+      </p:sp>
+      <p:pic>
+        <p:nvPicPr>
+          <p:cNvPr id="7" name="Kép 6">
+            <a:extLst>
+              <a:ext uri="{FF2B5EF4-FFF2-40B4-BE49-F238E27FC236}">
+                <a16:creationId xmlns:a16="http://schemas.microsoft.com/office/drawing/2014/main" id="{A736794A-A1C3-1C84-3D27-0ADA8C681D39}"/>
+              </a:ext>
+            </a:extLst>
+          </p:cNvPr>
+          <p:cNvPicPr>
+            <a:picLocks noChangeAspect="1"/>
+          </p:cNvPicPr>
+          <p:nvPr/>
+        </p:nvPicPr>
+        <p:blipFill>
+          <a:blip r:embed="rId2"/>
+          <a:srcRect t="4680"/>
+          <a:stretch/>
+        </p:blipFill>
+        <p:spPr>
+          <a:xfrm>
+            <a:off x="991783" y="1803628"/>
+            <a:ext cx="10197786" cy="4562666"/>
+          </a:xfrm>
+          <a:prstGeom prst="rect">
+            <a:avLst/>
+          </a:prstGeom>
+        </p:spPr>
+      </p:pic>
+    </p:spTree>
+    <p:extLst>
+      <p:ext uri="{BB962C8B-B14F-4D97-AF65-F5344CB8AC3E}">
+        <p14:creationId xmlns:p14="http://schemas.microsoft.com/office/powerpoint/2010/main" val="3928631734"/>
+      </p:ext>
+    </p:extLst>
+  </p:cSld>
+  <p:clrMapOvr>
+    <a:masterClrMapping/>
+  </p:clrMapOvr>
+  <p:transition spd="slow">
+    <p:push dir="u"/>
+  </p:transition>
+</p:sld>
+</file>
+
+<file path=ppt/slides/slide21.xml><?xml version="1.0" encoding="utf-8"?>
 <p:sld xmlns:a="http://schemas.openxmlformats.org/drawingml/2006/main" xmlns:r="http://schemas.openxmlformats.org/officeDocument/2006/relationships" xmlns:p="http://schemas.openxmlformats.org/presentationml/2006/main">
   <p:cSld>
     <p:spTree>

--- a/Prezentáció.pptx
+++ b/Prezentáció.pptx
@@ -4,6 +4,9 @@
   <p:sldMasterIdLst>
     <p:sldMasterId id="2147483660" r:id="rId1"/>
   </p:sldMasterIdLst>
+  <p:notesMasterIdLst>
+    <p:notesMasterId r:id="rId23"/>
+  </p:notesMasterIdLst>
   <p:sldIdLst>
     <p:sldId id="256" r:id="rId2"/>
     <p:sldId id="258" r:id="rId3"/>
@@ -132,6 +135,4528 @@
 </p:presentation>
 </file>
 
+<file path=ppt/notesMasters/notesMaster1.xml><?xml version="1.0" encoding="utf-8"?>
+<p:notesMaster xmlns:a="http://schemas.openxmlformats.org/drawingml/2006/main" xmlns:r="http://schemas.openxmlformats.org/officeDocument/2006/relationships" xmlns:p="http://schemas.openxmlformats.org/presentationml/2006/main">
+  <p:cSld>
+    <p:bg>
+      <p:bgRef idx="1001">
+        <a:schemeClr val="bg1"/>
+      </p:bgRef>
+    </p:bg>
+    <p:spTree>
+      <p:nvGrpSpPr>
+        <p:cNvPr id="1" name=""/>
+        <p:cNvGrpSpPr/>
+        <p:nvPr/>
+      </p:nvGrpSpPr>
+      <p:grpSpPr>
+        <a:xfrm>
+          <a:off x="0" y="0"/>
+          <a:ext cx="0" cy="0"/>
+          <a:chOff x="0" y="0"/>
+          <a:chExt cx="0" cy="0"/>
+        </a:xfrm>
+      </p:grpSpPr>
+      <p:sp>
+        <p:nvSpPr>
+          <p:cNvPr id="2" name="Élőfej helye 1"/>
+          <p:cNvSpPr>
+            <a:spLocks noGrp="1"/>
+          </p:cNvSpPr>
+          <p:nvPr>
+            <p:ph type="hdr" sz="quarter"/>
+          </p:nvPr>
+        </p:nvSpPr>
+        <p:spPr>
+          <a:xfrm>
+            <a:off x="0" y="0"/>
+            <a:ext cx="2971800" cy="458788"/>
+          </a:xfrm>
+          <a:prstGeom prst="rect">
+            <a:avLst/>
+          </a:prstGeom>
+        </p:spPr>
+        <p:txBody>
+          <a:bodyPr vert="horz" lIns="91440" tIns="45720" rIns="91440" bIns="45720" rtlCol="0"/>
+          <a:lstStyle>
+            <a:lvl1pPr algn="l">
+              <a:defRPr sz="1200"/>
+            </a:lvl1pPr>
+          </a:lstStyle>
+          <a:p>
+            <a:endParaRPr lang="hu-HU"/>
+          </a:p>
+        </p:txBody>
+      </p:sp>
+      <p:sp>
+        <p:nvSpPr>
+          <p:cNvPr id="3" name="Dátum helye 2"/>
+          <p:cNvSpPr>
+            <a:spLocks noGrp="1"/>
+          </p:cNvSpPr>
+          <p:nvPr>
+            <p:ph type="dt" idx="1"/>
+          </p:nvPr>
+        </p:nvSpPr>
+        <p:spPr>
+          <a:xfrm>
+            <a:off x="3884613" y="0"/>
+            <a:ext cx="2971800" cy="458788"/>
+          </a:xfrm>
+          <a:prstGeom prst="rect">
+            <a:avLst/>
+          </a:prstGeom>
+        </p:spPr>
+        <p:txBody>
+          <a:bodyPr vert="horz" lIns="91440" tIns="45720" rIns="91440" bIns="45720" rtlCol="0"/>
+          <a:lstStyle>
+            <a:lvl1pPr algn="r">
+              <a:defRPr sz="1200"/>
+            </a:lvl1pPr>
+          </a:lstStyle>
+          <a:p>
+            <a:fld id="{88AB2295-2079-4CB6-8FC5-5AAFA2C199A0}" type="datetimeFigureOut">
+              <a:rPr lang="hu-HU" smtClean="0"/>
+              <a:t>2026. 02. 22.</a:t>
+            </a:fld>
+            <a:endParaRPr lang="hu-HU"/>
+          </a:p>
+        </p:txBody>
+      </p:sp>
+      <p:sp>
+        <p:nvSpPr>
+          <p:cNvPr id="4" name="Diakép helye 3"/>
+          <p:cNvSpPr>
+            <a:spLocks noGrp="1" noRot="1" noChangeAspect="1"/>
+          </p:cNvSpPr>
+          <p:nvPr>
+            <p:ph type="sldImg" idx="2"/>
+          </p:nvPr>
+        </p:nvSpPr>
+        <p:spPr>
+          <a:xfrm>
+            <a:off x="685800" y="1143000"/>
+            <a:ext cx="5486400" cy="3086100"/>
+          </a:xfrm>
+          <a:prstGeom prst="rect">
+            <a:avLst/>
+          </a:prstGeom>
+          <a:noFill/>
+          <a:ln w="12700">
+            <a:solidFill>
+              <a:prstClr val="black"/>
+            </a:solidFill>
+          </a:ln>
+        </p:spPr>
+        <p:txBody>
+          <a:bodyPr vert="horz" lIns="91440" tIns="45720" rIns="91440" bIns="45720" rtlCol="0" anchor="ctr"/>
+          <a:lstStyle/>
+          <a:p>
+            <a:endParaRPr lang="hu-HU"/>
+          </a:p>
+        </p:txBody>
+      </p:sp>
+      <p:sp>
+        <p:nvSpPr>
+          <p:cNvPr id="5" name="Jegyzetek helye 4"/>
+          <p:cNvSpPr>
+            <a:spLocks noGrp="1"/>
+          </p:cNvSpPr>
+          <p:nvPr>
+            <p:ph type="body" sz="quarter" idx="3"/>
+          </p:nvPr>
+        </p:nvSpPr>
+        <p:spPr>
+          <a:xfrm>
+            <a:off x="685800" y="4400550"/>
+            <a:ext cx="5486400" cy="3600450"/>
+          </a:xfrm>
+          <a:prstGeom prst="rect">
+            <a:avLst/>
+          </a:prstGeom>
+        </p:spPr>
+        <p:txBody>
+          <a:bodyPr vert="horz" lIns="91440" tIns="45720" rIns="91440" bIns="45720" rtlCol="0"/>
+          <a:lstStyle/>
+          <a:p>
+            <a:pPr lvl="0"/>
+            <a:r>
+              <a:rPr lang="hu-HU"/>
+              <a:t>Mintaszöveg szerkesztése</a:t>
+            </a:r>
+          </a:p>
+          <a:p>
+            <a:pPr lvl="1"/>
+            <a:r>
+              <a:rPr lang="hu-HU"/>
+              <a:t>Második szint</a:t>
+            </a:r>
+          </a:p>
+          <a:p>
+            <a:pPr lvl="2"/>
+            <a:r>
+              <a:rPr lang="hu-HU"/>
+              <a:t>Harmadik szint</a:t>
+            </a:r>
+          </a:p>
+          <a:p>
+            <a:pPr lvl="3"/>
+            <a:r>
+              <a:rPr lang="hu-HU"/>
+              <a:t>Negyedik szint</a:t>
+            </a:r>
+          </a:p>
+          <a:p>
+            <a:pPr lvl="4"/>
+            <a:r>
+              <a:rPr lang="hu-HU"/>
+              <a:t>Ötödik szint</a:t>
+            </a:r>
+          </a:p>
+        </p:txBody>
+      </p:sp>
+      <p:sp>
+        <p:nvSpPr>
+          <p:cNvPr id="6" name="Élőláb helye 5"/>
+          <p:cNvSpPr>
+            <a:spLocks noGrp="1"/>
+          </p:cNvSpPr>
+          <p:nvPr>
+            <p:ph type="ftr" sz="quarter" idx="4"/>
+          </p:nvPr>
+        </p:nvSpPr>
+        <p:spPr>
+          <a:xfrm>
+            <a:off x="0" y="8685213"/>
+            <a:ext cx="2971800" cy="458787"/>
+          </a:xfrm>
+          <a:prstGeom prst="rect">
+            <a:avLst/>
+          </a:prstGeom>
+        </p:spPr>
+        <p:txBody>
+          <a:bodyPr vert="horz" lIns="91440" tIns="45720" rIns="91440" bIns="45720" rtlCol="0" anchor="b"/>
+          <a:lstStyle>
+            <a:lvl1pPr algn="l">
+              <a:defRPr sz="1200"/>
+            </a:lvl1pPr>
+          </a:lstStyle>
+          <a:p>
+            <a:endParaRPr lang="hu-HU"/>
+          </a:p>
+        </p:txBody>
+      </p:sp>
+      <p:sp>
+        <p:nvSpPr>
+          <p:cNvPr id="7" name="Dia számának helye 6"/>
+          <p:cNvSpPr>
+            <a:spLocks noGrp="1"/>
+          </p:cNvSpPr>
+          <p:nvPr>
+            <p:ph type="sldNum" sz="quarter" idx="5"/>
+          </p:nvPr>
+        </p:nvSpPr>
+        <p:spPr>
+          <a:xfrm>
+            <a:off x="3884613" y="8685213"/>
+            <a:ext cx="2971800" cy="458787"/>
+          </a:xfrm>
+          <a:prstGeom prst="rect">
+            <a:avLst/>
+          </a:prstGeom>
+        </p:spPr>
+        <p:txBody>
+          <a:bodyPr vert="horz" lIns="91440" tIns="45720" rIns="91440" bIns="45720" rtlCol="0" anchor="b"/>
+          <a:lstStyle>
+            <a:lvl1pPr algn="r">
+              <a:defRPr sz="1200"/>
+            </a:lvl1pPr>
+          </a:lstStyle>
+          <a:p>
+            <a:fld id="{1087266A-CB85-4818-B702-CBAEB43B1A09}" type="slidenum">
+              <a:rPr lang="hu-HU" smtClean="0"/>
+              <a:t>‹#›</a:t>
+            </a:fld>
+            <a:endParaRPr lang="hu-HU"/>
+          </a:p>
+        </p:txBody>
+      </p:sp>
+    </p:spTree>
+    <p:extLst>
+      <p:ext uri="{BB962C8B-B14F-4D97-AF65-F5344CB8AC3E}">
+        <p14:creationId xmlns:p14="http://schemas.microsoft.com/office/powerpoint/2010/main" val="3016220132"/>
+      </p:ext>
+    </p:extLst>
+  </p:cSld>
+  <p:clrMap bg1="lt1" tx1="dk1" bg2="lt2" tx2="dk2" accent1="accent1" accent2="accent2" accent3="accent3" accent4="accent4" accent5="accent5" accent6="accent6" hlink="hlink" folHlink="folHlink"/>
+  <p:notesStyle>
+    <a:lvl1pPr marL="0" algn="l" defTabSz="914400" rtl="0" eaLnBrk="1" latinLnBrk="0" hangingPunct="1">
+      <a:defRPr sz="1200" kern="1200">
+        <a:solidFill>
+          <a:schemeClr val="tx1"/>
+        </a:solidFill>
+        <a:latin typeface="+mn-lt"/>
+        <a:ea typeface="+mn-ea"/>
+        <a:cs typeface="+mn-cs"/>
+      </a:defRPr>
+    </a:lvl1pPr>
+    <a:lvl2pPr marL="457200" algn="l" defTabSz="914400" rtl="0" eaLnBrk="1" latinLnBrk="0" hangingPunct="1">
+      <a:defRPr sz="1200" kern="1200">
+        <a:solidFill>
+          <a:schemeClr val="tx1"/>
+        </a:solidFill>
+        <a:latin typeface="+mn-lt"/>
+        <a:ea typeface="+mn-ea"/>
+        <a:cs typeface="+mn-cs"/>
+      </a:defRPr>
+    </a:lvl2pPr>
+    <a:lvl3pPr marL="914400" algn="l" defTabSz="914400" rtl="0" eaLnBrk="1" latinLnBrk="0" hangingPunct="1">
+      <a:defRPr sz="1200" kern="1200">
+        <a:solidFill>
+          <a:schemeClr val="tx1"/>
+        </a:solidFill>
+        <a:latin typeface="+mn-lt"/>
+        <a:ea typeface="+mn-ea"/>
+        <a:cs typeface="+mn-cs"/>
+      </a:defRPr>
+    </a:lvl3pPr>
+    <a:lvl4pPr marL="1371600" algn="l" defTabSz="914400" rtl="0" eaLnBrk="1" latinLnBrk="0" hangingPunct="1">
+      <a:defRPr sz="1200" kern="1200">
+        <a:solidFill>
+          <a:schemeClr val="tx1"/>
+        </a:solidFill>
+        <a:latin typeface="+mn-lt"/>
+        <a:ea typeface="+mn-ea"/>
+        <a:cs typeface="+mn-cs"/>
+      </a:defRPr>
+    </a:lvl4pPr>
+    <a:lvl5pPr marL="1828800" algn="l" defTabSz="914400" rtl="0" eaLnBrk="1" latinLnBrk="0" hangingPunct="1">
+      <a:defRPr sz="1200" kern="1200">
+        <a:solidFill>
+          <a:schemeClr val="tx1"/>
+        </a:solidFill>
+        <a:latin typeface="+mn-lt"/>
+        <a:ea typeface="+mn-ea"/>
+        <a:cs typeface="+mn-cs"/>
+      </a:defRPr>
+    </a:lvl5pPr>
+    <a:lvl6pPr marL="2286000" algn="l" defTabSz="914400" rtl="0" eaLnBrk="1" latinLnBrk="0" hangingPunct="1">
+      <a:defRPr sz="1200" kern="1200">
+        <a:solidFill>
+          <a:schemeClr val="tx1"/>
+        </a:solidFill>
+        <a:latin typeface="+mn-lt"/>
+        <a:ea typeface="+mn-ea"/>
+        <a:cs typeface="+mn-cs"/>
+      </a:defRPr>
+    </a:lvl6pPr>
+    <a:lvl7pPr marL="2743200" algn="l" defTabSz="914400" rtl="0" eaLnBrk="1" latinLnBrk="0" hangingPunct="1">
+      <a:defRPr sz="1200" kern="1200">
+        <a:solidFill>
+          <a:schemeClr val="tx1"/>
+        </a:solidFill>
+        <a:latin typeface="+mn-lt"/>
+        <a:ea typeface="+mn-ea"/>
+        <a:cs typeface="+mn-cs"/>
+      </a:defRPr>
+    </a:lvl7pPr>
+    <a:lvl8pPr marL="3200400" algn="l" defTabSz="914400" rtl="0" eaLnBrk="1" latinLnBrk="0" hangingPunct="1">
+      <a:defRPr sz="1200" kern="1200">
+        <a:solidFill>
+          <a:schemeClr val="tx1"/>
+        </a:solidFill>
+        <a:latin typeface="+mn-lt"/>
+        <a:ea typeface="+mn-ea"/>
+        <a:cs typeface="+mn-cs"/>
+      </a:defRPr>
+    </a:lvl8pPr>
+    <a:lvl9pPr marL="3657600" algn="l" defTabSz="914400" rtl="0" eaLnBrk="1" latinLnBrk="0" hangingPunct="1">
+      <a:defRPr sz="1200" kern="1200">
+        <a:solidFill>
+          <a:schemeClr val="tx1"/>
+        </a:solidFill>
+        <a:latin typeface="+mn-lt"/>
+        <a:ea typeface="+mn-ea"/>
+        <a:cs typeface="+mn-cs"/>
+      </a:defRPr>
+    </a:lvl9pPr>
+  </p:notesStyle>
+</p:notesMaster>
+</file>
+
+<file path=ppt/notesSlides/notesSlide1.xml><?xml version="1.0" encoding="utf-8"?>
+<p:notes xmlns:a="http://schemas.openxmlformats.org/drawingml/2006/main" xmlns:r="http://schemas.openxmlformats.org/officeDocument/2006/relationships" xmlns:p="http://schemas.openxmlformats.org/presentationml/2006/main">
+  <p:cSld>
+    <p:spTree>
+      <p:nvGrpSpPr>
+        <p:cNvPr id="1" name=""/>
+        <p:cNvGrpSpPr/>
+        <p:nvPr/>
+      </p:nvGrpSpPr>
+      <p:grpSpPr>
+        <a:xfrm>
+          <a:off x="0" y="0"/>
+          <a:ext cx="0" cy="0"/>
+          <a:chOff x="0" y="0"/>
+          <a:chExt cx="0" cy="0"/>
+        </a:xfrm>
+      </p:grpSpPr>
+      <p:sp>
+        <p:nvSpPr>
+          <p:cNvPr id="2" name="Diakép helye 1"/>
+          <p:cNvSpPr>
+            <a:spLocks noGrp="1" noRot="1" noChangeAspect="1"/>
+          </p:cNvSpPr>
+          <p:nvPr>
+            <p:ph type="sldImg"/>
+          </p:nvPr>
+        </p:nvSpPr>
+        <p:spPr/>
+      </p:sp>
+      <p:sp>
+        <p:nvSpPr>
+          <p:cNvPr id="3" name="Jegyzetek helye 2"/>
+          <p:cNvSpPr>
+            <a:spLocks noGrp="1"/>
+          </p:cNvSpPr>
+          <p:nvPr>
+            <p:ph type="body" idx="1"/>
+          </p:nvPr>
+        </p:nvSpPr>
+        <p:spPr/>
+        <p:txBody>
+          <a:bodyPr/>
+          <a:lstStyle/>
+          <a:p>
+            <a:pPr marL="0" marR="0" lvl="0" indent="0" algn="l" defTabSz="914400" rtl="0" eaLnBrk="1" fontAlgn="auto" latinLnBrk="0" hangingPunct="1">
+              <a:lnSpc>
+                <a:spcPct val="100000"/>
+              </a:lnSpc>
+              <a:spcBef>
+                <a:spcPts val="0"/>
+              </a:spcBef>
+              <a:spcAft>
+                <a:spcPts val="0"/>
+              </a:spcAft>
+              <a:buClrTx/>
+              <a:buSzTx/>
+              <a:buFontTx/>
+              <a:buNone/>
+              <a:tabLst/>
+              <a:defRPr/>
+            </a:pPr>
+            <a:r>
+              <a:rPr lang="hu-HU" sz="1800" kern="100" dirty="0">
+                <a:effectLst/>
+                <a:latin typeface="Aptos" panose="020B0004020202020204" pitchFamily="34" charset="0"/>
+                <a:ea typeface="Aptos" panose="020B0004020202020204" pitchFamily="34" charset="0"/>
+                <a:cs typeface="Times New Roman" panose="02020603050405020304" pitchFamily="18" charset="0"/>
+              </a:rPr>
+              <a:t>A tervezésnél nem csupán a technikai alapokra, hanem a </a:t>
+            </a:r>
+            <a:r>
+              <a:rPr lang="hu-HU" sz="1800" b="1" kern="100" dirty="0" err="1">
+                <a:effectLst/>
+                <a:latin typeface="Aptos" panose="020B0004020202020204" pitchFamily="34" charset="0"/>
+                <a:ea typeface="Aptos" panose="020B0004020202020204" pitchFamily="34" charset="0"/>
+                <a:cs typeface="Times New Roman" panose="02020603050405020304" pitchFamily="18" charset="0"/>
+              </a:rPr>
+              <a:t>Security</a:t>
+            </a:r>
+            <a:r>
+              <a:rPr lang="hu-HU" sz="1800" b="1" kern="100" dirty="0">
+                <a:effectLst/>
+                <a:latin typeface="Aptos" panose="020B0004020202020204" pitchFamily="34" charset="0"/>
+                <a:ea typeface="Aptos" panose="020B0004020202020204" pitchFamily="34" charset="0"/>
+                <a:cs typeface="Times New Roman" panose="02020603050405020304" pitchFamily="18" charset="0"/>
+              </a:rPr>
+              <a:t>-</a:t>
+            </a:r>
+            <a:r>
+              <a:rPr lang="hu-HU" sz="1800" b="1" kern="100" dirty="0" err="1">
+                <a:effectLst/>
+                <a:latin typeface="Aptos" panose="020B0004020202020204" pitchFamily="34" charset="0"/>
+                <a:ea typeface="Aptos" panose="020B0004020202020204" pitchFamily="34" charset="0"/>
+                <a:cs typeface="Times New Roman" panose="02020603050405020304" pitchFamily="18" charset="0"/>
+              </a:rPr>
+              <a:t>by</a:t>
+            </a:r>
+            <a:r>
+              <a:rPr lang="hu-HU" sz="1800" b="1" kern="100" dirty="0">
+                <a:effectLst/>
+                <a:latin typeface="Aptos" panose="020B0004020202020204" pitchFamily="34" charset="0"/>
+                <a:ea typeface="Aptos" panose="020B0004020202020204" pitchFamily="34" charset="0"/>
+                <a:cs typeface="Times New Roman" panose="02020603050405020304" pitchFamily="18" charset="0"/>
+              </a:rPr>
+              <a:t>-Design</a:t>
+            </a:r>
+            <a:r>
+              <a:rPr lang="hu-HU" sz="1800" kern="100" dirty="0">
+                <a:effectLst/>
+                <a:latin typeface="Aptos" panose="020B0004020202020204" pitchFamily="34" charset="0"/>
+                <a:ea typeface="Aptos" panose="020B0004020202020204" pitchFamily="34" charset="0"/>
+                <a:cs typeface="Times New Roman" panose="02020603050405020304" pitchFamily="18" charset="0"/>
+              </a:rPr>
+              <a:t> szemléletre fókuszáltunk, tehát a biztonságot már az architektúra szintjén integráltuk. Olyan </a:t>
+            </a:r>
+            <a:r>
+              <a:rPr lang="hu-HU" sz="1800" b="1" kern="100" dirty="0">
+                <a:effectLst/>
+                <a:latin typeface="Aptos" panose="020B0004020202020204" pitchFamily="34" charset="0"/>
+                <a:ea typeface="Aptos" panose="020B0004020202020204" pitchFamily="34" charset="0"/>
+                <a:cs typeface="Times New Roman" panose="02020603050405020304" pitchFamily="18" charset="0"/>
+              </a:rPr>
+              <a:t>moduláris és jövőálló</a:t>
+            </a:r>
+            <a:r>
+              <a:rPr lang="hu-HU" sz="1800" kern="100" dirty="0">
+                <a:effectLst/>
+                <a:latin typeface="Aptos" panose="020B0004020202020204" pitchFamily="34" charset="0"/>
+                <a:ea typeface="Aptos" panose="020B0004020202020204" pitchFamily="34" charset="0"/>
+                <a:cs typeface="Times New Roman" panose="02020603050405020304" pitchFamily="18" charset="0"/>
+              </a:rPr>
+              <a:t> struktúrát hoztunk létre, amely a </a:t>
+            </a:r>
+            <a:r>
+              <a:rPr lang="hu-HU" sz="1800" kern="100" dirty="0" err="1">
+                <a:effectLst/>
+                <a:latin typeface="Aptos" panose="020B0004020202020204" pitchFamily="34" charset="0"/>
+                <a:ea typeface="Aptos" panose="020B0004020202020204" pitchFamily="34" charset="0"/>
+                <a:cs typeface="Times New Roman" panose="02020603050405020304" pitchFamily="18" charset="0"/>
+              </a:rPr>
+              <a:t>Shadowhawk</a:t>
+            </a:r>
+            <a:r>
+              <a:rPr lang="hu-HU" sz="1800" kern="100" dirty="0">
+                <a:effectLst/>
+                <a:latin typeface="Aptos" panose="020B0004020202020204" pitchFamily="34" charset="0"/>
+                <a:ea typeface="Aptos" panose="020B0004020202020204" pitchFamily="34" charset="0"/>
+                <a:cs typeface="Times New Roman" panose="02020603050405020304" pitchFamily="18" charset="0"/>
+              </a:rPr>
+              <a:t> Fort növekedését is rugalmasan kiszolgálja, miközben a </a:t>
+            </a:r>
+            <a:r>
+              <a:rPr lang="hu-HU" sz="1800" b="1" kern="100" dirty="0">
+                <a:effectLst/>
+                <a:latin typeface="Aptos" panose="020B0004020202020204" pitchFamily="34" charset="0"/>
+                <a:ea typeface="Aptos" panose="020B0004020202020204" pitchFamily="34" charset="0"/>
+                <a:cs typeface="Times New Roman" panose="02020603050405020304" pitchFamily="18" charset="0"/>
+              </a:rPr>
+              <a:t>TCO</a:t>
+            </a:r>
+            <a:r>
+              <a:rPr lang="hu-HU" sz="1800" kern="100" dirty="0">
+                <a:effectLst/>
+                <a:latin typeface="Aptos" panose="020B0004020202020204" pitchFamily="34" charset="0"/>
+                <a:ea typeface="Aptos" panose="020B0004020202020204" pitchFamily="34" charset="0"/>
+                <a:cs typeface="Times New Roman" panose="02020603050405020304" pitchFamily="18" charset="0"/>
+              </a:rPr>
+              <a:t>, azaz a hosszú távú üzemeltetési költségek optimalizálását is szem előtt tartottuk.</a:t>
+            </a:r>
+          </a:p>
+          <a:p>
+            <a:endParaRPr lang="hu-HU" dirty="0"/>
+          </a:p>
+        </p:txBody>
+      </p:sp>
+      <p:sp>
+        <p:nvSpPr>
+          <p:cNvPr id="4" name="Dia számának helye 3"/>
+          <p:cNvSpPr>
+            <a:spLocks noGrp="1"/>
+          </p:cNvSpPr>
+          <p:nvPr>
+            <p:ph type="sldNum" sz="quarter" idx="5"/>
+          </p:nvPr>
+        </p:nvSpPr>
+        <p:spPr/>
+        <p:txBody>
+          <a:bodyPr/>
+          <a:lstStyle/>
+          <a:p>
+            <a:fld id="{1087266A-CB85-4818-B702-CBAEB43B1A09}" type="slidenum">
+              <a:rPr lang="hu-HU" smtClean="0"/>
+              <a:t>2</a:t>
+            </a:fld>
+            <a:endParaRPr lang="hu-HU"/>
+          </a:p>
+        </p:txBody>
+      </p:sp>
+    </p:spTree>
+    <p:extLst>
+      <p:ext uri="{BB962C8B-B14F-4D97-AF65-F5344CB8AC3E}">
+        <p14:creationId xmlns:p14="http://schemas.microsoft.com/office/powerpoint/2010/main" val="2930837883"/>
+      </p:ext>
+    </p:extLst>
+  </p:cSld>
+  <p:clrMapOvr>
+    <a:masterClrMapping/>
+  </p:clrMapOvr>
+</p:notes>
+</file>
+
+<file path=ppt/notesSlides/notesSlide10.xml><?xml version="1.0" encoding="utf-8"?>
+<p:notes xmlns:a="http://schemas.openxmlformats.org/drawingml/2006/main" xmlns:r="http://schemas.openxmlformats.org/officeDocument/2006/relationships" xmlns:p="http://schemas.openxmlformats.org/presentationml/2006/main">
+  <p:cSld>
+    <p:spTree>
+      <p:nvGrpSpPr>
+        <p:cNvPr id="1" name=""/>
+        <p:cNvGrpSpPr/>
+        <p:nvPr/>
+      </p:nvGrpSpPr>
+      <p:grpSpPr>
+        <a:xfrm>
+          <a:off x="0" y="0"/>
+          <a:ext cx="0" cy="0"/>
+          <a:chOff x="0" y="0"/>
+          <a:chExt cx="0" cy="0"/>
+        </a:xfrm>
+      </p:grpSpPr>
+      <p:sp>
+        <p:nvSpPr>
+          <p:cNvPr id="2" name="Diakép helye 1"/>
+          <p:cNvSpPr>
+            <a:spLocks noGrp="1" noRot="1" noChangeAspect="1"/>
+          </p:cNvSpPr>
+          <p:nvPr>
+            <p:ph type="sldImg"/>
+          </p:nvPr>
+        </p:nvSpPr>
+        <p:spPr/>
+      </p:sp>
+      <p:sp>
+        <p:nvSpPr>
+          <p:cNvPr id="3" name="Jegyzetek helye 2"/>
+          <p:cNvSpPr>
+            <a:spLocks noGrp="1"/>
+          </p:cNvSpPr>
+          <p:nvPr>
+            <p:ph type="body" idx="1"/>
+          </p:nvPr>
+        </p:nvSpPr>
+        <p:spPr/>
+        <p:txBody>
+          <a:bodyPr/>
+          <a:lstStyle/>
+          <a:p>
+            <a:pPr marL="0" marR="0" lvl="0" indent="0" algn="l" defTabSz="914400" rtl="0" eaLnBrk="1" fontAlgn="auto" latinLnBrk="0" hangingPunct="1">
+              <a:lnSpc>
+                <a:spcPct val="100000"/>
+              </a:lnSpc>
+              <a:spcBef>
+                <a:spcPts val="0"/>
+              </a:spcBef>
+              <a:spcAft>
+                <a:spcPts val="0"/>
+              </a:spcAft>
+              <a:buClrTx/>
+              <a:buSzTx/>
+              <a:buFontTx/>
+              <a:buNone/>
+              <a:tabLst/>
+              <a:defRPr/>
+            </a:pPr>
+            <a:r>
+              <a:rPr lang="hu-HU" dirty="0"/>
+              <a:t>MARCI -- </a:t>
+            </a:r>
+            <a:r>
+              <a:rPr lang="hu-HU" sz="1800" kern="100" dirty="0">
+                <a:effectLst/>
+                <a:latin typeface="Aptos" panose="020B0004020202020204" pitchFamily="34" charset="0"/>
+                <a:ea typeface="Aptos" panose="020B0004020202020204" pitchFamily="34" charset="0"/>
+                <a:cs typeface="Times New Roman" panose="02020603050405020304" pitchFamily="18" charset="0"/>
+              </a:rPr>
+              <a:t>A raktári hálózatnál egy vegyes megoldást alkalmaztunk a forgalomirányításra. A belső kommunikáció és az alapértelmezett hálózati elérés a </a:t>
+            </a:r>
+            <a:r>
+              <a:rPr lang="hu-HU" sz="1800" b="1" kern="100" dirty="0">
+                <a:effectLst/>
+                <a:latin typeface="Aptos" panose="020B0004020202020204" pitchFamily="34" charset="0"/>
+                <a:ea typeface="Aptos" panose="020B0004020202020204" pitchFamily="34" charset="0"/>
+                <a:cs typeface="Times New Roman" panose="02020603050405020304" pitchFamily="18" charset="0"/>
+              </a:rPr>
+              <a:t>dinamikus </a:t>
+            </a:r>
+            <a:r>
+              <a:rPr lang="hu-HU" sz="1800" b="1" kern="100" dirty="0" err="1">
+                <a:effectLst/>
+                <a:latin typeface="Aptos" panose="020B0004020202020204" pitchFamily="34" charset="0"/>
+                <a:ea typeface="Aptos" panose="020B0004020202020204" pitchFamily="34" charset="0"/>
+                <a:cs typeface="Times New Roman" panose="02020603050405020304" pitchFamily="18" charset="0"/>
+              </a:rPr>
+              <a:t>routingon</a:t>
+            </a:r>
+            <a:r>
+              <a:rPr lang="hu-HU" sz="1800" kern="100" dirty="0">
+                <a:effectLst/>
+                <a:latin typeface="Aptos" panose="020B0004020202020204" pitchFamily="34" charset="0"/>
+                <a:ea typeface="Aptos" panose="020B0004020202020204" pitchFamily="34" charset="0"/>
+                <a:cs typeface="Times New Roman" panose="02020603050405020304" pitchFamily="18" charset="0"/>
+              </a:rPr>
+              <a:t> alapul, ami automatikusan tartja naprakészen az útvonalakat. Viszont a </a:t>
+            </a:r>
+            <a:r>
+              <a:rPr lang="hu-HU" sz="1800" b="1" kern="100" dirty="0">
+                <a:effectLst/>
+                <a:latin typeface="Aptos" panose="020B0004020202020204" pitchFamily="34" charset="0"/>
+                <a:ea typeface="Aptos" panose="020B0004020202020204" pitchFamily="34" charset="0"/>
+                <a:cs typeface="Times New Roman" panose="02020603050405020304" pitchFamily="18" charset="0"/>
+              </a:rPr>
+              <a:t>statikus címfordítás (NAT)</a:t>
+            </a:r>
+            <a:r>
+              <a:rPr lang="hu-HU" sz="1800" kern="100" dirty="0">
+                <a:effectLst/>
+                <a:latin typeface="Aptos" panose="020B0004020202020204" pitchFamily="34" charset="0"/>
+                <a:ea typeface="Aptos" panose="020B0004020202020204" pitchFamily="34" charset="0"/>
+                <a:cs typeface="Times New Roman" panose="02020603050405020304" pitchFamily="18" charset="0"/>
+              </a:rPr>
+              <a:t> mellé </a:t>
+            </a:r>
+            <a:r>
+              <a:rPr lang="hu-HU" sz="1800" b="1" kern="100" dirty="0">
+                <a:effectLst/>
+                <a:latin typeface="Aptos" panose="020B0004020202020204" pitchFamily="34" charset="0"/>
+                <a:ea typeface="Aptos" panose="020B0004020202020204" pitchFamily="34" charset="0"/>
+                <a:cs typeface="Times New Roman" panose="02020603050405020304" pitchFamily="18" charset="0"/>
+              </a:rPr>
+              <a:t>statikus </a:t>
+            </a:r>
+            <a:r>
+              <a:rPr lang="hu-HU" sz="1800" b="1" kern="100" dirty="0" err="1">
+                <a:effectLst/>
+                <a:latin typeface="Aptos" panose="020B0004020202020204" pitchFamily="34" charset="0"/>
+                <a:ea typeface="Aptos" panose="020B0004020202020204" pitchFamily="34" charset="0"/>
+                <a:cs typeface="Times New Roman" panose="02020603050405020304" pitchFamily="18" charset="0"/>
+              </a:rPr>
+              <a:t>routingot</a:t>
+            </a:r>
+            <a:r>
+              <a:rPr lang="hu-HU" sz="1800" kern="100" dirty="0">
+                <a:effectLst/>
+                <a:latin typeface="Aptos" panose="020B0004020202020204" pitchFamily="34" charset="0"/>
+                <a:ea typeface="Aptos" panose="020B0004020202020204" pitchFamily="34" charset="0"/>
+                <a:cs typeface="Times New Roman" panose="02020603050405020304" pitchFamily="18" charset="0"/>
+              </a:rPr>
+              <a:t> is beállítottunk: ez garantálja, hogy a lefordított, fix külső címekre érkező kérések mindig tűpontosan és stabilan célba érjenek. Ez a kettős megoldás biztosítja, hogy a raktárirányítási rendszerünk és a szerverek elérése akkor is zavartalan maradjon, ha a hálózat többi része éppen dinamikusan változik.</a:t>
+            </a:r>
+          </a:p>
+          <a:p>
+            <a:endParaRPr lang="hu-HU" dirty="0"/>
+          </a:p>
+        </p:txBody>
+      </p:sp>
+      <p:sp>
+        <p:nvSpPr>
+          <p:cNvPr id="4" name="Dia számának helye 3"/>
+          <p:cNvSpPr>
+            <a:spLocks noGrp="1"/>
+          </p:cNvSpPr>
+          <p:nvPr>
+            <p:ph type="sldNum" sz="quarter" idx="5"/>
+          </p:nvPr>
+        </p:nvSpPr>
+        <p:spPr/>
+        <p:txBody>
+          <a:bodyPr/>
+          <a:lstStyle/>
+          <a:p>
+            <a:fld id="{1087266A-CB85-4818-B702-CBAEB43B1A09}" type="slidenum">
+              <a:rPr lang="hu-HU" smtClean="0"/>
+              <a:t>11</a:t>
+            </a:fld>
+            <a:endParaRPr lang="hu-HU"/>
+          </a:p>
+        </p:txBody>
+      </p:sp>
+    </p:spTree>
+    <p:extLst>
+      <p:ext uri="{BB962C8B-B14F-4D97-AF65-F5344CB8AC3E}">
+        <p14:creationId xmlns:p14="http://schemas.microsoft.com/office/powerpoint/2010/main" val="1914405622"/>
+      </p:ext>
+    </p:extLst>
+  </p:cSld>
+  <p:clrMapOvr>
+    <a:masterClrMapping/>
+  </p:clrMapOvr>
+</p:notes>
+</file>
+
+<file path=ppt/notesSlides/notesSlide11.xml><?xml version="1.0" encoding="utf-8"?>
+<p:notes xmlns:a="http://schemas.openxmlformats.org/drawingml/2006/main" xmlns:r="http://schemas.openxmlformats.org/officeDocument/2006/relationships" xmlns:p="http://schemas.openxmlformats.org/presentationml/2006/main">
+  <p:cSld>
+    <p:spTree>
+      <p:nvGrpSpPr>
+        <p:cNvPr id="1" name=""/>
+        <p:cNvGrpSpPr/>
+        <p:nvPr/>
+      </p:nvGrpSpPr>
+      <p:grpSpPr>
+        <a:xfrm>
+          <a:off x="0" y="0"/>
+          <a:ext cx="0" cy="0"/>
+          <a:chOff x="0" y="0"/>
+          <a:chExt cx="0" cy="0"/>
+        </a:xfrm>
+      </p:grpSpPr>
+      <p:sp>
+        <p:nvSpPr>
+          <p:cNvPr id="2" name="Diakép helye 1"/>
+          <p:cNvSpPr>
+            <a:spLocks noGrp="1" noRot="1" noChangeAspect="1"/>
+          </p:cNvSpPr>
+          <p:nvPr>
+            <p:ph type="sldImg"/>
+          </p:nvPr>
+        </p:nvSpPr>
+        <p:spPr/>
+      </p:sp>
+      <p:sp>
+        <p:nvSpPr>
+          <p:cNvPr id="3" name="Jegyzetek helye 2"/>
+          <p:cNvSpPr>
+            <a:spLocks noGrp="1"/>
+          </p:cNvSpPr>
+          <p:nvPr>
+            <p:ph type="body" idx="1"/>
+          </p:nvPr>
+        </p:nvSpPr>
+        <p:spPr/>
+        <p:txBody>
+          <a:bodyPr/>
+          <a:lstStyle/>
+          <a:p>
+            <a:pPr marL="0" marR="0" lvl="0" indent="0" algn="l" defTabSz="914400" rtl="0" eaLnBrk="1" fontAlgn="auto" latinLnBrk="0" hangingPunct="1">
+              <a:lnSpc>
+                <a:spcPct val="100000"/>
+              </a:lnSpc>
+              <a:spcBef>
+                <a:spcPts val="0"/>
+              </a:spcBef>
+              <a:spcAft>
+                <a:spcPts val="0"/>
+              </a:spcAft>
+              <a:buClrTx/>
+              <a:buSzTx/>
+              <a:buFontTx/>
+              <a:buNone/>
+              <a:tabLst/>
+              <a:defRPr/>
+            </a:pPr>
+            <a:r>
+              <a:rPr lang="hu-HU" dirty="0"/>
+              <a:t>PATRIK -- </a:t>
+            </a:r>
+            <a:r>
+              <a:rPr lang="hu-HU" sz="1800" kern="100" dirty="0">
+                <a:effectLst/>
+                <a:latin typeface="Aptos" panose="020B0004020202020204" pitchFamily="34" charset="0"/>
+                <a:ea typeface="Aptos" panose="020B0004020202020204" pitchFamily="34" charset="0"/>
+                <a:cs typeface="Times New Roman" panose="02020603050405020304" pitchFamily="18" charset="0"/>
+              </a:rPr>
+              <a:t>A hangároknál a leglátványosabb az </a:t>
+            </a:r>
+            <a:r>
+              <a:rPr lang="hu-HU" sz="1800" b="1" kern="100" dirty="0" err="1">
+                <a:effectLst/>
+                <a:latin typeface="Aptos" panose="020B0004020202020204" pitchFamily="34" charset="0"/>
+                <a:ea typeface="Aptos" panose="020B0004020202020204" pitchFamily="34" charset="0"/>
+                <a:cs typeface="Times New Roman" panose="02020603050405020304" pitchFamily="18" charset="0"/>
+              </a:rPr>
+              <a:t>IoT</a:t>
+            </a:r>
+            <a:r>
+              <a:rPr lang="hu-HU" sz="1800" b="1" kern="100" dirty="0">
+                <a:effectLst/>
+                <a:latin typeface="Aptos" panose="020B0004020202020204" pitchFamily="34" charset="0"/>
+                <a:ea typeface="Aptos" panose="020B0004020202020204" pitchFamily="34" charset="0"/>
+                <a:cs typeface="Times New Roman" panose="02020603050405020304" pitchFamily="18" charset="0"/>
+              </a:rPr>
+              <a:t> integráció</a:t>
+            </a:r>
+            <a:r>
+              <a:rPr lang="hu-HU" sz="1800" kern="100" dirty="0">
+                <a:effectLst/>
+                <a:latin typeface="Aptos" panose="020B0004020202020204" pitchFamily="34" charset="0"/>
+                <a:ea typeface="Aptos" panose="020B0004020202020204" pitchFamily="34" charset="0"/>
+                <a:cs typeface="Times New Roman" panose="02020603050405020304" pitchFamily="18" charset="0"/>
+              </a:rPr>
+              <a:t>: a garázskapukat okos eszközökként kezeltük, amik közvetlenül a hálózati </a:t>
+            </a:r>
+            <a:r>
+              <a:rPr lang="hu-HU" sz="1800" b="1" kern="100" dirty="0" err="1">
+                <a:effectLst/>
+                <a:latin typeface="Aptos" panose="020B0004020202020204" pitchFamily="34" charset="0"/>
+                <a:ea typeface="Aptos" panose="020B0004020202020204" pitchFamily="34" charset="0"/>
+                <a:cs typeface="Times New Roman" panose="02020603050405020304" pitchFamily="18" charset="0"/>
+              </a:rPr>
+              <a:t>IoT</a:t>
+            </a:r>
+            <a:r>
+              <a:rPr lang="hu-HU" sz="1800" b="1" kern="100" dirty="0">
+                <a:effectLst/>
+                <a:latin typeface="Aptos" panose="020B0004020202020204" pitchFamily="34" charset="0"/>
+                <a:ea typeface="Aptos" panose="020B0004020202020204" pitchFamily="34" charset="0"/>
+                <a:cs typeface="Times New Roman" panose="02020603050405020304" pitchFamily="18" charset="0"/>
+              </a:rPr>
+              <a:t> szerverre</a:t>
+            </a:r>
+            <a:r>
+              <a:rPr lang="hu-HU" sz="1800" kern="100" dirty="0">
+                <a:effectLst/>
+                <a:latin typeface="Aptos" panose="020B0004020202020204" pitchFamily="34" charset="0"/>
+                <a:ea typeface="Aptos" panose="020B0004020202020204" pitchFamily="34" charset="0"/>
+                <a:cs typeface="Times New Roman" panose="02020603050405020304" pitchFamily="18" charset="0"/>
+              </a:rPr>
+              <a:t> csatlakoznak. Ez lehetővé teszi a kapuk távoli, automatizált vezérlését és állapotuk monitorozását. Itt is a kettős </a:t>
+            </a:r>
+            <a:r>
+              <a:rPr lang="hu-HU" sz="1800" kern="100" dirty="0" err="1">
+                <a:effectLst/>
+                <a:latin typeface="Aptos" panose="020B0004020202020204" pitchFamily="34" charset="0"/>
+                <a:ea typeface="Aptos" panose="020B0004020202020204" pitchFamily="34" charset="0"/>
+                <a:cs typeface="Times New Roman" panose="02020603050405020304" pitchFamily="18" charset="0"/>
+              </a:rPr>
+              <a:t>routing</a:t>
+            </a:r>
+            <a:r>
+              <a:rPr lang="hu-HU" sz="1800" kern="100" dirty="0">
+                <a:effectLst/>
+                <a:latin typeface="Aptos" panose="020B0004020202020204" pitchFamily="34" charset="0"/>
+                <a:ea typeface="Aptos" panose="020B0004020202020204" pitchFamily="34" charset="0"/>
+                <a:cs typeface="Times New Roman" panose="02020603050405020304" pitchFamily="18" charset="0"/>
+              </a:rPr>
+              <a:t> elvét követtük: a belső forgalmat a </a:t>
+            </a:r>
+            <a:r>
+              <a:rPr lang="hu-HU" sz="1800" b="1" kern="100" dirty="0">
+                <a:effectLst/>
+                <a:latin typeface="Aptos" panose="020B0004020202020204" pitchFamily="34" charset="0"/>
+                <a:ea typeface="Aptos" panose="020B0004020202020204" pitchFamily="34" charset="0"/>
+                <a:cs typeface="Times New Roman" panose="02020603050405020304" pitchFamily="18" charset="0"/>
+              </a:rPr>
+              <a:t>dinamikus </a:t>
+            </a:r>
+            <a:r>
+              <a:rPr lang="hu-HU" sz="1800" b="1" kern="100" dirty="0" err="1">
+                <a:effectLst/>
+                <a:latin typeface="Aptos" panose="020B0004020202020204" pitchFamily="34" charset="0"/>
+                <a:ea typeface="Aptos" panose="020B0004020202020204" pitchFamily="34" charset="0"/>
+                <a:cs typeface="Times New Roman" panose="02020603050405020304" pitchFamily="18" charset="0"/>
+              </a:rPr>
+              <a:t>routing</a:t>
+            </a:r>
+            <a:r>
+              <a:rPr lang="hu-HU" sz="1800" kern="100" dirty="0">
+                <a:effectLst/>
+                <a:latin typeface="Aptos" panose="020B0004020202020204" pitchFamily="34" charset="0"/>
+                <a:ea typeface="Aptos" panose="020B0004020202020204" pitchFamily="34" charset="0"/>
+                <a:cs typeface="Times New Roman" panose="02020603050405020304" pitchFamily="18" charset="0"/>
+              </a:rPr>
+              <a:t> kezeli, míg a külső eléréshez és a specifikus kapuvezérlő jelekhez a </a:t>
+            </a:r>
+            <a:r>
+              <a:rPr lang="hu-HU" sz="1800" b="1" kern="100" dirty="0">
+                <a:effectLst/>
+                <a:latin typeface="Aptos" panose="020B0004020202020204" pitchFamily="34" charset="0"/>
+                <a:ea typeface="Aptos" panose="020B0004020202020204" pitchFamily="34" charset="0"/>
+                <a:cs typeface="Times New Roman" panose="02020603050405020304" pitchFamily="18" charset="0"/>
+              </a:rPr>
+              <a:t>statikus útvonalakat</a:t>
+            </a:r>
+            <a:r>
+              <a:rPr lang="hu-HU" sz="1800" kern="100" dirty="0">
+                <a:effectLst/>
+                <a:latin typeface="Aptos" panose="020B0004020202020204" pitchFamily="34" charset="0"/>
+                <a:ea typeface="Aptos" panose="020B0004020202020204" pitchFamily="34" charset="0"/>
+                <a:cs typeface="Times New Roman" panose="02020603050405020304" pitchFamily="18" charset="0"/>
+              </a:rPr>
+              <a:t> és a </a:t>
+            </a:r>
+            <a:r>
+              <a:rPr lang="hu-HU" sz="1800" b="1" kern="100" dirty="0">
+                <a:effectLst/>
+                <a:latin typeface="Aptos" panose="020B0004020202020204" pitchFamily="34" charset="0"/>
+                <a:ea typeface="Aptos" panose="020B0004020202020204" pitchFamily="34" charset="0"/>
+                <a:cs typeface="Times New Roman" panose="02020603050405020304" pitchFamily="18" charset="0"/>
+              </a:rPr>
+              <a:t>dinamikus címfordítást</a:t>
+            </a:r>
+            <a:r>
+              <a:rPr lang="hu-HU" sz="1800" kern="100" dirty="0">
+                <a:effectLst/>
+                <a:latin typeface="Aptos" panose="020B0004020202020204" pitchFamily="34" charset="0"/>
+                <a:ea typeface="Aptos" panose="020B0004020202020204" pitchFamily="34" charset="0"/>
+                <a:cs typeface="Times New Roman" panose="02020603050405020304" pitchFamily="18" charset="0"/>
+              </a:rPr>
+              <a:t> hívtuk segítségül. Így értük el, hogy a nagy kiterjedésű hangár-területen is minden szenzor és kapu stabilan, késleltetés nélkül reagáljon a parancsokra.</a:t>
+            </a:r>
+          </a:p>
+          <a:p>
+            <a:endParaRPr lang="hu-HU" dirty="0"/>
+          </a:p>
+        </p:txBody>
+      </p:sp>
+      <p:sp>
+        <p:nvSpPr>
+          <p:cNvPr id="4" name="Dia számának helye 3"/>
+          <p:cNvSpPr>
+            <a:spLocks noGrp="1"/>
+          </p:cNvSpPr>
+          <p:nvPr>
+            <p:ph type="sldNum" sz="quarter" idx="5"/>
+          </p:nvPr>
+        </p:nvSpPr>
+        <p:spPr/>
+        <p:txBody>
+          <a:bodyPr/>
+          <a:lstStyle/>
+          <a:p>
+            <a:fld id="{1087266A-CB85-4818-B702-CBAEB43B1A09}" type="slidenum">
+              <a:rPr lang="hu-HU" smtClean="0"/>
+              <a:t>12</a:t>
+            </a:fld>
+            <a:endParaRPr lang="hu-HU"/>
+          </a:p>
+        </p:txBody>
+      </p:sp>
+    </p:spTree>
+    <p:extLst>
+      <p:ext uri="{BB962C8B-B14F-4D97-AF65-F5344CB8AC3E}">
+        <p14:creationId xmlns:p14="http://schemas.microsoft.com/office/powerpoint/2010/main" val="3230135494"/>
+      </p:ext>
+    </p:extLst>
+  </p:cSld>
+  <p:clrMapOvr>
+    <a:masterClrMapping/>
+  </p:clrMapOvr>
+</p:notes>
+</file>
+
+<file path=ppt/notesSlides/notesSlide12.xml><?xml version="1.0" encoding="utf-8"?>
+<p:notes xmlns:a="http://schemas.openxmlformats.org/drawingml/2006/main" xmlns:r="http://schemas.openxmlformats.org/officeDocument/2006/relationships" xmlns:p="http://schemas.openxmlformats.org/presentationml/2006/main">
+  <p:cSld>
+    <p:spTree>
+      <p:nvGrpSpPr>
+        <p:cNvPr id="1" name=""/>
+        <p:cNvGrpSpPr/>
+        <p:nvPr/>
+      </p:nvGrpSpPr>
+      <p:grpSpPr>
+        <a:xfrm>
+          <a:off x="0" y="0"/>
+          <a:ext cx="0" cy="0"/>
+          <a:chOff x="0" y="0"/>
+          <a:chExt cx="0" cy="0"/>
+        </a:xfrm>
+      </p:grpSpPr>
+      <p:sp>
+        <p:nvSpPr>
+          <p:cNvPr id="2" name="Diakép helye 1"/>
+          <p:cNvSpPr>
+            <a:spLocks noGrp="1" noRot="1" noChangeAspect="1"/>
+          </p:cNvSpPr>
+          <p:nvPr>
+            <p:ph type="sldImg"/>
+          </p:nvPr>
+        </p:nvSpPr>
+        <p:spPr/>
+      </p:sp>
+      <p:sp>
+        <p:nvSpPr>
+          <p:cNvPr id="3" name="Jegyzetek helye 2"/>
+          <p:cNvSpPr>
+            <a:spLocks noGrp="1"/>
+          </p:cNvSpPr>
+          <p:nvPr>
+            <p:ph type="body" idx="1"/>
+          </p:nvPr>
+        </p:nvSpPr>
+        <p:spPr/>
+        <p:txBody>
+          <a:bodyPr/>
+          <a:lstStyle/>
+          <a:p>
+            <a:pPr marL="0" marR="0" lvl="0" indent="0" algn="l" defTabSz="914400" rtl="0" eaLnBrk="1" fontAlgn="auto" latinLnBrk="0" hangingPunct="1">
+              <a:lnSpc>
+                <a:spcPct val="100000"/>
+              </a:lnSpc>
+              <a:spcBef>
+                <a:spcPts val="0"/>
+              </a:spcBef>
+              <a:spcAft>
+                <a:spcPts val="0"/>
+              </a:spcAft>
+              <a:buClrTx/>
+              <a:buSzTx/>
+              <a:buFontTx/>
+              <a:buNone/>
+              <a:tabLst/>
+              <a:defRPr/>
+            </a:pPr>
+            <a:r>
+              <a:rPr lang="hu-HU" dirty="0"/>
+              <a:t>MARCI -- </a:t>
+            </a:r>
+            <a:r>
+              <a:rPr lang="hu-HU" sz="1800" kern="100" dirty="0">
+                <a:effectLst/>
+                <a:latin typeface="Aptos" panose="020B0004020202020204" pitchFamily="34" charset="0"/>
+                <a:ea typeface="Aptos" panose="020B0004020202020204" pitchFamily="34" charset="0"/>
+                <a:cs typeface="Times New Roman" panose="02020603050405020304" pitchFamily="18" charset="0"/>
+              </a:rPr>
+              <a:t>Az </a:t>
+            </a:r>
+            <a:r>
+              <a:rPr lang="hu-HU" sz="1800" kern="100" dirty="0" err="1">
+                <a:effectLst/>
+                <a:latin typeface="Aptos" panose="020B0004020202020204" pitchFamily="34" charset="0"/>
+                <a:ea typeface="Aptos" panose="020B0004020202020204" pitchFamily="34" charset="0"/>
+                <a:cs typeface="Times New Roman" panose="02020603050405020304" pitchFamily="18" charset="0"/>
+              </a:rPr>
+              <a:t>Admin</a:t>
+            </a:r>
+            <a:r>
+              <a:rPr lang="hu-HU" sz="1800" kern="100" dirty="0">
+                <a:effectLst/>
+                <a:latin typeface="Aptos" panose="020B0004020202020204" pitchFamily="34" charset="0"/>
+                <a:ea typeface="Aptos" panose="020B0004020202020204" pitchFamily="34" charset="0"/>
+                <a:cs typeface="Times New Roman" panose="02020603050405020304" pitchFamily="18" charset="0"/>
+              </a:rPr>
+              <a:t> Szoba a hálózatunk igazi irányítóközpontja, ahol a legmodernebb </a:t>
+            </a:r>
+            <a:r>
+              <a:rPr lang="hu-HU" sz="1800" b="1" kern="100" dirty="0" err="1">
+                <a:effectLst/>
+                <a:latin typeface="Aptos" panose="020B0004020202020204" pitchFamily="34" charset="0"/>
+                <a:ea typeface="Aptos" panose="020B0004020202020204" pitchFamily="34" charset="0"/>
+                <a:cs typeface="Times New Roman" panose="02020603050405020304" pitchFamily="18" charset="0"/>
+              </a:rPr>
+              <a:t>Dual</a:t>
+            </a:r>
+            <a:r>
+              <a:rPr lang="hu-HU" sz="1800" b="1" kern="100" dirty="0">
+                <a:effectLst/>
+                <a:latin typeface="Aptos" panose="020B0004020202020204" pitchFamily="34" charset="0"/>
+                <a:ea typeface="Aptos" panose="020B0004020202020204" pitchFamily="34" charset="0"/>
+                <a:cs typeface="Times New Roman" panose="02020603050405020304" pitchFamily="18" charset="0"/>
+              </a:rPr>
+              <a:t> </a:t>
+            </a:r>
+            <a:r>
+              <a:rPr lang="hu-HU" sz="1800" b="1" kern="100" dirty="0" err="1">
+                <a:effectLst/>
+                <a:latin typeface="Aptos" panose="020B0004020202020204" pitchFamily="34" charset="0"/>
+                <a:ea typeface="Aptos" panose="020B0004020202020204" pitchFamily="34" charset="0"/>
+                <a:cs typeface="Times New Roman" panose="02020603050405020304" pitchFamily="18" charset="0"/>
+              </a:rPr>
+              <a:t>Stack</a:t>
+            </a:r>
+            <a:r>
+              <a:rPr lang="hu-HU" sz="1800" kern="100" dirty="0">
+                <a:effectLst/>
+                <a:latin typeface="Aptos" panose="020B0004020202020204" pitchFamily="34" charset="0"/>
+                <a:ea typeface="Aptos" panose="020B0004020202020204" pitchFamily="34" charset="0"/>
+                <a:cs typeface="Times New Roman" panose="02020603050405020304" pitchFamily="18" charset="0"/>
+              </a:rPr>
+              <a:t> megoldást alkalmaztuk. Ez a gyakorlatban azt jelenti, hogy a rendszerünk párhuzamosan, teljes harmóniában kezeli az </a:t>
+            </a:r>
+            <a:r>
+              <a:rPr lang="hu-HU" sz="1800" b="1" kern="100" dirty="0">
+                <a:effectLst/>
+                <a:latin typeface="Aptos" panose="020B0004020202020204" pitchFamily="34" charset="0"/>
+                <a:ea typeface="Aptos" panose="020B0004020202020204" pitchFamily="34" charset="0"/>
+                <a:cs typeface="Times New Roman" panose="02020603050405020304" pitchFamily="18" charset="0"/>
+              </a:rPr>
+              <a:t>IPv4 és IPv6</a:t>
+            </a:r>
+            <a:r>
+              <a:rPr lang="hu-HU" sz="1800" kern="100" dirty="0">
+                <a:effectLst/>
+                <a:latin typeface="Aptos" panose="020B0004020202020204" pitchFamily="34" charset="0"/>
+                <a:ea typeface="Aptos" panose="020B0004020202020204" pitchFamily="34" charset="0"/>
+                <a:cs typeface="Times New Roman" panose="02020603050405020304" pitchFamily="18" charset="0"/>
+              </a:rPr>
+              <a:t> címzést, így biztosítva, hogy a hálózat minden egyes pontja bárhonnan elérhető és menedzselhető legyen. A szoba technikai lelke egy nagy teljesítményű </a:t>
+            </a:r>
+            <a:r>
+              <a:rPr lang="hu-HU" sz="1800" b="1" kern="100" dirty="0" err="1">
+                <a:effectLst/>
+                <a:latin typeface="Aptos" panose="020B0004020202020204" pitchFamily="34" charset="0"/>
+                <a:ea typeface="Aptos" panose="020B0004020202020204" pitchFamily="34" charset="0"/>
+                <a:cs typeface="Times New Roman" panose="02020603050405020304" pitchFamily="18" charset="0"/>
+              </a:rPr>
+              <a:t>Multilayer</a:t>
+            </a:r>
+            <a:r>
+              <a:rPr lang="hu-HU" sz="1800" b="1" kern="100" dirty="0">
+                <a:effectLst/>
+                <a:latin typeface="Aptos" panose="020B0004020202020204" pitchFamily="34" charset="0"/>
+                <a:ea typeface="Aptos" panose="020B0004020202020204" pitchFamily="34" charset="0"/>
+                <a:cs typeface="Times New Roman" panose="02020603050405020304" pitchFamily="18" charset="0"/>
+              </a:rPr>
+              <a:t> </a:t>
+            </a:r>
+            <a:r>
+              <a:rPr lang="hu-HU" sz="1800" b="1" kern="100" dirty="0" err="1">
+                <a:effectLst/>
+                <a:latin typeface="Aptos" panose="020B0004020202020204" pitchFamily="34" charset="0"/>
+                <a:ea typeface="Aptos" panose="020B0004020202020204" pitchFamily="34" charset="0"/>
+                <a:cs typeface="Times New Roman" panose="02020603050405020304" pitchFamily="18" charset="0"/>
+              </a:rPr>
+              <a:t>Switch</a:t>
+            </a:r>
+            <a:r>
+              <a:rPr lang="hu-HU" sz="1800" kern="100" dirty="0">
+                <a:effectLst/>
+                <a:latin typeface="Aptos" panose="020B0004020202020204" pitchFamily="34" charset="0"/>
+                <a:ea typeface="Aptos" panose="020B0004020202020204" pitchFamily="34" charset="0"/>
+                <a:cs typeface="Times New Roman" panose="02020603050405020304" pitchFamily="18" charset="0"/>
+              </a:rPr>
+              <a:t>, ami messze túlmutat egy egyszerű elosztón: ez az eszköz végzi a magas szintű forgalomirányítást és köti össze a különböző részlegeket. A </a:t>
+            </a:r>
+            <a:r>
+              <a:rPr lang="hu-HU" sz="1800" b="1" kern="100" dirty="0">
+                <a:effectLst/>
+                <a:latin typeface="Aptos" panose="020B0004020202020204" pitchFamily="34" charset="0"/>
+                <a:ea typeface="Aptos" panose="020B0004020202020204" pitchFamily="34" charset="0"/>
+                <a:cs typeface="Times New Roman" panose="02020603050405020304" pitchFamily="18" charset="0"/>
+              </a:rPr>
+              <a:t>dinamikus </a:t>
+            </a:r>
+            <a:r>
+              <a:rPr lang="hu-HU" sz="1800" b="1" kern="100" dirty="0" err="1">
+                <a:effectLst/>
+                <a:latin typeface="Aptos" panose="020B0004020202020204" pitchFamily="34" charset="0"/>
+                <a:ea typeface="Aptos" panose="020B0004020202020204" pitchFamily="34" charset="0"/>
+                <a:cs typeface="Times New Roman" panose="02020603050405020304" pitchFamily="18" charset="0"/>
+              </a:rPr>
+              <a:t>routinggal</a:t>
+            </a:r>
+            <a:r>
+              <a:rPr lang="hu-HU" sz="1800" kern="100" dirty="0">
+                <a:effectLst/>
+                <a:latin typeface="Aptos" panose="020B0004020202020204" pitchFamily="34" charset="0"/>
+                <a:ea typeface="Aptos" panose="020B0004020202020204" pitchFamily="34" charset="0"/>
+                <a:cs typeface="Times New Roman" panose="02020603050405020304" pitchFamily="18" charset="0"/>
+              </a:rPr>
+              <a:t> kiegészülve ez a felállás garantálja, hogy az </a:t>
+            </a:r>
+            <a:r>
+              <a:rPr lang="hu-HU" sz="1800" kern="100" dirty="0" err="1">
+                <a:effectLst/>
+                <a:latin typeface="Aptos" panose="020B0004020202020204" pitchFamily="34" charset="0"/>
+                <a:ea typeface="Aptos" panose="020B0004020202020204" pitchFamily="34" charset="0"/>
+                <a:cs typeface="Times New Roman" panose="02020603050405020304" pitchFamily="18" charset="0"/>
+              </a:rPr>
+              <a:t>Admin</a:t>
+            </a:r>
+            <a:r>
+              <a:rPr lang="hu-HU" sz="1800" kern="100" dirty="0">
+                <a:effectLst/>
+                <a:latin typeface="Aptos" panose="020B0004020202020204" pitchFamily="34" charset="0"/>
+                <a:ea typeface="Aptos" panose="020B0004020202020204" pitchFamily="34" charset="0"/>
+                <a:cs typeface="Times New Roman" panose="02020603050405020304" pitchFamily="18" charset="0"/>
+              </a:rPr>
+              <a:t> Szobából teljes rálátásunk legyen a rendszerre, és bármilyen távoli végpontot – legyen az a hangár vagy az egészségügyi részleg – azonnal, késleltetés nélkül elérjünk, ha beavatkozásra vagy konfigurációra van szükség.</a:t>
+            </a:r>
+          </a:p>
+          <a:p>
+            <a:endParaRPr lang="hu-HU" dirty="0"/>
+          </a:p>
+        </p:txBody>
+      </p:sp>
+      <p:sp>
+        <p:nvSpPr>
+          <p:cNvPr id="4" name="Dia számának helye 3"/>
+          <p:cNvSpPr>
+            <a:spLocks noGrp="1"/>
+          </p:cNvSpPr>
+          <p:nvPr>
+            <p:ph type="sldNum" sz="quarter" idx="5"/>
+          </p:nvPr>
+        </p:nvSpPr>
+        <p:spPr/>
+        <p:txBody>
+          <a:bodyPr/>
+          <a:lstStyle/>
+          <a:p>
+            <a:fld id="{1087266A-CB85-4818-B702-CBAEB43B1A09}" type="slidenum">
+              <a:rPr lang="hu-HU" smtClean="0"/>
+              <a:t>13</a:t>
+            </a:fld>
+            <a:endParaRPr lang="hu-HU"/>
+          </a:p>
+        </p:txBody>
+      </p:sp>
+    </p:spTree>
+    <p:extLst>
+      <p:ext uri="{BB962C8B-B14F-4D97-AF65-F5344CB8AC3E}">
+        <p14:creationId xmlns:p14="http://schemas.microsoft.com/office/powerpoint/2010/main" val="757805434"/>
+      </p:ext>
+    </p:extLst>
+  </p:cSld>
+  <p:clrMapOvr>
+    <a:masterClrMapping/>
+  </p:clrMapOvr>
+</p:notes>
+</file>
+
+<file path=ppt/notesSlides/notesSlide13.xml><?xml version="1.0" encoding="utf-8"?>
+<p:notes xmlns:a="http://schemas.openxmlformats.org/drawingml/2006/main" xmlns:r="http://schemas.openxmlformats.org/officeDocument/2006/relationships" xmlns:p="http://schemas.openxmlformats.org/presentationml/2006/main">
+  <p:cSld>
+    <p:spTree>
+      <p:nvGrpSpPr>
+        <p:cNvPr id="1" name=""/>
+        <p:cNvGrpSpPr/>
+        <p:nvPr/>
+      </p:nvGrpSpPr>
+      <p:grpSpPr>
+        <a:xfrm>
+          <a:off x="0" y="0"/>
+          <a:ext cx="0" cy="0"/>
+          <a:chOff x="0" y="0"/>
+          <a:chExt cx="0" cy="0"/>
+        </a:xfrm>
+      </p:grpSpPr>
+      <p:sp>
+        <p:nvSpPr>
+          <p:cNvPr id="2" name="Diakép helye 1"/>
+          <p:cNvSpPr>
+            <a:spLocks noGrp="1" noRot="1" noChangeAspect="1"/>
+          </p:cNvSpPr>
+          <p:nvPr>
+            <p:ph type="sldImg"/>
+          </p:nvPr>
+        </p:nvSpPr>
+        <p:spPr/>
+      </p:sp>
+      <p:sp>
+        <p:nvSpPr>
+          <p:cNvPr id="3" name="Jegyzetek helye 2"/>
+          <p:cNvSpPr>
+            <a:spLocks noGrp="1"/>
+          </p:cNvSpPr>
+          <p:nvPr>
+            <p:ph type="body" idx="1"/>
+          </p:nvPr>
+        </p:nvSpPr>
+        <p:spPr/>
+        <p:txBody>
+          <a:bodyPr/>
+          <a:lstStyle/>
+          <a:p>
+            <a:pPr marL="0" marR="0" lvl="0" indent="0" algn="l" defTabSz="914400" rtl="0" eaLnBrk="1" fontAlgn="auto" latinLnBrk="0" hangingPunct="1">
+              <a:lnSpc>
+                <a:spcPct val="100000"/>
+              </a:lnSpc>
+              <a:spcBef>
+                <a:spcPts val="0"/>
+              </a:spcBef>
+              <a:spcAft>
+                <a:spcPts val="0"/>
+              </a:spcAft>
+              <a:buClrTx/>
+              <a:buSzTx/>
+              <a:buFontTx/>
+              <a:buNone/>
+              <a:tabLst/>
+              <a:defRPr/>
+            </a:pPr>
+            <a:r>
+              <a:rPr lang="hu-HU" dirty="0"/>
+              <a:t>PATRIK -- </a:t>
+            </a:r>
+            <a:r>
+              <a:rPr lang="hu-HU" sz="1800" kern="100" dirty="0">
+                <a:effectLst/>
+                <a:latin typeface="Aptos" panose="020B0004020202020204" pitchFamily="34" charset="0"/>
+                <a:ea typeface="Aptos" panose="020B0004020202020204" pitchFamily="34" charset="0"/>
+                <a:cs typeface="Times New Roman" panose="02020603050405020304" pitchFamily="18" charset="0"/>
+              </a:rPr>
+              <a:t>A Parancsnoki Központ a hálózatunk másik stratégiai csomópontja, ahol szintén a </a:t>
+            </a:r>
+            <a:r>
+              <a:rPr lang="hu-HU" sz="1800" b="1" kern="100" dirty="0" err="1">
+                <a:effectLst/>
+                <a:latin typeface="Aptos" panose="020B0004020202020204" pitchFamily="34" charset="0"/>
+                <a:ea typeface="Aptos" panose="020B0004020202020204" pitchFamily="34" charset="0"/>
+                <a:cs typeface="Times New Roman" panose="02020603050405020304" pitchFamily="18" charset="0"/>
+              </a:rPr>
+              <a:t>Dual</a:t>
+            </a:r>
+            <a:r>
+              <a:rPr lang="hu-HU" sz="1800" b="1" kern="100" dirty="0">
+                <a:effectLst/>
+                <a:latin typeface="Aptos" panose="020B0004020202020204" pitchFamily="34" charset="0"/>
+                <a:ea typeface="Aptos" panose="020B0004020202020204" pitchFamily="34" charset="0"/>
+                <a:cs typeface="Times New Roman" panose="02020603050405020304" pitchFamily="18" charset="0"/>
+              </a:rPr>
+              <a:t> </a:t>
+            </a:r>
+            <a:r>
+              <a:rPr lang="hu-HU" sz="1800" b="1" kern="100" dirty="0" err="1">
+                <a:effectLst/>
+                <a:latin typeface="Aptos" panose="020B0004020202020204" pitchFamily="34" charset="0"/>
+                <a:ea typeface="Aptos" panose="020B0004020202020204" pitchFamily="34" charset="0"/>
+                <a:cs typeface="Times New Roman" panose="02020603050405020304" pitchFamily="18" charset="0"/>
+              </a:rPr>
+              <a:t>Stack</a:t>
+            </a:r>
+            <a:r>
+              <a:rPr lang="hu-HU" sz="1800" kern="100" dirty="0">
+                <a:effectLst/>
+                <a:latin typeface="Aptos" panose="020B0004020202020204" pitchFamily="34" charset="0"/>
+                <a:ea typeface="Aptos" panose="020B0004020202020204" pitchFamily="34" charset="0"/>
+                <a:cs typeface="Times New Roman" panose="02020603050405020304" pitchFamily="18" charset="0"/>
+              </a:rPr>
+              <a:t> technológiát alkalmazzuk. Ez biztosítja az </a:t>
+            </a:r>
+            <a:r>
+              <a:rPr lang="hu-HU" sz="1800" b="1" kern="100" dirty="0">
+                <a:effectLst/>
+                <a:latin typeface="Aptos" panose="020B0004020202020204" pitchFamily="34" charset="0"/>
+                <a:ea typeface="Aptos" panose="020B0004020202020204" pitchFamily="34" charset="0"/>
+                <a:cs typeface="Times New Roman" panose="02020603050405020304" pitchFamily="18" charset="0"/>
+              </a:rPr>
+              <a:t>IPv4 és IPv6</a:t>
+            </a:r>
+            <a:r>
+              <a:rPr lang="hu-HU" sz="1800" kern="100" dirty="0">
+                <a:effectLst/>
+                <a:latin typeface="Aptos" panose="020B0004020202020204" pitchFamily="34" charset="0"/>
+                <a:ea typeface="Aptos" panose="020B0004020202020204" pitchFamily="34" charset="0"/>
+                <a:cs typeface="Times New Roman" panose="02020603050405020304" pitchFamily="18" charset="0"/>
+              </a:rPr>
+              <a:t> protokollok párhuzamos futtatását, így a központból akadálytalanul kommunikálhatunk a hálózat régebbi és újabb generációs eszközeivel is. A forgalom zökkenőmentes irányításáért itt is egy </a:t>
+            </a:r>
+            <a:r>
+              <a:rPr lang="hu-HU" sz="1800" b="1" kern="100" dirty="0" err="1">
+                <a:effectLst/>
+                <a:latin typeface="Aptos" panose="020B0004020202020204" pitchFamily="34" charset="0"/>
+                <a:ea typeface="Aptos" panose="020B0004020202020204" pitchFamily="34" charset="0"/>
+                <a:cs typeface="Times New Roman" panose="02020603050405020304" pitchFamily="18" charset="0"/>
+              </a:rPr>
+              <a:t>Multilayer</a:t>
+            </a:r>
+            <a:r>
+              <a:rPr lang="hu-HU" sz="1800" b="1" kern="100" dirty="0">
+                <a:effectLst/>
+                <a:latin typeface="Aptos" panose="020B0004020202020204" pitchFamily="34" charset="0"/>
+                <a:ea typeface="Aptos" panose="020B0004020202020204" pitchFamily="34" charset="0"/>
+                <a:cs typeface="Times New Roman" panose="02020603050405020304" pitchFamily="18" charset="0"/>
+              </a:rPr>
+              <a:t> </a:t>
+            </a:r>
+            <a:r>
+              <a:rPr lang="hu-HU" sz="1800" b="1" kern="100" dirty="0" err="1">
+                <a:effectLst/>
+                <a:latin typeface="Aptos" panose="020B0004020202020204" pitchFamily="34" charset="0"/>
+                <a:ea typeface="Aptos" panose="020B0004020202020204" pitchFamily="34" charset="0"/>
+                <a:cs typeface="Times New Roman" panose="02020603050405020304" pitchFamily="18" charset="0"/>
+              </a:rPr>
+              <a:t>Switch</a:t>
+            </a:r>
+            <a:r>
+              <a:rPr lang="hu-HU" sz="1800" kern="100" dirty="0">
+                <a:effectLst/>
+                <a:latin typeface="Aptos" panose="020B0004020202020204" pitchFamily="34" charset="0"/>
+                <a:ea typeface="Aptos" panose="020B0004020202020204" pitchFamily="34" charset="0"/>
+                <a:cs typeface="Times New Roman" panose="02020603050405020304" pitchFamily="18" charset="0"/>
+              </a:rPr>
+              <a:t> felel, ami lehetővé teszi a különböző </a:t>
+            </a:r>
+            <a:r>
+              <a:rPr lang="hu-HU" sz="1800" b="1" kern="100" dirty="0">
+                <a:effectLst/>
+                <a:latin typeface="Aptos" panose="020B0004020202020204" pitchFamily="34" charset="0"/>
+                <a:ea typeface="Aptos" panose="020B0004020202020204" pitchFamily="34" charset="0"/>
+                <a:cs typeface="Times New Roman" panose="02020603050405020304" pitchFamily="18" charset="0"/>
+              </a:rPr>
+              <a:t>VLAN-ok</a:t>
+            </a:r>
+            <a:r>
+              <a:rPr lang="hu-HU" sz="1800" kern="100" dirty="0">
+                <a:effectLst/>
+                <a:latin typeface="Aptos" panose="020B0004020202020204" pitchFamily="34" charset="0"/>
+                <a:ea typeface="Aptos" panose="020B0004020202020204" pitchFamily="34" charset="0"/>
+                <a:cs typeface="Times New Roman" panose="02020603050405020304" pitchFamily="18" charset="0"/>
+              </a:rPr>
+              <a:t> közötti villámgyors átjárást és a magas szintű adatfeldolgozást. A </a:t>
+            </a:r>
+            <a:r>
+              <a:rPr lang="hu-HU" sz="1800" b="1" kern="100" dirty="0">
+                <a:effectLst/>
+                <a:latin typeface="Aptos" panose="020B0004020202020204" pitchFamily="34" charset="0"/>
+                <a:ea typeface="Aptos" panose="020B0004020202020204" pitchFamily="34" charset="0"/>
+                <a:cs typeface="Times New Roman" panose="02020603050405020304" pitchFamily="18" charset="0"/>
+              </a:rPr>
+              <a:t>dinamikus </a:t>
+            </a:r>
+            <a:r>
+              <a:rPr lang="hu-HU" sz="1800" b="1" kern="100" dirty="0" err="1">
+                <a:effectLst/>
+                <a:latin typeface="Aptos" panose="020B0004020202020204" pitchFamily="34" charset="0"/>
+                <a:ea typeface="Aptos" panose="020B0004020202020204" pitchFamily="34" charset="0"/>
+                <a:cs typeface="Times New Roman" panose="02020603050405020304" pitchFamily="18" charset="0"/>
+              </a:rPr>
+              <a:t>routinggal</a:t>
+            </a:r>
+            <a:r>
+              <a:rPr lang="hu-HU" sz="1800" kern="100" dirty="0">
+                <a:effectLst/>
+                <a:latin typeface="Aptos" panose="020B0004020202020204" pitchFamily="34" charset="0"/>
+                <a:ea typeface="Aptos" panose="020B0004020202020204" pitchFamily="34" charset="0"/>
+                <a:cs typeface="Times New Roman" panose="02020603050405020304" pitchFamily="18" charset="0"/>
+              </a:rPr>
+              <a:t> kiegészülve ez a struktúra garantálja, hogy a parancsnoki döntések és adatok mindig a legoptimálisabb útvonalon jussanak el a célállomásokig, fenntartva a teljes hálózat egységét és elérhetőségét.</a:t>
+            </a:r>
+          </a:p>
+          <a:p>
+            <a:endParaRPr lang="hu-HU" dirty="0"/>
+          </a:p>
+        </p:txBody>
+      </p:sp>
+      <p:sp>
+        <p:nvSpPr>
+          <p:cNvPr id="4" name="Dia számának helye 3"/>
+          <p:cNvSpPr>
+            <a:spLocks noGrp="1"/>
+          </p:cNvSpPr>
+          <p:nvPr>
+            <p:ph type="sldNum" sz="quarter" idx="5"/>
+          </p:nvPr>
+        </p:nvSpPr>
+        <p:spPr/>
+        <p:txBody>
+          <a:bodyPr/>
+          <a:lstStyle/>
+          <a:p>
+            <a:fld id="{1087266A-CB85-4818-B702-CBAEB43B1A09}" type="slidenum">
+              <a:rPr lang="hu-HU" smtClean="0"/>
+              <a:t>14</a:t>
+            </a:fld>
+            <a:endParaRPr lang="hu-HU"/>
+          </a:p>
+        </p:txBody>
+      </p:sp>
+    </p:spTree>
+    <p:extLst>
+      <p:ext uri="{BB962C8B-B14F-4D97-AF65-F5344CB8AC3E}">
+        <p14:creationId xmlns:p14="http://schemas.microsoft.com/office/powerpoint/2010/main" val="3668065430"/>
+      </p:ext>
+    </p:extLst>
+  </p:cSld>
+  <p:clrMapOvr>
+    <a:masterClrMapping/>
+  </p:clrMapOvr>
+</p:notes>
+</file>
+
+<file path=ppt/notesSlides/notesSlide14.xml><?xml version="1.0" encoding="utf-8"?>
+<p:notes xmlns:a="http://schemas.openxmlformats.org/drawingml/2006/main" xmlns:r="http://schemas.openxmlformats.org/officeDocument/2006/relationships" xmlns:p="http://schemas.openxmlformats.org/presentationml/2006/main">
+  <p:cSld>
+    <p:spTree>
+      <p:nvGrpSpPr>
+        <p:cNvPr id="1" name=""/>
+        <p:cNvGrpSpPr/>
+        <p:nvPr/>
+      </p:nvGrpSpPr>
+      <p:grpSpPr>
+        <a:xfrm>
+          <a:off x="0" y="0"/>
+          <a:ext cx="0" cy="0"/>
+          <a:chOff x="0" y="0"/>
+          <a:chExt cx="0" cy="0"/>
+        </a:xfrm>
+      </p:grpSpPr>
+      <p:sp>
+        <p:nvSpPr>
+          <p:cNvPr id="2" name="Diakép helye 1"/>
+          <p:cNvSpPr>
+            <a:spLocks noGrp="1" noRot="1" noChangeAspect="1"/>
+          </p:cNvSpPr>
+          <p:nvPr>
+            <p:ph type="sldImg"/>
+          </p:nvPr>
+        </p:nvSpPr>
+        <p:spPr/>
+      </p:sp>
+      <p:sp>
+        <p:nvSpPr>
+          <p:cNvPr id="3" name="Jegyzetek helye 2"/>
+          <p:cNvSpPr>
+            <a:spLocks noGrp="1"/>
+          </p:cNvSpPr>
+          <p:nvPr>
+            <p:ph type="body" idx="1"/>
+          </p:nvPr>
+        </p:nvSpPr>
+        <p:spPr/>
+        <p:txBody>
+          <a:bodyPr/>
+          <a:lstStyle/>
+          <a:p>
+            <a:pPr marL="0" marR="0" lvl="0" indent="0" algn="l" defTabSz="914400" rtl="0" eaLnBrk="1" fontAlgn="auto" latinLnBrk="0" hangingPunct="1">
+              <a:lnSpc>
+                <a:spcPct val="100000"/>
+              </a:lnSpc>
+              <a:spcBef>
+                <a:spcPts val="0"/>
+              </a:spcBef>
+              <a:spcAft>
+                <a:spcPts val="0"/>
+              </a:spcAft>
+              <a:buClrTx/>
+              <a:buSzTx/>
+              <a:buFontTx/>
+              <a:buNone/>
+              <a:tabLst/>
+              <a:defRPr/>
+            </a:pPr>
+            <a:r>
+              <a:rPr lang="hu-HU" dirty="0"/>
+              <a:t>PATRIK -- </a:t>
+            </a:r>
+            <a:r>
+              <a:rPr lang="hu-HU" sz="1800" kern="100" dirty="0">
+                <a:effectLst/>
+                <a:latin typeface="Aptos" panose="020B0004020202020204" pitchFamily="34" charset="0"/>
+                <a:ea typeface="Aptos" panose="020B0004020202020204" pitchFamily="34" charset="0"/>
+                <a:cs typeface="Times New Roman" panose="02020603050405020304" pitchFamily="18" charset="0"/>
+              </a:rPr>
+              <a:t>Ebben a szakaszban magát az </a:t>
+            </a:r>
+            <a:r>
+              <a:rPr lang="hu-HU" sz="1800" b="1" kern="100" dirty="0">
+                <a:effectLst/>
+                <a:latin typeface="Aptos" panose="020B0004020202020204" pitchFamily="34" charset="0"/>
+                <a:ea typeface="Aptos" panose="020B0004020202020204" pitchFamily="34" charset="0"/>
+                <a:cs typeface="Times New Roman" panose="02020603050405020304" pitchFamily="18" charset="0"/>
+              </a:rPr>
+              <a:t>ISP-t</a:t>
+            </a:r>
+            <a:r>
+              <a:rPr lang="hu-HU" sz="1800" kern="100" dirty="0">
+                <a:effectLst/>
+                <a:latin typeface="Aptos" panose="020B0004020202020204" pitchFamily="34" charset="0"/>
+                <a:ea typeface="Aptos" panose="020B0004020202020204" pitchFamily="34" charset="0"/>
+                <a:cs typeface="Times New Roman" panose="02020603050405020304" pitchFamily="18" charset="0"/>
+              </a:rPr>
+              <a:t>, vagyis az internetszolgáltatót szimuláltuk, ami a kapcsolatot biztosítja a külvilággal. Itt a legfontosabb folyamat a </a:t>
+            </a:r>
+            <a:r>
+              <a:rPr lang="hu-HU" sz="1800" b="1" kern="100" dirty="0">
+                <a:effectLst/>
+                <a:latin typeface="Aptos" panose="020B0004020202020204" pitchFamily="34" charset="0"/>
+                <a:ea typeface="Aptos" panose="020B0004020202020204" pitchFamily="34" charset="0"/>
+                <a:cs typeface="Times New Roman" panose="02020603050405020304" pitchFamily="18" charset="0"/>
+              </a:rPr>
+              <a:t>NAT (Network </a:t>
+            </a:r>
+            <a:r>
+              <a:rPr lang="hu-HU" sz="1800" b="1" kern="100" dirty="0" err="1">
+                <a:effectLst/>
+                <a:latin typeface="Aptos" panose="020B0004020202020204" pitchFamily="34" charset="0"/>
+                <a:ea typeface="Aptos" panose="020B0004020202020204" pitchFamily="34" charset="0"/>
+                <a:cs typeface="Times New Roman" panose="02020603050405020304" pitchFamily="18" charset="0"/>
+              </a:rPr>
+              <a:t>Address</a:t>
+            </a:r>
+            <a:r>
+              <a:rPr lang="hu-HU" sz="1800" b="1" kern="100" dirty="0">
+                <a:effectLst/>
+                <a:latin typeface="Aptos" panose="020B0004020202020204" pitchFamily="34" charset="0"/>
+                <a:ea typeface="Aptos" panose="020B0004020202020204" pitchFamily="34" charset="0"/>
+                <a:cs typeface="Times New Roman" panose="02020603050405020304" pitchFamily="18" charset="0"/>
+              </a:rPr>
+              <a:t> </a:t>
+            </a:r>
+            <a:r>
+              <a:rPr lang="hu-HU" sz="1800" b="1" kern="100" dirty="0" err="1">
+                <a:effectLst/>
+                <a:latin typeface="Aptos" panose="020B0004020202020204" pitchFamily="34" charset="0"/>
+                <a:ea typeface="Aptos" panose="020B0004020202020204" pitchFamily="34" charset="0"/>
+                <a:cs typeface="Times New Roman" panose="02020603050405020304" pitchFamily="18" charset="0"/>
+              </a:rPr>
+              <a:t>Translation</a:t>
+            </a:r>
+            <a:r>
+              <a:rPr lang="hu-HU" sz="1800" b="1" kern="100" dirty="0">
+                <a:effectLst/>
+                <a:latin typeface="Aptos" panose="020B0004020202020204" pitchFamily="34" charset="0"/>
+                <a:ea typeface="Aptos" panose="020B0004020202020204" pitchFamily="34" charset="0"/>
+                <a:cs typeface="Times New Roman" panose="02020603050405020304" pitchFamily="18" charset="0"/>
+              </a:rPr>
+              <a:t>)</a:t>
+            </a:r>
+            <a:r>
+              <a:rPr lang="hu-HU" sz="1800" kern="100" dirty="0">
+                <a:effectLst/>
+                <a:latin typeface="Aptos" panose="020B0004020202020204" pitchFamily="34" charset="0"/>
+                <a:ea typeface="Aptos" panose="020B0004020202020204" pitchFamily="34" charset="0"/>
+                <a:cs typeface="Times New Roman" panose="02020603050405020304" pitchFamily="18" charset="0"/>
+              </a:rPr>
+              <a:t>: ez a technológia végzi azt a 'fordítást', amivel az összes belső, privát IP-címünket egyetlen publikus külső címre képezi le. Ez nemcsak takarékos megoldás a címekkel, hanem egy alapvető biztonsági szintet is ad, hiszen a belső hálózatunk nem látszik közvetlenül az internetről. A stabil adatforgalmat </a:t>
+            </a:r>
+            <a:r>
+              <a:rPr lang="hu-HU" sz="1800" b="1" kern="100" dirty="0">
+                <a:effectLst/>
+                <a:latin typeface="Aptos" panose="020B0004020202020204" pitchFamily="34" charset="0"/>
+                <a:ea typeface="Aptos" panose="020B0004020202020204" pitchFamily="34" charset="0"/>
+                <a:cs typeface="Times New Roman" panose="02020603050405020304" pitchFamily="18" charset="0"/>
+              </a:rPr>
+              <a:t>statikus </a:t>
+            </a:r>
+            <a:r>
+              <a:rPr lang="hu-HU" sz="1800" b="1" kern="100" dirty="0" err="1">
+                <a:effectLst/>
+                <a:latin typeface="Aptos" panose="020B0004020202020204" pitchFamily="34" charset="0"/>
+                <a:ea typeface="Aptos" panose="020B0004020202020204" pitchFamily="34" charset="0"/>
+                <a:cs typeface="Times New Roman" panose="02020603050405020304" pitchFamily="18" charset="0"/>
+              </a:rPr>
+              <a:t>routinggal</a:t>
+            </a:r>
+            <a:r>
+              <a:rPr lang="hu-HU" sz="1800" kern="100" dirty="0">
+                <a:effectLst/>
+                <a:latin typeface="Aptos" panose="020B0004020202020204" pitchFamily="34" charset="0"/>
+                <a:ea typeface="Aptos" panose="020B0004020202020204" pitchFamily="34" charset="0"/>
+                <a:cs typeface="Times New Roman" panose="02020603050405020304" pitchFamily="18" charset="0"/>
+              </a:rPr>
+              <a:t> biztosítottuk a szolgáltató felé, így garantált, hogy a csomagok mindig megtalálják a kivezető utat, legyen szó böngészésről vagy a távoli VPN elérésről.</a:t>
+            </a:r>
+          </a:p>
+          <a:p>
+            <a:endParaRPr lang="hu-HU" dirty="0"/>
+          </a:p>
+        </p:txBody>
+      </p:sp>
+      <p:sp>
+        <p:nvSpPr>
+          <p:cNvPr id="4" name="Dia számának helye 3"/>
+          <p:cNvSpPr>
+            <a:spLocks noGrp="1"/>
+          </p:cNvSpPr>
+          <p:nvPr>
+            <p:ph type="sldNum" sz="quarter" idx="5"/>
+          </p:nvPr>
+        </p:nvSpPr>
+        <p:spPr/>
+        <p:txBody>
+          <a:bodyPr/>
+          <a:lstStyle/>
+          <a:p>
+            <a:fld id="{1087266A-CB85-4818-B702-CBAEB43B1A09}" type="slidenum">
+              <a:rPr lang="hu-HU" smtClean="0"/>
+              <a:t>15</a:t>
+            </a:fld>
+            <a:endParaRPr lang="hu-HU"/>
+          </a:p>
+        </p:txBody>
+      </p:sp>
+    </p:spTree>
+    <p:extLst>
+      <p:ext uri="{BB962C8B-B14F-4D97-AF65-F5344CB8AC3E}">
+        <p14:creationId xmlns:p14="http://schemas.microsoft.com/office/powerpoint/2010/main" val="122941698"/>
+      </p:ext>
+    </p:extLst>
+  </p:cSld>
+  <p:clrMapOvr>
+    <a:masterClrMapping/>
+  </p:clrMapOvr>
+</p:notes>
+</file>
+
+<file path=ppt/notesSlides/notesSlide15.xml><?xml version="1.0" encoding="utf-8"?>
+<p:notes xmlns:a="http://schemas.openxmlformats.org/drawingml/2006/main" xmlns:r="http://schemas.openxmlformats.org/officeDocument/2006/relationships" xmlns:p="http://schemas.openxmlformats.org/presentationml/2006/main">
+  <p:cSld>
+    <p:spTree>
+      <p:nvGrpSpPr>
+        <p:cNvPr id="1" name=""/>
+        <p:cNvGrpSpPr/>
+        <p:nvPr/>
+      </p:nvGrpSpPr>
+      <p:grpSpPr>
+        <a:xfrm>
+          <a:off x="0" y="0"/>
+          <a:ext cx="0" cy="0"/>
+          <a:chOff x="0" y="0"/>
+          <a:chExt cx="0" cy="0"/>
+        </a:xfrm>
+      </p:grpSpPr>
+      <p:sp>
+        <p:nvSpPr>
+          <p:cNvPr id="2" name="Diakép helye 1"/>
+          <p:cNvSpPr>
+            <a:spLocks noGrp="1" noRot="1" noChangeAspect="1"/>
+          </p:cNvSpPr>
+          <p:nvPr>
+            <p:ph type="sldImg"/>
+          </p:nvPr>
+        </p:nvSpPr>
+        <p:spPr/>
+      </p:sp>
+      <p:sp>
+        <p:nvSpPr>
+          <p:cNvPr id="3" name="Jegyzetek helye 2"/>
+          <p:cNvSpPr>
+            <a:spLocks noGrp="1"/>
+          </p:cNvSpPr>
+          <p:nvPr>
+            <p:ph type="body" idx="1"/>
+          </p:nvPr>
+        </p:nvSpPr>
+        <p:spPr/>
+        <p:txBody>
+          <a:bodyPr/>
+          <a:lstStyle/>
+          <a:p>
+            <a:pPr marL="0" marR="0" lvl="0" indent="0" algn="l" defTabSz="914400" rtl="0" eaLnBrk="1" fontAlgn="auto" latinLnBrk="0" hangingPunct="1">
+              <a:lnSpc>
+                <a:spcPct val="100000"/>
+              </a:lnSpc>
+              <a:spcBef>
+                <a:spcPts val="0"/>
+              </a:spcBef>
+              <a:spcAft>
+                <a:spcPts val="0"/>
+              </a:spcAft>
+              <a:buClrTx/>
+              <a:buSzTx/>
+              <a:buFontTx/>
+              <a:buNone/>
+              <a:tabLst/>
+              <a:defRPr/>
+            </a:pPr>
+            <a:r>
+              <a:rPr lang="hu-HU" dirty="0"/>
+              <a:t>MARCI -- </a:t>
+            </a:r>
+            <a:r>
+              <a:rPr lang="hu-HU" sz="1800" kern="100" dirty="0">
+                <a:effectLst/>
+                <a:latin typeface="Aptos" panose="020B0004020202020204" pitchFamily="34" charset="0"/>
+                <a:ea typeface="Aptos" panose="020B0004020202020204" pitchFamily="34" charset="0"/>
+                <a:cs typeface="Times New Roman" panose="02020603050405020304" pitchFamily="18" charset="0"/>
+              </a:rPr>
+              <a:t>A projekt utolsó, de talán legfontosabb szakasza a </a:t>
+            </a:r>
+            <a:r>
+              <a:rPr lang="hu-HU" sz="1800" b="1" kern="100" dirty="0">
+                <a:effectLst/>
+                <a:latin typeface="Aptos" panose="020B0004020202020204" pitchFamily="34" charset="0"/>
+                <a:ea typeface="Aptos" panose="020B0004020202020204" pitchFamily="34" charset="0"/>
+                <a:cs typeface="Times New Roman" panose="02020603050405020304" pitchFamily="18" charset="0"/>
+              </a:rPr>
+              <a:t>szisztematikus tesztelés</a:t>
+            </a:r>
+            <a:r>
+              <a:rPr lang="hu-HU" sz="1800" kern="100" dirty="0">
+                <a:effectLst/>
+                <a:latin typeface="Aptos" panose="020B0004020202020204" pitchFamily="34" charset="0"/>
+                <a:ea typeface="Aptos" panose="020B0004020202020204" pitchFamily="34" charset="0"/>
+                <a:cs typeface="Times New Roman" panose="02020603050405020304" pitchFamily="18" charset="0"/>
+              </a:rPr>
+              <a:t> volt. Hiába a jól megtervezett topológia, a gyakorlatban derül ki, hogy az ACL-ek valóban fognak-e, vagy a DHCP megfelelően osztja-e a címeket. A folyamatot professzionális szinten kezeltük: minden felmerülő hálózati hibát vagy konfigurációs rést </a:t>
+            </a:r>
+            <a:r>
+              <a:rPr lang="hu-HU" sz="1800" b="1" kern="100" dirty="0">
+                <a:effectLst/>
+                <a:latin typeface="Aptos" panose="020B0004020202020204" pitchFamily="34" charset="0"/>
+                <a:ea typeface="Aptos" panose="020B0004020202020204" pitchFamily="34" charset="0"/>
+                <a:cs typeface="Times New Roman" panose="02020603050405020304" pitchFamily="18" charset="0"/>
+              </a:rPr>
+              <a:t>Bug-ként rögzítettünk a </a:t>
+            </a:r>
+            <a:r>
+              <a:rPr lang="hu-HU" sz="1800" b="1" kern="100" dirty="0" err="1">
+                <a:effectLst/>
+                <a:latin typeface="Aptos" panose="020B0004020202020204" pitchFamily="34" charset="0"/>
+                <a:ea typeface="Aptos" panose="020B0004020202020204" pitchFamily="34" charset="0"/>
+                <a:cs typeface="Times New Roman" panose="02020603050405020304" pitchFamily="18" charset="0"/>
+              </a:rPr>
+              <a:t>Jira</a:t>
+            </a:r>
+            <a:r>
+              <a:rPr lang="hu-HU" sz="1800" b="1" kern="100" dirty="0">
+                <a:effectLst/>
+                <a:latin typeface="Aptos" panose="020B0004020202020204" pitchFamily="34" charset="0"/>
+                <a:ea typeface="Aptos" panose="020B0004020202020204" pitchFamily="34" charset="0"/>
+                <a:cs typeface="Times New Roman" panose="02020603050405020304" pitchFamily="18" charset="0"/>
+              </a:rPr>
+              <a:t>-ban</a:t>
+            </a:r>
+            <a:r>
+              <a:rPr lang="hu-HU" sz="1800" kern="100" dirty="0">
+                <a:effectLst/>
+                <a:latin typeface="Aptos" panose="020B0004020202020204" pitchFamily="34" charset="0"/>
+                <a:ea typeface="Aptos" panose="020B0004020202020204" pitchFamily="34" charset="0"/>
+                <a:cs typeface="Times New Roman" panose="02020603050405020304" pitchFamily="18" charset="0"/>
+              </a:rPr>
+              <a:t>. Nem söpörtük a szőnyeg alá a problémákat; a hibajegyek lehetővé tették, hogy pontosan kövessük a hibák forrását, delegáljuk a javítást, majd a megoldás után </a:t>
+            </a:r>
+            <a:r>
+              <a:rPr lang="hu-HU" sz="1800" kern="100" dirty="0" err="1">
+                <a:effectLst/>
+                <a:latin typeface="Aptos" panose="020B0004020202020204" pitchFamily="34" charset="0"/>
+                <a:ea typeface="Aptos" panose="020B0004020202020204" pitchFamily="34" charset="0"/>
+                <a:cs typeface="Times New Roman" panose="02020603050405020304" pitchFamily="18" charset="0"/>
+              </a:rPr>
+              <a:t>újrateszteljük</a:t>
+            </a:r>
+            <a:r>
+              <a:rPr lang="hu-HU" sz="1800" kern="100" dirty="0">
+                <a:effectLst/>
+                <a:latin typeface="Aptos" panose="020B0004020202020204" pitchFamily="34" charset="0"/>
+                <a:ea typeface="Aptos" panose="020B0004020202020204" pitchFamily="34" charset="0"/>
+                <a:cs typeface="Times New Roman" panose="02020603050405020304" pitchFamily="18" charset="0"/>
+              </a:rPr>
+              <a:t> az adott szakaszt. Ez a módszer garantálta, hogy a végén egy olyan stabil és </a:t>
+            </a:r>
+            <a:r>
+              <a:rPr lang="hu-HU" sz="1800" kern="100" dirty="0" err="1">
+                <a:effectLst/>
+                <a:latin typeface="Aptos" panose="020B0004020202020204" pitchFamily="34" charset="0"/>
+                <a:ea typeface="Aptos" panose="020B0004020202020204" pitchFamily="34" charset="0"/>
+                <a:cs typeface="Times New Roman" panose="02020603050405020304" pitchFamily="18" charset="0"/>
+              </a:rPr>
+              <a:t>validált</a:t>
+            </a:r>
+            <a:r>
+              <a:rPr lang="hu-HU" sz="1800" kern="100" dirty="0">
+                <a:effectLst/>
+                <a:latin typeface="Aptos" panose="020B0004020202020204" pitchFamily="34" charset="0"/>
+                <a:ea typeface="Aptos" panose="020B0004020202020204" pitchFamily="34" charset="0"/>
+                <a:cs typeface="Times New Roman" panose="02020603050405020304" pitchFamily="18" charset="0"/>
+              </a:rPr>
+              <a:t> rendszert adjunk át, ahol minden </a:t>
+            </a:r>
+            <a:r>
+              <a:rPr lang="hu-HU" sz="1800" kern="100" dirty="0" err="1">
+                <a:effectLst/>
+                <a:latin typeface="Aptos" panose="020B0004020202020204" pitchFamily="34" charset="0"/>
+                <a:ea typeface="Aptos" panose="020B0004020202020204" pitchFamily="34" charset="0"/>
+                <a:cs typeface="Times New Roman" panose="02020603050405020304" pitchFamily="18" charset="0"/>
+              </a:rPr>
+              <a:t>ping</a:t>
+            </a:r>
+            <a:r>
+              <a:rPr lang="hu-HU" sz="1800" kern="100" dirty="0">
+                <a:effectLst/>
+                <a:latin typeface="Aptos" panose="020B0004020202020204" pitchFamily="34" charset="0"/>
+                <a:ea typeface="Aptos" panose="020B0004020202020204" pitchFamily="34" charset="0"/>
+                <a:cs typeface="Times New Roman" panose="02020603050405020304" pitchFamily="18" charset="0"/>
+              </a:rPr>
+              <a:t> és minden biztonsági szabály pontosan úgy működik, ahogy azt a nagykönyvben megírtuk.</a:t>
+            </a:r>
+          </a:p>
+          <a:p>
+            <a:endParaRPr lang="hu-HU" dirty="0"/>
+          </a:p>
+        </p:txBody>
+      </p:sp>
+      <p:sp>
+        <p:nvSpPr>
+          <p:cNvPr id="4" name="Dia számának helye 3"/>
+          <p:cNvSpPr>
+            <a:spLocks noGrp="1"/>
+          </p:cNvSpPr>
+          <p:nvPr>
+            <p:ph type="sldNum" sz="quarter" idx="5"/>
+          </p:nvPr>
+        </p:nvSpPr>
+        <p:spPr/>
+        <p:txBody>
+          <a:bodyPr/>
+          <a:lstStyle/>
+          <a:p>
+            <a:fld id="{1087266A-CB85-4818-B702-CBAEB43B1A09}" type="slidenum">
+              <a:rPr lang="hu-HU" smtClean="0"/>
+              <a:t>16</a:t>
+            </a:fld>
+            <a:endParaRPr lang="hu-HU"/>
+          </a:p>
+        </p:txBody>
+      </p:sp>
+    </p:spTree>
+    <p:extLst>
+      <p:ext uri="{BB962C8B-B14F-4D97-AF65-F5344CB8AC3E}">
+        <p14:creationId xmlns:p14="http://schemas.microsoft.com/office/powerpoint/2010/main" val="2675890638"/>
+      </p:ext>
+    </p:extLst>
+  </p:cSld>
+  <p:clrMapOvr>
+    <a:masterClrMapping/>
+  </p:clrMapOvr>
+</p:notes>
+</file>
+
+<file path=ppt/notesSlides/notesSlide16.xml><?xml version="1.0" encoding="utf-8"?>
+<p:notes xmlns:a="http://schemas.openxmlformats.org/drawingml/2006/main" xmlns:r="http://schemas.openxmlformats.org/officeDocument/2006/relationships" xmlns:p="http://schemas.openxmlformats.org/presentationml/2006/main">
+  <p:cSld>
+    <p:spTree>
+      <p:nvGrpSpPr>
+        <p:cNvPr id="1" name=""/>
+        <p:cNvGrpSpPr/>
+        <p:nvPr/>
+      </p:nvGrpSpPr>
+      <p:grpSpPr>
+        <a:xfrm>
+          <a:off x="0" y="0"/>
+          <a:ext cx="0" cy="0"/>
+          <a:chOff x="0" y="0"/>
+          <a:chExt cx="0" cy="0"/>
+        </a:xfrm>
+      </p:grpSpPr>
+      <p:sp>
+        <p:nvSpPr>
+          <p:cNvPr id="2" name="Diakép helye 1"/>
+          <p:cNvSpPr>
+            <a:spLocks noGrp="1" noRot="1" noChangeAspect="1"/>
+          </p:cNvSpPr>
+          <p:nvPr>
+            <p:ph type="sldImg"/>
+          </p:nvPr>
+        </p:nvSpPr>
+        <p:spPr/>
+      </p:sp>
+      <p:sp>
+        <p:nvSpPr>
+          <p:cNvPr id="3" name="Jegyzetek helye 2"/>
+          <p:cNvSpPr>
+            <a:spLocks noGrp="1"/>
+          </p:cNvSpPr>
+          <p:nvPr>
+            <p:ph type="body" idx="1"/>
+          </p:nvPr>
+        </p:nvSpPr>
+        <p:spPr/>
+        <p:txBody>
+          <a:bodyPr/>
+          <a:lstStyle/>
+          <a:p>
+            <a:pPr algn="ctr">
+              <a:lnSpc>
+                <a:spcPct val="115000"/>
+              </a:lnSpc>
+              <a:spcAft>
+                <a:spcPts val="800"/>
+              </a:spcAft>
+            </a:pPr>
+            <a:r>
+              <a:rPr lang="hu-HU" dirty="0"/>
+              <a:t>MARCI – PATRIK -- </a:t>
+            </a:r>
+            <a:r>
+              <a:rPr lang="hu-HU" sz="1800" kern="100" dirty="0">
+                <a:effectLst/>
+                <a:latin typeface="Aptos" panose="020B0004020202020204" pitchFamily="34" charset="0"/>
+                <a:ea typeface="Aptos" panose="020B0004020202020204" pitchFamily="34" charset="0"/>
+                <a:cs typeface="Times New Roman" panose="02020603050405020304" pitchFamily="18" charset="0"/>
+              </a:rPr>
+              <a:t>A projektmenedzsmenthez a </a:t>
+            </a:r>
+            <a:r>
+              <a:rPr lang="hu-HU" sz="1800" b="1" kern="100" dirty="0" err="1">
+                <a:effectLst/>
+                <a:latin typeface="Aptos" panose="020B0004020202020204" pitchFamily="34" charset="0"/>
+                <a:ea typeface="Aptos" panose="020B0004020202020204" pitchFamily="34" charset="0"/>
+                <a:cs typeface="Times New Roman" panose="02020603050405020304" pitchFamily="18" charset="0"/>
+              </a:rPr>
+              <a:t>Jira</a:t>
+            </a:r>
+            <a:r>
+              <a:rPr lang="hu-HU" sz="1800" b="1" kern="100" dirty="0">
+                <a:effectLst/>
+                <a:latin typeface="Aptos" panose="020B0004020202020204" pitchFamily="34" charset="0"/>
+                <a:ea typeface="Aptos" panose="020B0004020202020204" pitchFamily="34" charset="0"/>
+                <a:cs typeface="Times New Roman" panose="02020603050405020304" pitchFamily="18" charset="0"/>
+              </a:rPr>
+              <a:t>-t és a </a:t>
+            </a:r>
+            <a:r>
+              <a:rPr lang="hu-HU" sz="1800" b="1" kern="100" dirty="0" err="1">
+                <a:effectLst/>
+                <a:latin typeface="Aptos" panose="020B0004020202020204" pitchFamily="34" charset="0"/>
+                <a:ea typeface="Aptos" panose="020B0004020202020204" pitchFamily="34" charset="0"/>
+                <a:cs typeface="Times New Roman" panose="02020603050405020304" pitchFamily="18" charset="0"/>
+              </a:rPr>
+              <a:t>Scrum</a:t>
+            </a:r>
+            <a:r>
+              <a:rPr lang="hu-HU" sz="1800" b="1" kern="100" dirty="0">
+                <a:effectLst/>
+                <a:latin typeface="Aptos" panose="020B0004020202020204" pitchFamily="34" charset="0"/>
+                <a:ea typeface="Aptos" panose="020B0004020202020204" pitchFamily="34" charset="0"/>
+                <a:cs typeface="Times New Roman" panose="02020603050405020304" pitchFamily="18" charset="0"/>
+              </a:rPr>
+              <a:t> módszertant</a:t>
+            </a:r>
+            <a:r>
+              <a:rPr lang="hu-HU" sz="1800" kern="100" dirty="0">
+                <a:effectLst/>
+                <a:latin typeface="Aptos" panose="020B0004020202020204" pitchFamily="34" charset="0"/>
+                <a:ea typeface="Aptos" panose="020B0004020202020204" pitchFamily="34" charset="0"/>
+                <a:cs typeface="Times New Roman" panose="02020603050405020304" pitchFamily="18" charset="0"/>
+              </a:rPr>
+              <a:t> választottuk, ami lehetővé tette számunkra a feladatok precíz nyomon követését és a sprint-alapú tervezést. Itt a legfontosabb a </a:t>
+            </a:r>
+            <a:r>
+              <a:rPr lang="hu-HU" sz="1800" b="1" kern="100" dirty="0">
+                <a:effectLst/>
+                <a:latin typeface="Aptos" panose="020B0004020202020204" pitchFamily="34" charset="0"/>
+                <a:ea typeface="Aptos" panose="020B0004020202020204" pitchFamily="34" charset="0"/>
+                <a:cs typeface="Times New Roman" panose="02020603050405020304" pitchFamily="18" charset="0"/>
+              </a:rPr>
+              <a:t>Bug </a:t>
+            </a:r>
+            <a:r>
+              <a:rPr lang="hu-HU" sz="1800" b="1" kern="100" dirty="0" err="1">
+                <a:effectLst/>
+                <a:latin typeface="Aptos" panose="020B0004020202020204" pitchFamily="34" charset="0"/>
+                <a:ea typeface="Aptos" panose="020B0004020202020204" pitchFamily="34" charset="0"/>
+                <a:cs typeface="Times New Roman" panose="02020603050405020304" pitchFamily="18" charset="0"/>
+              </a:rPr>
+              <a:t>Tracking</a:t>
+            </a:r>
+            <a:r>
+              <a:rPr lang="hu-HU" sz="1800" kern="100" dirty="0">
+                <a:effectLst/>
+                <a:latin typeface="Aptos" panose="020B0004020202020204" pitchFamily="34" charset="0"/>
+                <a:ea typeface="Aptos" panose="020B0004020202020204" pitchFamily="34" charset="0"/>
+                <a:cs typeface="Times New Roman" panose="02020603050405020304" pitchFamily="18" charset="0"/>
+              </a:rPr>
+              <a:t> (hibakövetés) volt: minden tesztelés során talált problémát külön hibajegyként kezeltünk, rögzítettük a státuszukat, és szisztematikusan megoldottuk őket. </a:t>
+            </a:r>
+          </a:p>
+          <a:p>
+            <a:pPr algn="ctr">
+              <a:lnSpc>
+                <a:spcPct val="115000"/>
+              </a:lnSpc>
+              <a:spcAft>
+                <a:spcPts val="800"/>
+              </a:spcAft>
+            </a:pPr>
+            <a:r>
+              <a:rPr lang="hu-HU" sz="1800" kern="100" dirty="0">
+                <a:effectLst/>
+                <a:latin typeface="Aptos" panose="020B0004020202020204" pitchFamily="34" charset="0"/>
+                <a:ea typeface="Aptos" panose="020B0004020202020204" pitchFamily="34" charset="0"/>
+                <a:cs typeface="Times New Roman" panose="02020603050405020304" pitchFamily="18" charset="0"/>
+              </a:rPr>
+              <a:t>Ezzel párhuzamosan a </a:t>
+            </a:r>
+            <a:r>
+              <a:rPr lang="hu-HU" sz="1800" b="1" kern="100" dirty="0">
+                <a:effectLst/>
+                <a:latin typeface="Aptos" panose="020B0004020202020204" pitchFamily="34" charset="0"/>
+                <a:ea typeface="Aptos" panose="020B0004020202020204" pitchFamily="34" charset="0"/>
+                <a:cs typeface="Times New Roman" panose="02020603050405020304" pitchFamily="18" charset="0"/>
+              </a:rPr>
+              <a:t>GitHubot</a:t>
+            </a:r>
+            <a:r>
+              <a:rPr lang="hu-HU" sz="1800" kern="100" dirty="0">
+                <a:effectLst/>
+                <a:latin typeface="Aptos" panose="020B0004020202020204" pitchFamily="34" charset="0"/>
+                <a:ea typeface="Aptos" panose="020B0004020202020204" pitchFamily="34" charset="0"/>
+                <a:cs typeface="Times New Roman" panose="02020603050405020304" pitchFamily="18" charset="0"/>
+              </a:rPr>
+              <a:t> használtuk fájlmegosztásra és verziókövetésre. A </a:t>
+            </a:r>
+            <a:r>
+              <a:rPr lang="hu-HU" sz="1800" b="1" kern="100" dirty="0" err="1">
+                <a:effectLst/>
+                <a:latin typeface="Aptos" panose="020B0004020202020204" pitchFamily="34" charset="0"/>
+                <a:ea typeface="Aptos" panose="020B0004020202020204" pitchFamily="34" charset="0"/>
+                <a:cs typeface="Times New Roman" panose="02020603050405020304" pitchFamily="18" charset="0"/>
+              </a:rPr>
+              <a:t>Branch</a:t>
+            </a:r>
+            <a:r>
+              <a:rPr lang="hu-HU" sz="1800" b="1" kern="100" dirty="0">
+                <a:effectLst/>
+                <a:latin typeface="Aptos" panose="020B0004020202020204" pitchFamily="34" charset="0"/>
+                <a:ea typeface="Aptos" panose="020B0004020202020204" pitchFamily="34" charset="0"/>
+                <a:cs typeface="Times New Roman" panose="02020603050405020304" pitchFamily="18" charset="0"/>
+              </a:rPr>
+              <a:t>-ek</a:t>
+            </a:r>
+            <a:r>
+              <a:rPr lang="hu-HU" sz="1800" kern="100" dirty="0">
+                <a:effectLst/>
+                <a:latin typeface="Aptos" panose="020B0004020202020204" pitchFamily="34" charset="0"/>
+                <a:ea typeface="Aptos" panose="020B0004020202020204" pitchFamily="34" charset="0"/>
+                <a:cs typeface="Times New Roman" panose="02020603050405020304" pitchFamily="18" charset="0"/>
+              </a:rPr>
+              <a:t>, vagyis ágak kezelésével elkerültük, hogy egymás munkáját felülírjuk, a jogosultságkezelés pedig biztosította a dokumentáció és a konfigurációs fájlok védelmét. Ez a két rendszer együtt adta meg azt a keretet, amivel a tervezéstől a hibajavításig minden folyamatunk átlátható és visszakövethető maradt.</a:t>
+            </a:r>
+          </a:p>
+          <a:p>
+            <a:endParaRPr lang="hu-HU" dirty="0"/>
+          </a:p>
+        </p:txBody>
+      </p:sp>
+      <p:sp>
+        <p:nvSpPr>
+          <p:cNvPr id="4" name="Dia számának helye 3"/>
+          <p:cNvSpPr>
+            <a:spLocks noGrp="1"/>
+          </p:cNvSpPr>
+          <p:nvPr>
+            <p:ph type="sldNum" sz="quarter" idx="5"/>
+          </p:nvPr>
+        </p:nvSpPr>
+        <p:spPr/>
+        <p:txBody>
+          <a:bodyPr/>
+          <a:lstStyle/>
+          <a:p>
+            <a:fld id="{1087266A-CB85-4818-B702-CBAEB43B1A09}" type="slidenum">
+              <a:rPr lang="hu-HU" smtClean="0"/>
+              <a:t>17</a:t>
+            </a:fld>
+            <a:endParaRPr lang="hu-HU"/>
+          </a:p>
+        </p:txBody>
+      </p:sp>
+    </p:spTree>
+    <p:extLst>
+      <p:ext uri="{BB962C8B-B14F-4D97-AF65-F5344CB8AC3E}">
+        <p14:creationId xmlns:p14="http://schemas.microsoft.com/office/powerpoint/2010/main" val="3026698388"/>
+      </p:ext>
+    </p:extLst>
+  </p:cSld>
+  <p:clrMapOvr>
+    <a:masterClrMapping/>
+  </p:clrMapOvr>
+</p:notes>
+</file>
+
+<file path=ppt/notesSlides/notesSlide17.xml><?xml version="1.0" encoding="utf-8"?>
+<p:notes xmlns:a="http://schemas.openxmlformats.org/drawingml/2006/main" xmlns:r="http://schemas.openxmlformats.org/officeDocument/2006/relationships" xmlns:p="http://schemas.openxmlformats.org/presentationml/2006/main">
+  <p:cSld>
+    <p:spTree>
+      <p:nvGrpSpPr>
+        <p:cNvPr id="1" name=""/>
+        <p:cNvGrpSpPr/>
+        <p:nvPr/>
+      </p:nvGrpSpPr>
+      <p:grpSpPr>
+        <a:xfrm>
+          <a:off x="0" y="0"/>
+          <a:ext cx="0" cy="0"/>
+          <a:chOff x="0" y="0"/>
+          <a:chExt cx="0" cy="0"/>
+        </a:xfrm>
+      </p:grpSpPr>
+      <p:sp>
+        <p:nvSpPr>
+          <p:cNvPr id="2" name="Diakép helye 1"/>
+          <p:cNvSpPr>
+            <a:spLocks noGrp="1" noRot="1" noChangeAspect="1"/>
+          </p:cNvSpPr>
+          <p:nvPr>
+            <p:ph type="sldImg"/>
+          </p:nvPr>
+        </p:nvSpPr>
+        <p:spPr/>
+      </p:sp>
+      <p:sp>
+        <p:nvSpPr>
+          <p:cNvPr id="3" name="Jegyzetek helye 2"/>
+          <p:cNvSpPr>
+            <a:spLocks noGrp="1"/>
+          </p:cNvSpPr>
+          <p:nvPr>
+            <p:ph type="body" idx="1"/>
+          </p:nvPr>
+        </p:nvSpPr>
+        <p:spPr/>
+        <p:txBody>
+          <a:bodyPr/>
+          <a:lstStyle/>
+          <a:p>
+            <a:pPr marL="0" marR="0" lvl="0" indent="0" algn="l" defTabSz="914400" rtl="0" eaLnBrk="1" fontAlgn="auto" latinLnBrk="0" hangingPunct="1">
+              <a:lnSpc>
+                <a:spcPct val="100000"/>
+              </a:lnSpc>
+              <a:spcBef>
+                <a:spcPts val="0"/>
+              </a:spcBef>
+              <a:spcAft>
+                <a:spcPts val="0"/>
+              </a:spcAft>
+              <a:buClrTx/>
+              <a:buSzTx/>
+              <a:buFontTx/>
+              <a:buNone/>
+              <a:tabLst/>
+              <a:defRPr/>
+            </a:pPr>
+            <a:r>
+              <a:rPr lang="hu-HU" dirty="0"/>
+              <a:t>MARCI - PATRIK -- </a:t>
+            </a:r>
+            <a:r>
+              <a:rPr lang="hu-HU" sz="1800" kern="100" dirty="0">
+                <a:effectLst/>
+                <a:latin typeface="Aptos" panose="020B0004020202020204" pitchFamily="34" charset="0"/>
+                <a:ea typeface="Aptos" panose="020B0004020202020204" pitchFamily="34" charset="0"/>
+                <a:cs typeface="Times New Roman" panose="02020603050405020304" pitchFamily="18" charset="0"/>
+              </a:rPr>
+              <a:t>A hálózati infrastruktúra mellett a kiszolgálói oldalt is teljesen lemodelleztük: </a:t>
+            </a:r>
+            <a:r>
+              <a:rPr lang="hu-HU" sz="1800" b="1" kern="100" dirty="0" err="1">
+                <a:effectLst/>
+                <a:latin typeface="Aptos" panose="020B0004020202020204" pitchFamily="34" charset="0"/>
+                <a:ea typeface="Aptos" panose="020B0004020202020204" pitchFamily="34" charset="0"/>
+                <a:cs typeface="Times New Roman" panose="02020603050405020304" pitchFamily="18" charset="0"/>
+              </a:rPr>
+              <a:t>VirtualBox</a:t>
+            </a:r>
+            <a:r>
+              <a:rPr lang="hu-HU" sz="1800" b="1" kern="100" dirty="0">
+                <a:effectLst/>
+                <a:latin typeface="Aptos" panose="020B0004020202020204" pitchFamily="34" charset="0"/>
+                <a:ea typeface="Aptos" panose="020B0004020202020204" pitchFamily="34" charset="0"/>
+                <a:cs typeface="Times New Roman" panose="02020603050405020304" pitchFamily="18" charset="0"/>
+              </a:rPr>
+              <a:t> környezetben</a:t>
+            </a:r>
+            <a:r>
+              <a:rPr lang="hu-HU" sz="1800" kern="100" dirty="0">
+                <a:effectLst/>
+                <a:latin typeface="Aptos" panose="020B0004020202020204" pitchFamily="34" charset="0"/>
+                <a:ea typeface="Aptos" panose="020B0004020202020204" pitchFamily="34" charset="0"/>
+                <a:cs typeface="Times New Roman" panose="02020603050405020304" pitchFamily="18" charset="0"/>
+              </a:rPr>
+              <a:t> futtattunk Windows Server és Debian Linux példányokat, hogy szimuláljuk a valódi vállalati szolgáltatásokat. A Windows szerveren építettük fel az </a:t>
+            </a:r>
+            <a:r>
+              <a:rPr lang="hu-HU" sz="1800" b="1" kern="100" dirty="0" err="1">
+                <a:effectLst/>
+                <a:latin typeface="Aptos" panose="020B0004020202020204" pitchFamily="34" charset="0"/>
+                <a:ea typeface="Aptos" panose="020B0004020202020204" pitchFamily="34" charset="0"/>
+                <a:cs typeface="Times New Roman" panose="02020603050405020304" pitchFamily="18" charset="0"/>
+              </a:rPr>
+              <a:t>Active</a:t>
+            </a:r>
+            <a:r>
+              <a:rPr lang="hu-HU" sz="1800" b="1" kern="100" dirty="0">
+                <a:effectLst/>
+                <a:latin typeface="Aptos" panose="020B0004020202020204" pitchFamily="34" charset="0"/>
+                <a:ea typeface="Aptos" panose="020B0004020202020204" pitchFamily="34" charset="0"/>
+                <a:cs typeface="Times New Roman" panose="02020603050405020304" pitchFamily="18" charset="0"/>
+              </a:rPr>
+              <a:t> </a:t>
+            </a:r>
+            <a:r>
+              <a:rPr lang="hu-HU" sz="1800" b="1" kern="100" dirty="0" err="1">
+                <a:effectLst/>
+                <a:latin typeface="Aptos" panose="020B0004020202020204" pitchFamily="34" charset="0"/>
+                <a:ea typeface="Aptos" panose="020B0004020202020204" pitchFamily="34" charset="0"/>
+                <a:cs typeface="Times New Roman" panose="02020603050405020304" pitchFamily="18" charset="0"/>
+              </a:rPr>
+              <a:t>Directory</a:t>
+            </a:r>
+            <a:r>
+              <a:rPr lang="hu-HU" sz="1800" b="1" kern="100" dirty="0">
+                <a:effectLst/>
+                <a:latin typeface="Aptos" panose="020B0004020202020204" pitchFamily="34" charset="0"/>
+                <a:ea typeface="Aptos" panose="020B0004020202020204" pitchFamily="34" charset="0"/>
+                <a:cs typeface="Times New Roman" panose="02020603050405020304" pitchFamily="18" charset="0"/>
+              </a:rPr>
+              <a:t>-t</a:t>
+            </a:r>
+            <a:r>
+              <a:rPr lang="hu-HU" sz="1800" kern="100" dirty="0">
+                <a:effectLst/>
+                <a:latin typeface="Aptos" panose="020B0004020202020204" pitchFamily="34" charset="0"/>
+                <a:ea typeface="Aptos" panose="020B0004020202020204" pitchFamily="34" charset="0"/>
+                <a:cs typeface="Times New Roman" panose="02020603050405020304" pitchFamily="18" charset="0"/>
+              </a:rPr>
+              <a:t> a központi jogosultságkezeléshez, valamint itt futnak a kritikus alapok, mint a </a:t>
+            </a:r>
+            <a:r>
+              <a:rPr lang="hu-HU" sz="1800" b="1" kern="100" dirty="0">
+                <a:effectLst/>
+                <a:latin typeface="Aptos" panose="020B0004020202020204" pitchFamily="34" charset="0"/>
+                <a:ea typeface="Aptos" panose="020B0004020202020204" pitchFamily="34" charset="0"/>
+                <a:cs typeface="Times New Roman" panose="02020603050405020304" pitchFamily="18" charset="0"/>
+              </a:rPr>
+              <a:t>DNS</a:t>
+            </a:r>
+            <a:r>
+              <a:rPr lang="hu-HU" sz="1800" kern="100" dirty="0">
+                <a:effectLst/>
+                <a:latin typeface="Aptos" panose="020B0004020202020204" pitchFamily="34" charset="0"/>
+                <a:ea typeface="Aptos" panose="020B0004020202020204" pitchFamily="34" charset="0"/>
+                <a:cs typeface="Times New Roman" panose="02020603050405020304" pitchFamily="18" charset="0"/>
+              </a:rPr>
+              <a:t>, a webes tartalmakért felelős </a:t>
+            </a:r>
+            <a:r>
+              <a:rPr lang="hu-HU" sz="1800" b="1" kern="100" dirty="0">
+                <a:effectLst/>
+                <a:latin typeface="Aptos" panose="020B0004020202020204" pitchFamily="34" charset="0"/>
+                <a:ea typeface="Aptos" panose="020B0004020202020204" pitchFamily="34" charset="0"/>
+                <a:cs typeface="Times New Roman" panose="02020603050405020304" pitchFamily="18" charset="0"/>
+              </a:rPr>
+              <a:t>IIS</a:t>
+            </a:r>
+            <a:r>
+              <a:rPr lang="hu-HU" sz="1800" kern="100" dirty="0">
+                <a:effectLst/>
+                <a:latin typeface="Aptos" panose="020B0004020202020204" pitchFamily="34" charset="0"/>
+                <a:ea typeface="Aptos" panose="020B0004020202020204" pitchFamily="34" charset="0"/>
+                <a:cs typeface="Times New Roman" panose="02020603050405020304" pitchFamily="18" charset="0"/>
+              </a:rPr>
+              <a:t>, illetve a nyomtató- és backup szerverek is. A csoportházirendeket </a:t>
+            </a:r>
+            <a:r>
+              <a:rPr lang="hu-HU" sz="1800" b="1" kern="100" dirty="0">
+                <a:effectLst/>
+                <a:latin typeface="Aptos" panose="020B0004020202020204" pitchFamily="34" charset="0"/>
+                <a:ea typeface="Aptos" panose="020B0004020202020204" pitchFamily="34" charset="0"/>
+                <a:cs typeface="Times New Roman" panose="02020603050405020304" pitchFamily="18" charset="0"/>
+              </a:rPr>
+              <a:t>Group Policy Managementtel</a:t>
+            </a:r>
+            <a:r>
+              <a:rPr lang="hu-HU" sz="1800" kern="100" dirty="0">
+                <a:effectLst/>
+                <a:latin typeface="Aptos" panose="020B0004020202020204" pitchFamily="34" charset="0"/>
+                <a:ea typeface="Aptos" panose="020B0004020202020204" pitchFamily="34" charset="0"/>
+                <a:cs typeface="Times New Roman" panose="02020603050405020304" pitchFamily="18" charset="0"/>
+              </a:rPr>
+              <a:t> szabályoztuk, hogy minden munkaállomás egységes és biztonságos legyen. A Linux (Debian) vonalon pedig a rugalmasság és a stabilitás volt a cél, kiegészítve a </a:t>
+            </a:r>
+            <a:r>
+              <a:rPr lang="hu-HU" sz="1800" b="1" kern="100" dirty="0">
+                <a:effectLst/>
+                <a:latin typeface="Aptos" panose="020B0004020202020204" pitchFamily="34" charset="0"/>
+                <a:ea typeface="Aptos" panose="020B0004020202020204" pitchFamily="34" charset="0"/>
+                <a:cs typeface="Times New Roman" panose="02020603050405020304" pitchFamily="18" charset="0"/>
+              </a:rPr>
+              <a:t>DHCP</a:t>
+            </a:r>
+            <a:r>
+              <a:rPr lang="hu-HU" sz="1800" kern="100" dirty="0">
+                <a:effectLst/>
+                <a:latin typeface="Aptos" panose="020B0004020202020204" pitchFamily="34" charset="0"/>
+                <a:ea typeface="Aptos" panose="020B0004020202020204" pitchFamily="34" charset="0"/>
+                <a:cs typeface="Times New Roman" panose="02020603050405020304" pitchFamily="18" charset="0"/>
+              </a:rPr>
+              <a:t> kiosztást és a hálózat egyéb támogató funkcióit, így a szoftveres és hardveres réteg egyetlen, integrált rendszert alkot.</a:t>
+            </a:r>
+          </a:p>
+          <a:p>
+            <a:endParaRPr lang="hu-HU" dirty="0"/>
+          </a:p>
+        </p:txBody>
+      </p:sp>
+      <p:sp>
+        <p:nvSpPr>
+          <p:cNvPr id="4" name="Dia számának helye 3"/>
+          <p:cNvSpPr>
+            <a:spLocks noGrp="1"/>
+          </p:cNvSpPr>
+          <p:nvPr>
+            <p:ph type="sldNum" sz="quarter" idx="5"/>
+          </p:nvPr>
+        </p:nvSpPr>
+        <p:spPr/>
+        <p:txBody>
+          <a:bodyPr/>
+          <a:lstStyle/>
+          <a:p>
+            <a:fld id="{1087266A-CB85-4818-B702-CBAEB43B1A09}" type="slidenum">
+              <a:rPr lang="hu-HU" smtClean="0"/>
+              <a:t>18</a:t>
+            </a:fld>
+            <a:endParaRPr lang="hu-HU"/>
+          </a:p>
+        </p:txBody>
+      </p:sp>
+    </p:spTree>
+    <p:extLst>
+      <p:ext uri="{BB962C8B-B14F-4D97-AF65-F5344CB8AC3E}">
+        <p14:creationId xmlns:p14="http://schemas.microsoft.com/office/powerpoint/2010/main" val="4051851489"/>
+      </p:ext>
+    </p:extLst>
+  </p:cSld>
+  <p:clrMapOvr>
+    <a:masterClrMapping/>
+  </p:clrMapOvr>
+</p:notes>
+</file>
+
+<file path=ppt/notesSlides/notesSlide18.xml><?xml version="1.0" encoding="utf-8"?>
+<p:notes xmlns:a="http://schemas.openxmlformats.org/drawingml/2006/main" xmlns:r="http://schemas.openxmlformats.org/officeDocument/2006/relationships" xmlns:p="http://schemas.openxmlformats.org/presentationml/2006/main">
+  <p:cSld>
+    <p:spTree>
+      <p:nvGrpSpPr>
+        <p:cNvPr id="1" name=""/>
+        <p:cNvGrpSpPr/>
+        <p:nvPr/>
+      </p:nvGrpSpPr>
+      <p:grpSpPr>
+        <a:xfrm>
+          <a:off x="0" y="0"/>
+          <a:ext cx="0" cy="0"/>
+          <a:chOff x="0" y="0"/>
+          <a:chExt cx="0" cy="0"/>
+        </a:xfrm>
+      </p:grpSpPr>
+      <p:sp>
+        <p:nvSpPr>
+          <p:cNvPr id="2" name="Diakép helye 1"/>
+          <p:cNvSpPr>
+            <a:spLocks noGrp="1" noRot="1" noChangeAspect="1"/>
+          </p:cNvSpPr>
+          <p:nvPr>
+            <p:ph type="sldImg"/>
+          </p:nvPr>
+        </p:nvSpPr>
+        <p:spPr/>
+      </p:sp>
+      <p:sp>
+        <p:nvSpPr>
+          <p:cNvPr id="3" name="Jegyzetek helye 2"/>
+          <p:cNvSpPr>
+            <a:spLocks noGrp="1"/>
+          </p:cNvSpPr>
+          <p:nvPr>
+            <p:ph type="body" idx="1"/>
+          </p:nvPr>
+        </p:nvSpPr>
+        <p:spPr/>
+        <p:txBody>
+          <a:bodyPr/>
+          <a:lstStyle/>
+          <a:p>
+            <a:pPr marL="0" marR="0" lvl="0" indent="0" algn="l" defTabSz="914400" rtl="0" eaLnBrk="1" fontAlgn="auto" latinLnBrk="0" hangingPunct="1">
+              <a:lnSpc>
+                <a:spcPct val="100000"/>
+              </a:lnSpc>
+              <a:spcBef>
+                <a:spcPts val="0"/>
+              </a:spcBef>
+              <a:spcAft>
+                <a:spcPts val="0"/>
+              </a:spcAft>
+              <a:buClrTx/>
+              <a:buSzTx/>
+              <a:buFontTx/>
+              <a:buNone/>
+              <a:tabLst/>
+              <a:defRPr/>
+            </a:pPr>
+            <a:r>
+              <a:rPr lang="hu-HU" dirty="0"/>
+              <a:t>MARCI – PATRIK -- </a:t>
+            </a:r>
+            <a:r>
+              <a:rPr lang="hu-HU" sz="1800" kern="100" dirty="0">
+                <a:effectLst/>
+                <a:latin typeface="Aptos" panose="020B0004020202020204" pitchFamily="34" charset="0"/>
+                <a:ea typeface="Aptos" panose="020B0004020202020204" pitchFamily="34" charset="0"/>
+                <a:cs typeface="Times New Roman" panose="02020603050405020304" pitchFamily="18" charset="0"/>
+              </a:rPr>
+              <a:t>Végül, de nem utolsósorban, a technikai infrastruktúrát egy sor támogató szoftverrel egészítettük ki a hatékony munkavégzés érdekében. A </a:t>
+            </a:r>
+            <a:r>
+              <a:rPr lang="hu-HU" sz="1800" b="1" kern="100" dirty="0" err="1">
+                <a:effectLst/>
+                <a:latin typeface="Aptos" panose="020B0004020202020204" pitchFamily="34" charset="0"/>
+                <a:ea typeface="Aptos" panose="020B0004020202020204" pitchFamily="34" charset="0"/>
+                <a:cs typeface="Times New Roman" panose="02020603050405020304" pitchFamily="18" charset="0"/>
+              </a:rPr>
+              <a:t>Discord</a:t>
+            </a:r>
+            <a:r>
+              <a:rPr lang="hu-HU" sz="1800" kern="100" dirty="0">
+                <a:effectLst/>
+                <a:latin typeface="Aptos" panose="020B0004020202020204" pitchFamily="34" charset="0"/>
+                <a:ea typeface="Aptos" panose="020B0004020202020204" pitchFamily="34" charset="0"/>
+                <a:cs typeface="Times New Roman" panose="02020603050405020304" pitchFamily="18" charset="0"/>
+              </a:rPr>
+              <a:t> szolgált a belső kommunikáció bázisául, ahol a gyors döntéseket hoztuk meg, míg a </a:t>
+            </a:r>
+            <a:r>
+              <a:rPr lang="hu-HU" sz="1800" b="1" kern="100" dirty="0">
+                <a:effectLst/>
+                <a:latin typeface="Aptos" panose="020B0004020202020204" pitchFamily="34" charset="0"/>
+                <a:ea typeface="Aptos" panose="020B0004020202020204" pitchFamily="34" charset="0"/>
+                <a:cs typeface="Times New Roman" panose="02020603050405020304" pitchFamily="18" charset="0"/>
+              </a:rPr>
+              <a:t>Google Drive</a:t>
+            </a:r>
+            <a:r>
+              <a:rPr lang="hu-HU" sz="1800" kern="100" dirty="0">
+                <a:effectLst/>
+                <a:latin typeface="Aptos" panose="020B0004020202020204" pitchFamily="34" charset="0"/>
+                <a:ea typeface="Aptos" panose="020B0004020202020204" pitchFamily="34" charset="0"/>
+                <a:cs typeface="Times New Roman" panose="02020603050405020304" pitchFamily="18" charset="0"/>
+              </a:rPr>
+              <a:t> biztosította a dokumentációink központi, felhőalapú tárolását és rendszerezését. Mivel a projektet dokumentálni is szerettük volna, az </a:t>
+            </a:r>
+            <a:r>
+              <a:rPr lang="hu-HU" sz="1800" b="1" kern="100" dirty="0">
+                <a:effectLst/>
+                <a:latin typeface="Aptos" panose="020B0004020202020204" pitchFamily="34" charset="0"/>
+                <a:ea typeface="Aptos" panose="020B0004020202020204" pitchFamily="34" charset="0"/>
+                <a:cs typeface="Times New Roman" panose="02020603050405020304" pitchFamily="18" charset="0"/>
+              </a:rPr>
+              <a:t>OBS </a:t>
+            </a:r>
+            <a:r>
+              <a:rPr lang="hu-HU" sz="1800" b="1" kern="100" dirty="0" err="1">
+                <a:effectLst/>
+                <a:latin typeface="Aptos" panose="020B0004020202020204" pitchFamily="34" charset="0"/>
+                <a:ea typeface="Aptos" panose="020B0004020202020204" pitchFamily="34" charset="0"/>
+                <a:cs typeface="Times New Roman" panose="02020603050405020304" pitchFamily="18" charset="0"/>
+              </a:rPr>
+              <a:t>Studio</a:t>
+            </a:r>
+            <a:r>
+              <a:rPr lang="hu-HU" sz="1800" kern="100" dirty="0">
+                <a:effectLst/>
+                <a:latin typeface="Aptos" panose="020B0004020202020204" pitchFamily="34" charset="0"/>
+                <a:ea typeface="Aptos" panose="020B0004020202020204" pitchFamily="34" charset="0"/>
+                <a:cs typeface="Times New Roman" panose="02020603050405020304" pitchFamily="18" charset="0"/>
+              </a:rPr>
+              <a:t> segítségével rögzítettük a nyersanyagokat és a hálózati szimulációkat, a végső, bemutatásra szánt videókat pedig </a:t>
+            </a:r>
+            <a:r>
+              <a:rPr lang="hu-HU" sz="1800" b="1" kern="100" dirty="0" err="1">
+                <a:effectLst/>
+                <a:latin typeface="Aptos" panose="020B0004020202020204" pitchFamily="34" charset="0"/>
+                <a:ea typeface="Aptos" panose="020B0004020202020204" pitchFamily="34" charset="0"/>
+                <a:cs typeface="Times New Roman" panose="02020603050405020304" pitchFamily="18" charset="0"/>
+              </a:rPr>
+              <a:t>DaVinci</a:t>
+            </a:r>
+            <a:r>
+              <a:rPr lang="hu-HU" sz="1800" b="1" kern="100" dirty="0">
+                <a:effectLst/>
+                <a:latin typeface="Aptos" panose="020B0004020202020204" pitchFamily="34" charset="0"/>
+                <a:ea typeface="Aptos" panose="020B0004020202020204" pitchFamily="34" charset="0"/>
+                <a:cs typeface="Times New Roman" panose="02020603050405020304" pitchFamily="18" charset="0"/>
+              </a:rPr>
+              <a:t> </a:t>
+            </a:r>
+            <a:r>
+              <a:rPr lang="hu-HU" sz="1800" b="1" kern="100" dirty="0" err="1">
+                <a:effectLst/>
+                <a:latin typeface="Aptos" panose="020B0004020202020204" pitchFamily="34" charset="0"/>
+                <a:ea typeface="Aptos" panose="020B0004020202020204" pitchFamily="34" charset="0"/>
+                <a:cs typeface="Times New Roman" panose="02020603050405020304" pitchFamily="18" charset="0"/>
+              </a:rPr>
+              <a:t>Resolve</a:t>
+            </a:r>
+            <a:r>
+              <a:rPr lang="hu-HU" sz="1800" kern="100" dirty="0">
+                <a:effectLst/>
+                <a:latin typeface="Aptos" panose="020B0004020202020204" pitchFamily="34" charset="0"/>
+                <a:ea typeface="Aptos" panose="020B0004020202020204" pitchFamily="34" charset="0"/>
+                <a:cs typeface="Times New Roman" panose="02020603050405020304" pitchFamily="18" charset="0"/>
+              </a:rPr>
+              <a:t>-ban vágtuk össze. Ezek az eszközök tették lehetővé, hogy a komplex mérnöki folyamatokat egy jól emészthető és látványos prezentáció formájában tudjuk most elétek tárni.</a:t>
+            </a:r>
+          </a:p>
+          <a:p>
+            <a:endParaRPr lang="hu-HU" dirty="0"/>
+          </a:p>
+        </p:txBody>
+      </p:sp>
+      <p:sp>
+        <p:nvSpPr>
+          <p:cNvPr id="4" name="Dia számának helye 3"/>
+          <p:cNvSpPr>
+            <a:spLocks noGrp="1"/>
+          </p:cNvSpPr>
+          <p:nvPr>
+            <p:ph type="sldNum" sz="quarter" idx="5"/>
+          </p:nvPr>
+        </p:nvSpPr>
+        <p:spPr/>
+        <p:txBody>
+          <a:bodyPr/>
+          <a:lstStyle/>
+          <a:p>
+            <a:fld id="{1087266A-CB85-4818-B702-CBAEB43B1A09}" type="slidenum">
+              <a:rPr lang="hu-HU" smtClean="0"/>
+              <a:t>19</a:t>
+            </a:fld>
+            <a:endParaRPr lang="hu-HU"/>
+          </a:p>
+        </p:txBody>
+      </p:sp>
+    </p:spTree>
+    <p:extLst>
+      <p:ext uri="{BB962C8B-B14F-4D97-AF65-F5344CB8AC3E}">
+        <p14:creationId xmlns:p14="http://schemas.microsoft.com/office/powerpoint/2010/main" val="421288188"/>
+      </p:ext>
+    </p:extLst>
+  </p:cSld>
+  <p:clrMapOvr>
+    <a:masterClrMapping/>
+  </p:clrMapOvr>
+</p:notes>
+</file>
+
+<file path=ppt/notesSlides/notesSlide19.xml><?xml version="1.0" encoding="utf-8"?>
+<p:notes xmlns:a="http://schemas.openxmlformats.org/drawingml/2006/main" xmlns:r="http://schemas.openxmlformats.org/officeDocument/2006/relationships" xmlns:p="http://schemas.openxmlformats.org/presentationml/2006/main">
+  <p:cSld>
+    <p:spTree>
+      <p:nvGrpSpPr>
+        <p:cNvPr id="1" name=""/>
+        <p:cNvGrpSpPr/>
+        <p:nvPr/>
+      </p:nvGrpSpPr>
+      <p:grpSpPr>
+        <a:xfrm>
+          <a:off x="0" y="0"/>
+          <a:ext cx="0" cy="0"/>
+          <a:chOff x="0" y="0"/>
+          <a:chExt cx="0" cy="0"/>
+        </a:xfrm>
+      </p:grpSpPr>
+      <p:sp>
+        <p:nvSpPr>
+          <p:cNvPr id="2" name="Diakép helye 1"/>
+          <p:cNvSpPr>
+            <a:spLocks noGrp="1" noRot="1" noChangeAspect="1"/>
+          </p:cNvSpPr>
+          <p:nvPr>
+            <p:ph type="sldImg"/>
+          </p:nvPr>
+        </p:nvSpPr>
+        <p:spPr/>
+      </p:sp>
+      <p:sp>
+        <p:nvSpPr>
+          <p:cNvPr id="3" name="Jegyzetek helye 2"/>
+          <p:cNvSpPr>
+            <a:spLocks noGrp="1"/>
+          </p:cNvSpPr>
+          <p:nvPr>
+            <p:ph type="body" idx="1"/>
+          </p:nvPr>
+        </p:nvSpPr>
+        <p:spPr/>
+        <p:txBody>
+          <a:bodyPr/>
+          <a:lstStyle/>
+          <a:p>
+            <a:pPr marL="0" marR="0" lvl="0" indent="0" algn="l" defTabSz="914400" rtl="0" eaLnBrk="1" fontAlgn="auto" latinLnBrk="0" hangingPunct="1">
+              <a:lnSpc>
+                <a:spcPct val="100000"/>
+              </a:lnSpc>
+              <a:spcBef>
+                <a:spcPts val="0"/>
+              </a:spcBef>
+              <a:spcAft>
+                <a:spcPts val="0"/>
+              </a:spcAft>
+              <a:buClrTx/>
+              <a:buSzTx/>
+              <a:buFontTx/>
+              <a:buNone/>
+              <a:tabLst/>
+              <a:defRPr/>
+            </a:pPr>
+            <a:r>
+              <a:rPr lang="hu-HU" dirty="0"/>
+              <a:t>PATRIK -- </a:t>
+            </a:r>
+            <a:r>
+              <a:rPr lang="hu-HU" sz="1800" kern="100" dirty="0">
+                <a:effectLst/>
+                <a:latin typeface="Aptos" panose="020B0004020202020204" pitchFamily="34" charset="0"/>
+                <a:ea typeface="Aptos" panose="020B0004020202020204" pitchFamily="34" charset="0"/>
+                <a:cs typeface="Times New Roman" panose="02020603050405020304" pitchFamily="18" charset="0"/>
+              </a:rPr>
+              <a:t>Ahogy a grafikonon is látszik, a munkamegosztásunk szinte sebészi pontossággal feleződött meg Marcell és Patrik között. Nemcsak a feladatokat osztottuk le, hanem a felelősséget is: amíg egyikünk a hálózati logikát és a biztonsági protokollokat </a:t>
+            </a:r>
+            <a:r>
+              <a:rPr lang="hu-HU" sz="1800" kern="100" dirty="0" err="1">
+                <a:effectLst/>
+                <a:latin typeface="Aptos" panose="020B0004020202020204" pitchFamily="34" charset="0"/>
+                <a:ea typeface="Aptos" panose="020B0004020202020204" pitchFamily="34" charset="0"/>
+                <a:cs typeface="Times New Roman" panose="02020603050405020304" pitchFamily="18" charset="0"/>
+              </a:rPr>
+              <a:t>finomhangolta</a:t>
+            </a:r>
+            <a:r>
+              <a:rPr lang="hu-HU" sz="1800" kern="100" dirty="0">
+                <a:effectLst/>
+                <a:latin typeface="Aptos" panose="020B0004020202020204" pitchFamily="34" charset="0"/>
+                <a:ea typeface="Aptos" panose="020B0004020202020204" pitchFamily="34" charset="0"/>
+                <a:cs typeface="Times New Roman" panose="02020603050405020304" pitchFamily="18" charset="0"/>
+              </a:rPr>
+              <a:t>, a másikunk a szerveroldali szolgáltatásokért és a precíz dokumentációért felelt. A </a:t>
+            </a:r>
+            <a:r>
+              <a:rPr lang="hu-HU" sz="1800" kern="100" dirty="0" err="1">
+                <a:effectLst/>
+                <a:latin typeface="Aptos" panose="020B0004020202020204" pitchFamily="34" charset="0"/>
+                <a:ea typeface="Aptos" panose="020B0004020202020204" pitchFamily="34" charset="0"/>
+                <a:cs typeface="Times New Roman" panose="02020603050405020304" pitchFamily="18" charset="0"/>
+              </a:rPr>
+              <a:t>Jira</a:t>
+            </a:r>
+            <a:r>
+              <a:rPr lang="hu-HU" sz="1800" kern="100" dirty="0">
+                <a:effectLst/>
+                <a:latin typeface="Aptos" panose="020B0004020202020204" pitchFamily="34" charset="0"/>
+                <a:ea typeface="Aptos" panose="020B0004020202020204" pitchFamily="34" charset="0"/>
+                <a:cs typeface="Times New Roman" panose="02020603050405020304" pitchFamily="18" charset="0"/>
+              </a:rPr>
+              <a:t>-ban mért több mint </a:t>
+            </a:r>
+            <a:r>
+              <a:rPr lang="hu-HU" sz="1800" b="1" kern="100" dirty="0">
+                <a:effectLst/>
+                <a:latin typeface="Aptos" panose="020B0004020202020204" pitchFamily="34" charset="0"/>
+                <a:ea typeface="Aptos" panose="020B0004020202020204" pitchFamily="34" charset="0"/>
+                <a:cs typeface="Times New Roman" panose="02020603050405020304" pitchFamily="18" charset="0"/>
+              </a:rPr>
+              <a:t>100-100 munkaóra</a:t>
+            </a:r>
+            <a:r>
+              <a:rPr lang="hu-HU" sz="1800" kern="100" dirty="0">
+                <a:effectLst/>
+                <a:latin typeface="Aptos" panose="020B0004020202020204" pitchFamily="34" charset="0"/>
+                <a:ea typeface="Aptos" panose="020B0004020202020204" pitchFamily="34" charset="0"/>
+                <a:cs typeface="Times New Roman" panose="02020603050405020304" pitchFamily="18" charset="0"/>
+              </a:rPr>
+              <a:t> nem csak a gépelést jelenti, hanem azt a rengeteg közös ötletelést és hibajavítást is, aminek köszönhetően a rendszerünk minden eleme stabilan együttműködik. Ez a kiegyensúlyozott munkatempó volt a kulcsa annak, hogy a határidőket tartva, egy teljesen </a:t>
+            </a:r>
+            <a:r>
+              <a:rPr lang="hu-HU" sz="1800" kern="100" dirty="0" err="1">
+                <a:effectLst/>
+                <a:latin typeface="Aptos" panose="020B0004020202020204" pitchFamily="34" charset="0"/>
+                <a:ea typeface="Aptos" panose="020B0004020202020204" pitchFamily="34" charset="0"/>
+                <a:cs typeface="Times New Roman" panose="02020603050405020304" pitchFamily="18" charset="0"/>
+              </a:rPr>
+              <a:t>validált</a:t>
+            </a:r>
+            <a:r>
+              <a:rPr lang="hu-HU" sz="1800" kern="100" dirty="0">
+                <a:effectLst/>
+                <a:latin typeface="Aptos" panose="020B0004020202020204" pitchFamily="34" charset="0"/>
+                <a:ea typeface="Aptos" panose="020B0004020202020204" pitchFamily="34" charset="0"/>
+                <a:cs typeface="Times New Roman" panose="02020603050405020304" pitchFamily="18" charset="0"/>
+              </a:rPr>
+              <a:t> és tesztelt hálózatot tudtunk letenni az asztalra.</a:t>
+            </a:r>
+          </a:p>
+          <a:p>
+            <a:endParaRPr lang="hu-HU" dirty="0"/>
+          </a:p>
+        </p:txBody>
+      </p:sp>
+      <p:sp>
+        <p:nvSpPr>
+          <p:cNvPr id="4" name="Dia számának helye 3"/>
+          <p:cNvSpPr>
+            <a:spLocks noGrp="1"/>
+          </p:cNvSpPr>
+          <p:nvPr>
+            <p:ph type="sldNum" sz="quarter" idx="5"/>
+          </p:nvPr>
+        </p:nvSpPr>
+        <p:spPr/>
+        <p:txBody>
+          <a:bodyPr/>
+          <a:lstStyle/>
+          <a:p>
+            <a:fld id="{1087266A-CB85-4818-B702-CBAEB43B1A09}" type="slidenum">
+              <a:rPr lang="hu-HU" smtClean="0"/>
+              <a:t>20</a:t>
+            </a:fld>
+            <a:endParaRPr lang="hu-HU"/>
+          </a:p>
+        </p:txBody>
+      </p:sp>
+    </p:spTree>
+    <p:extLst>
+      <p:ext uri="{BB962C8B-B14F-4D97-AF65-F5344CB8AC3E}">
+        <p14:creationId xmlns:p14="http://schemas.microsoft.com/office/powerpoint/2010/main" val="3523226696"/>
+      </p:ext>
+    </p:extLst>
+  </p:cSld>
+  <p:clrMapOvr>
+    <a:masterClrMapping/>
+  </p:clrMapOvr>
+</p:notes>
+</file>
+
+<file path=ppt/notesSlides/notesSlide2.xml><?xml version="1.0" encoding="utf-8"?>
+<p:notes xmlns:a="http://schemas.openxmlformats.org/drawingml/2006/main" xmlns:r="http://schemas.openxmlformats.org/officeDocument/2006/relationships" xmlns:p="http://schemas.openxmlformats.org/presentationml/2006/main">
+  <p:cSld>
+    <p:spTree>
+      <p:nvGrpSpPr>
+        <p:cNvPr id="1" name=""/>
+        <p:cNvGrpSpPr/>
+        <p:nvPr/>
+      </p:nvGrpSpPr>
+      <p:grpSpPr>
+        <a:xfrm>
+          <a:off x="0" y="0"/>
+          <a:ext cx="0" cy="0"/>
+          <a:chOff x="0" y="0"/>
+          <a:chExt cx="0" cy="0"/>
+        </a:xfrm>
+      </p:grpSpPr>
+      <p:sp>
+        <p:nvSpPr>
+          <p:cNvPr id="2" name="Diakép helye 1"/>
+          <p:cNvSpPr>
+            <a:spLocks noGrp="1" noRot="1" noChangeAspect="1"/>
+          </p:cNvSpPr>
+          <p:nvPr>
+            <p:ph type="sldImg"/>
+          </p:nvPr>
+        </p:nvSpPr>
+        <p:spPr/>
+      </p:sp>
+      <p:sp>
+        <p:nvSpPr>
+          <p:cNvPr id="3" name="Jegyzetek helye 2"/>
+          <p:cNvSpPr>
+            <a:spLocks noGrp="1"/>
+          </p:cNvSpPr>
+          <p:nvPr>
+            <p:ph type="body" idx="1"/>
+          </p:nvPr>
+        </p:nvSpPr>
+        <p:spPr/>
+        <p:txBody>
+          <a:bodyPr/>
+          <a:lstStyle/>
+          <a:p>
+            <a:pPr marL="0" marR="0" lvl="0" indent="0" algn="l" defTabSz="914400" rtl="0" eaLnBrk="1" fontAlgn="auto" latinLnBrk="0" hangingPunct="1">
+              <a:lnSpc>
+                <a:spcPct val="100000"/>
+              </a:lnSpc>
+              <a:spcBef>
+                <a:spcPts val="0"/>
+              </a:spcBef>
+              <a:spcAft>
+                <a:spcPts val="0"/>
+              </a:spcAft>
+              <a:buClrTx/>
+              <a:buSzTx/>
+              <a:buFontTx/>
+              <a:buNone/>
+              <a:tabLst/>
+              <a:defRPr/>
+            </a:pPr>
+            <a:r>
+              <a:rPr lang="hu-HU" sz="1800" kern="100" dirty="0">
+                <a:effectLst/>
+                <a:latin typeface="Aptos" panose="020B0004020202020204" pitchFamily="34" charset="0"/>
+                <a:ea typeface="Aptos" panose="020B0004020202020204" pitchFamily="34" charset="0"/>
+                <a:cs typeface="Times New Roman" panose="02020603050405020304" pitchFamily="18" charset="0"/>
+              </a:rPr>
+              <a:t>A munkamegosztásnál figyeltünk arra, hogy ne csak csináljuk a feladatokat, hanem </a:t>
+            </a:r>
+            <a:r>
+              <a:rPr lang="hu-HU" sz="1800" b="1" kern="100" dirty="0">
+                <a:effectLst/>
+                <a:latin typeface="Aptos" panose="020B0004020202020204" pitchFamily="34" charset="0"/>
+                <a:ea typeface="Aptos" panose="020B0004020202020204" pitchFamily="34" charset="0"/>
+                <a:cs typeface="Times New Roman" panose="02020603050405020304" pitchFamily="18" charset="0"/>
+              </a:rPr>
+              <a:t>egymást ellenőrizzük is</a:t>
+            </a:r>
+            <a:r>
+              <a:rPr lang="hu-HU" sz="1800" kern="100" dirty="0">
+                <a:effectLst/>
+                <a:latin typeface="Aptos" panose="020B0004020202020204" pitchFamily="34" charset="0"/>
+                <a:ea typeface="Aptos" panose="020B0004020202020204" pitchFamily="34" charset="0"/>
+                <a:cs typeface="Times New Roman" panose="02020603050405020304" pitchFamily="18" charset="0"/>
+              </a:rPr>
+              <a:t>. Amíg egyikünk a konfigurációt végezte, a másik a dokumentációt és a tesztelést frissítette. Így elkerültük a hibákat, és a projekt végére egy olyan anyagot raktunk össze, amiből bárki pontosan látja, hogyan épül fel a rendszerünk.</a:t>
+            </a:r>
+          </a:p>
+          <a:p>
+            <a:endParaRPr lang="hu-HU" dirty="0"/>
+          </a:p>
+        </p:txBody>
+      </p:sp>
+      <p:sp>
+        <p:nvSpPr>
+          <p:cNvPr id="4" name="Dia számának helye 3"/>
+          <p:cNvSpPr>
+            <a:spLocks noGrp="1"/>
+          </p:cNvSpPr>
+          <p:nvPr>
+            <p:ph type="sldNum" sz="quarter" idx="5"/>
+          </p:nvPr>
+        </p:nvSpPr>
+        <p:spPr/>
+        <p:txBody>
+          <a:bodyPr/>
+          <a:lstStyle/>
+          <a:p>
+            <a:fld id="{1087266A-CB85-4818-B702-CBAEB43B1A09}" type="slidenum">
+              <a:rPr lang="hu-HU" smtClean="0"/>
+              <a:t>3</a:t>
+            </a:fld>
+            <a:endParaRPr lang="hu-HU"/>
+          </a:p>
+        </p:txBody>
+      </p:sp>
+    </p:spTree>
+    <p:extLst>
+      <p:ext uri="{BB962C8B-B14F-4D97-AF65-F5344CB8AC3E}">
+        <p14:creationId xmlns:p14="http://schemas.microsoft.com/office/powerpoint/2010/main" val="3792845293"/>
+      </p:ext>
+    </p:extLst>
+  </p:cSld>
+  <p:clrMapOvr>
+    <a:masterClrMapping/>
+  </p:clrMapOvr>
+</p:notes>
+</file>
+
+<file path=ppt/notesSlides/notesSlide3.xml><?xml version="1.0" encoding="utf-8"?>
+<p:notes xmlns:a="http://schemas.openxmlformats.org/drawingml/2006/main" xmlns:r="http://schemas.openxmlformats.org/officeDocument/2006/relationships" xmlns:p="http://schemas.openxmlformats.org/presentationml/2006/main">
+  <p:cSld>
+    <p:spTree>
+      <p:nvGrpSpPr>
+        <p:cNvPr id="1" name=""/>
+        <p:cNvGrpSpPr/>
+        <p:nvPr/>
+      </p:nvGrpSpPr>
+      <p:grpSpPr>
+        <a:xfrm>
+          <a:off x="0" y="0"/>
+          <a:ext cx="0" cy="0"/>
+          <a:chOff x="0" y="0"/>
+          <a:chExt cx="0" cy="0"/>
+        </a:xfrm>
+      </p:grpSpPr>
+      <p:sp>
+        <p:nvSpPr>
+          <p:cNvPr id="2" name="Diakép helye 1"/>
+          <p:cNvSpPr>
+            <a:spLocks noGrp="1" noRot="1" noChangeAspect="1"/>
+          </p:cNvSpPr>
+          <p:nvPr>
+            <p:ph type="sldImg"/>
+          </p:nvPr>
+        </p:nvSpPr>
+        <p:spPr/>
+      </p:sp>
+      <p:sp>
+        <p:nvSpPr>
+          <p:cNvPr id="3" name="Jegyzetek helye 2"/>
+          <p:cNvSpPr>
+            <a:spLocks noGrp="1"/>
+          </p:cNvSpPr>
+          <p:nvPr>
+            <p:ph type="body" idx="1"/>
+          </p:nvPr>
+        </p:nvSpPr>
+        <p:spPr/>
+        <p:txBody>
+          <a:bodyPr/>
+          <a:lstStyle/>
+          <a:p>
+            <a:pPr marL="0" marR="0" lvl="0" indent="0" algn="l" defTabSz="914400" rtl="0" eaLnBrk="1" fontAlgn="auto" latinLnBrk="0" hangingPunct="1">
+              <a:lnSpc>
+                <a:spcPct val="100000"/>
+              </a:lnSpc>
+              <a:spcBef>
+                <a:spcPts val="0"/>
+              </a:spcBef>
+              <a:spcAft>
+                <a:spcPts val="0"/>
+              </a:spcAft>
+              <a:buClrTx/>
+              <a:buSzTx/>
+              <a:buFontTx/>
+              <a:buNone/>
+              <a:tabLst/>
+              <a:defRPr/>
+            </a:pPr>
+            <a:r>
+              <a:rPr lang="hu-HU" sz="1800" kern="100" dirty="0">
+                <a:effectLst/>
+                <a:latin typeface="Aptos" panose="020B0004020202020204" pitchFamily="34" charset="0"/>
+                <a:ea typeface="Aptos" panose="020B0004020202020204" pitchFamily="34" charset="0"/>
+                <a:cs typeface="Times New Roman" panose="02020603050405020304" pitchFamily="18" charset="0"/>
+              </a:rPr>
+              <a:t>A hálózatot </a:t>
+            </a:r>
+            <a:r>
+              <a:rPr lang="hu-HU" sz="1800" b="1" kern="100" dirty="0">
+                <a:effectLst/>
+                <a:latin typeface="Aptos" panose="020B0004020202020204" pitchFamily="34" charset="0"/>
+                <a:ea typeface="Aptos" panose="020B0004020202020204" pitchFamily="34" charset="0"/>
+                <a:cs typeface="Times New Roman" panose="02020603050405020304" pitchFamily="18" charset="0"/>
+              </a:rPr>
+              <a:t>Cisco </a:t>
+            </a:r>
+            <a:r>
+              <a:rPr lang="hu-HU" sz="1800" b="1" kern="100" dirty="0" err="1">
+                <a:effectLst/>
+                <a:latin typeface="Aptos" panose="020B0004020202020204" pitchFamily="34" charset="0"/>
+                <a:ea typeface="Aptos" panose="020B0004020202020204" pitchFamily="34" charset="0"/>
+                <a:cs typeface="Times New Roman" panose="02020603050405020304" pitchFamily="18" charset="0"/>
+              </a:rPr>
+              <a:t>Packet</a:t>
+            </a:r>
+            <a:r>
+              <a:rPr lang="hu-HU" sz="1800" b="1" kern="100" dirty="0">
+                <a:effectLst/>
+                <a:latin typeface="Aptos" panose="020B0004020202020204" pitchFamily="34" charset="0"/>
+                <a:ea typeface="Aptos" panose="020B0004020202020204" pitchFamily="34" charset="0"/>
+                <a:cs typeface="Times New Roman" panose="02020603050405020304" pitchFamily="18" charset="0"/>
+              </a:rPr>
+              <a:t> </a:t>
+            </a:r>
+            <a:r>
+              <a:rPr lang="hu-HU" sz="1800" b="1" kern="100" dirty="0" err="1">
+                <a:effectLst/>
+                <a:latin typeface="Aptos" panose="020B0004020202020204" pitchFamily="34" charset="0"/>
+                <a:ea typeface="Aptos" panose="020B0004020202020204" pitchFamily="34" charset="0"/>
+                <a:cs typeface="Times New Roman" panose="02020603050405020304" pitchFamily="18" charset="0"/>
+              </a:rPr>
+              <a:t>Tracerben</a:t>
+            </a:r>
+            <a:r>
+              <a:rPr lang="hu-HU" sz="1800" kern="100" dirty="0">
+                <a:effectLst/>
+                <a:latin typeface="Aptos" panose="020B0004020202020204" pitchFamily="34" charset="0"/>
+                <a:ea typeface="Aptos" panose="020B0004020202020204" pitchFamily="34" charset="0"/>
+                <a:cs typeface="Times New Roman" panose="02020603050405020304" pitchFamily="18" charset="0"/>
+              </a:rPr>
+              <a:t> szimuláltuk, hogy éles bevetés előtt tesztelhessük a működést. A felépítésnél </a:t>
+            </a:r>
+            <a:r>
+              <a:rPr lang="hu-HU" sz="1800" b="1" kern="100" dirty="0">
+                <a:effectLst/>
+                <a:latin typeface="Aptos" panose="020B0004020202020204" pitchFamily="34" charset="0"/>
+                <a:ea typeface="Aptos" panose="020B0004020202020204" pitchFamily="34" charset="0"/>
+                <a:cs typeface="Times New Roman" panose="02020603050405020304" pitchFamily="18" charset="0"/>
+              </a:rPr>
+              <a:t>kevert topológiát</a:t>
+            </a:r>
+            <a:r>
+              <a:rPr lang="hu-HU" sz="1800" kern="100" dirty="0">
+                <a:effectLst/>
+                <a:latin typeface="Aptos" panose="020B0004020202020204" pitchFamily="34" charset="0"/>
+                <a:ea typeface="Aptos" panose="020B0004020202020204" pitchFamily="34" charset="0"/>
+                <a:cs typeface="Times New Roman" panose="02020603050405020304" pitchFamily="18" charset="0"/>
+              </a:rPr>
+              <a:t> használtunk a maximális stabilitás érdekében. Külön figyelmet fordítottunk a biztonságra, így minden eszközt és hozzáférést </a:t>
+            </a:r>
+            <a:r>
+              <a:rPr lang="hu-HU" sz="1800" b="1" kern="100" dirty="0">
+                <a:effectLst/>
+                <a:latin typeface="Aptos" panose="020B0004020202020204" pitchFamily="34" charset="0"/>
+                <a:ea typeface="Aptos" panose="020B0004020202020204" pitchFamily="34" charset="0"/>
+                <a:cs typeface="Times New Roman" panose="02020603050405020304" pitchFamily="18" charset="0"/>
+              </a:rPr>
+              <a:t>titkosított jelszavakkal</a:t>
+            </a:r>
+            <a:r>
+              <a:rPr lang="hu-HU" sz="1800" kern="100" dirty="0">
+                <a:effectLst/>
+                <a:latin typeface="Aptos" panose="020B0004020202020204" pitchFamily="34" charset="0"/>
+                <a:ea typeface="Aptos" panose="020B0004020202020204" pitchFamily="34" charset="0"/>
+                <a:cs typeface="Times New Roman" panose="02020603050405020304" pitchFamily="18" charset="0"/>
+              </a:rPr>
+              <a:t> védtünk le. A legfontosabb viszont a </a:t>
+            </a:r>
+            <a:r>
+              <a:rPr lang="hu-HU" sz="1800" b="1" kern="100" dirty="0">
+                <a:effectLst/>
+                <a:latin typeface="Aptos" panose="020B0004020202020204" pitchFamily="34" charset="0"/>
+                <a:ea typeface="Aptos" panose="020B0004020202020204" pitchFamily="34" charset="0"/>
+                <a:cs typeface="Times New Roman" panose="02020603050405020304" pitchFamily="18" charset="0"/>
+              </a:rPr>
+              <a:t>2. és 3. </a:t>
+            </a:r>
+            <a:r>
+              <a:rPr lang="hu-HU" sz="1800" b="1" kern="100" dirty="0" err="1">
+                <a:effectLst/>
+                <a:latin typeface="Aptos" panose="020B0004020202020204" pitchFamily="34" charset="0"/>
+                <a:ea typeface="Aptos" panose="020B0004020202020204" pitchFamily="34" charset="0"/>
+                <a:cs typeface="Times New Roman" panose="02020603050405020304" pitchFamily="18" charset="0"/>
+              </a:rPr>
+              <a:t>rétegbeli</a:t>
+            </a:r>
+            <a:r>
+              <a:rPr lang="hu-HU" sz="1800" b="1" kern="100" dirty="0">
+                <a:effectLst/>
+                <a:latin typeface="Aptos" panose="020B0004020202020204" pitchFamily="34" charset="0"/>
+                <a:ea typeface="Aptos" panose="020B0004020202020204" pitchFamily="34" charset="0"/>
+                <a:cs typeface="Times New Roman" panose="02020603050405020304" pitchFamily="18" charset="0"/>
+              </a:rPr>
+              <a:t> redundancia</a:t>
+            </a:r>
+            <a:r>
+              <a:rPr lang="hu-HU" sz="1800" kern="100" dirty="0">
+                <a:effectLst/>
+                <a:latin typeface="Aptos" panose="020B0004020202020204" pitchFamily="34" charset="0"/>
+                <a:ea typeface="Aptos" panose="020B0004020202020204" pitchFamily="34" charset="0"/>
+                <a:cs typeface="Times New Roman" panose="02020603050405020304" pitchFamily="18" charset="0"/>
+              </a:rPr>
+              <a:t>: ez garantálja, hogy ha egy kábel vagy egy útvonal kiesik, a forgalom azonnal átáll egy másikra, így a felhasználók semmit nem vesznek </a:t>
+            </a:r>
+            <a:r>
+              <a:rPr lang="hu-HU" sz="1800" kern="100" dirty="0" err="1">
+                <a:effectLst/>
+                <a:latin typeface="Aptos" panose="020B0004020202020204" pitchFamily="34" charset="0"/>
+                <a:ea typeface="Aptos" panose="020B0004020202020204" pitchFamily="34" charset="0"/>
+                <a:cs typeface="Times New Roman" panose="02020603050405020304" pitchFamily="18" charset="0"/>
+              </a:rPr>
+              <a:t>észre</a:t>
+            </a:r>
+            <a:r>
+              <a:rPr lang="hu-HU" sz="1800" kern="100" dirty="0">
+                <a:effectLst/>
+                <a:latin typeface="Aptos" panose="020B0004020202020204" pitchFamily="34" charset="0"/>
+                <a:ea typeface="Aptos" panose="020B0004020202020204" pitchFamily="34" charset="0"/>
+                <a:cs typeface="Times New Roman" panose="02020603050405020304" pitchFamily="18" charset="0"/>
+              </a:rPr>
+              <a:t> a hibából.</a:t>
+            </a:r>
+          </a:p>
+          <a:p>
+            <a:endParaRPr lang="hu-HU" dirty="0"/>
+          </a:p>
+        </p:txBody>
+      </p:sp>
+      <p:sp>
+        <p:nvSpPr>
+          <p:cNvPr id="4" name="Dia számának helye 3"/>
+          <p:cNvSpPr>
+            <a:spLocks noGrp="1"/>
+          </p:cNvSpPr>
+          <p:nvPr>
+            <p:ph type="sldNum" sz="quarter" idx="5"/>
+          </p:nvPr>
+        </p:nvSpPr>
+        <p:spPr/>
+        <p:txBody>
+          <a:bodyPr/>
+          <a:lstStyle/>
+          <a:p>
+            <a:fld id="{1087266A-CB85-4818-B702-CBAEB43B1A09}" type="slidenum">
+              <a:rPr lang="hu-HU" smtClean="0"/>
+              <a:t>4</a:t>
+            </a:fld>
+            <a:endParaRPr lang="hu-HU"/>
+          </a:p>
+        </p:txBody>
+      </p:sp>
+    </p:spTree>
+    <p:extLst>
+      <p:ext uri="{BB962C8B-B14F-4D97-AF65-F5344CB8AC3E}">
+        <p14:creationId xmlns:p14="http://schemas.microsoft.com/office/powerpoint/2010/main" val="2384484086"/>
+      </p:ext>
+    </p:extLst>
+  </p:cSld>
+  <p:clrMapOvr>
+    <a:masterClrMapping/>
+  </p:clrMapOvr>
+</p:notes>
+</file>
+
+<file path=ppt/notesSlides/notesSlide4.xml><?xml version="1.0" encoding="utf-8"?>
+<p:notes xmlns:a="http://schemas.openxmlformats.org/drawingml/2006/main" xmlns:r="http://schemas.openxmlformats.org/officeDocument/2006/relationships" xmlns:p="http://schemas.openxmlformats.org/presentationml/2006/main">
+  <p:cSld>
+    <p:spTree>
+      <p:nvGrpSpPr>
+        <p:cNvPr id="1" name=""/>
+        <p:cNvGrpSpPr/>
+        <p:nvPr/>
+      </p:nvGrpSpPr>
+      <p:grpSpPr>
+        <a:xfrm>
+          <a:off x="0" y="0"/>
+          <a:ext cx="0" cy="0"/>
+          <a:chOff x="0" y="0"/>
+          <a:chExt cx="0" cy="0"/>
+        </a:xfrm>
+      </p:grpSpPr>
+      <p:sp>
+        <p:nvSpPr>
+          <p:cNvPr id="2" name="Diakép helye 1"/>
+          <p:cNvSpPr>
+            <a:spLocks noGrp="1" noRot="1" noChangeAspect="1"/>
+          </p:cNvSpPr>
+          <p:nvPr>
+            <p:ph type="sldImg"/>
+          </p:nvPr>
+        </p:nvSpPr>
+        <p:spPr/>
+      </p:sp>
+      <p:sp>
+        <p:nvSpPr>
+          <p:cNvPr id="3" name="Jegyzetek helye 2"/>
+          <p:cNvSpPr>
+            <a:spLocks noGrp="1"/>
+          </p:cNvSpPr>
+          <p:nvPr>
+            <p:ph type="body" idx="1"/>
+          </p:nvPr>
+        </p:nvSpPr>
+        <p:spPr/>
+        <p:txBody>
+          <a:bodyPr/>
+          <a:lstStyle/>
+          <a:p>
+            <a:pPr marL="0" marR="0" lvl="0" indent="0" algn="l" defTabSz="914400" rtl="0" eaLnBrk="1" fontAlgn="auto" latinLnBrk="0" hangingPunct="1">
+              <a:lnSpc>
+                <a:spcPct val="100000"/>
+              </a:lnSpc>
+              <a:spcBef>
+                <a:spcPts val="0"/>
+              </a:spcBef>
+              <a:spcAft>
+                <a:spcPts val="0"/>
+              </a:spcAft>
+              <a:buClrTx/>
+              <a:buSzTx/>
+              <a:buFontTx/>
+              <a:buNone/>
+              <a:tabLst/>
+              <a:defRPr/>
+            </a:pPr>
+            <a:r>
+              <a:rPr lang="hu-HU" dirty="0"/>
+              <a:t>MARCI -- </a:t>
+            </a:r>
+            <a:r>
+              <a:rPr lang="hu-HU" sz="1800" kern="100" dirty="0">
+                <a:effectLst/>
+                <a:latin typeface="Aptos" panose="020B0004020202020204" pitchFamily="34" charset="0"/>
+                <a:ea typeface="Aptos" panose="020B0004020202020204" pitchFamily="34" charset="0"/>
+                <a:cs typeface="Times New Roman" panose="02020603050405020304" pitchFamily="18" charset="0"/>
+              </a:rPr>
+              <a:t>Az oktatási részlegnél a </a:t>
+            </a:r>
+            <a:r>
+              <a:rPr lang="hu-HU" sz="1800" b="1" kern="100" dirty="0">
+                <a:effectLst/>
+                <a:latin typeface="Aptos" panose="020B0004020202020204" pitchFamily="34" charset="0"/>
+                <a:ea typeface="Aptos" panose="020B0004020202020204" pitchFamily="34" charset="0"/>
+                <a:cs typeface="Times New Roman" panose="02020603050405020304" pitchFamily="18" charset="0"/>
+              </a:rPr>
+              <a:t>VLAN-ok</a:t>
+            </a:r>
+            <a:r>
+              <a:rPr lang="hu-HU" sz="1800" kern="100" dirty="0">
+                <a:effectLst/>
+                <a:latin typeface="Aptos" panose="020B0004020202020204" pitchFamily="34" charset="0"/>
+                <a:ea typeface="Aptos" panose="020B0004020202020204" pitchFamily="34" charset="0"/>
+                <a:cs typeface="Times New Roman" panose="02020603050405020304" pitchFamily="18" charset="0"/>
+              </a:rPr>
+              <a:t> biztosítják, hogy a nagy forgalom ne zavarja a cég többi részét. Minden eszköz </a:t>
+            </a:r>
+            <a:r>
+              <a:rPr lang="hu-HU" sz="1800" b="1" kern="100" dirty="0">
+                <a:effectLst/>
+                <a:latin typeface="Aptos" panose="020B0004020202020204" pitchFamily="34" charset="0"/>
+                <a:ea typeface="Aptos" panose="020B0004020202020204" pitchFamily="34" charset="0"/>
+                <a:cs typeface="Times New Roman" panose="02020603050405020304" pitchFamily="18" charset="0"/>
+              </a:rPr>
+              <a:t>DHCP-n keresztül</a:t>
+            </a:r>
+            <a:r>
+              <a:rPr lang="hu-HU" sz="1800" kern="100" dirty="0">
+                <a:effectLst/>
+                <a:latin typeface="Aptos" panose="020B0004020202020204" pitchFamily="34" charset="0"/>
+                <a:ea typeface="Aptos" panose="020B0004020202020204" pitchFamily="34" charset="0"/>
+                <a:cs typeface="Times New Roman" panose="02020603050405020304" pitchFamily="18" charset="0"/>
+              </a:rPr>
+              <a:t>, automatikusan kap IP-címet, ami nagyban megkönnyíti a sok kliens kezelését. A WiFi-nél a </a:t>
+            </a:r>
+            <a:r>
+              <a:rPr lang="hu-HU" sz="1800" b="1" kern="100" dirty="0" err="1">
+                <a:effectLst/>
+                <a:latin typeface="Aptos" panose="020B0004020202020204" pitchFamily="34" charset="0"/>
+                <a:ea typeface="Aptos" panose="020B0004020202020204" pitchFamily="34" charset="0"/>
+                <a:cs typeface="Times New Roman" panose="02020603050405020304" pitchFamily="18" charset="0"/>
+              </a:rPr>
+              <a:t>dual-band</a:t>
+            </a:r>
+            <a:r>
+              <a:rPr lang="hu-HU" sz="1800" kern="100" dirty="0">
+                <a:effectLst/>
+                <a:latin typeface="Aptos" panose="020B0004020202020204" pitchFamily="34" charset="0"/>
+                <a:ea typeface="Aptos" panose="020B0004020202020204" pitchFamily="34" charset="0"/>
+                <a:cs typeface="Times New Roman" panose="02020603050405020304" pitchFamily="18" charset="0"/>
+              </a:rPr>
+              <a:t> technológiát használtuk a stabil kapcsolathoz, a </a:t>
+            </a:r>
+            <a:r>
+              <a:rPr lang="hu-HU" sz="1800" b="1" kern="100" dirty="0">
+                <a:effectLst/>
+                <a:latin typeface="Aptos" panose="020B0004020202020204" pitchFamily="34" charset="0"/>
+                <a:ea typeface="Aptos" panose="020B0004020202020204" pitchFamily="34" charset="0"/>
+                <a:cs typeface="Times New Roman" panose="02020603050405020304" pitchFamily="18" charset="0"/>
+              </a:rPr>
+              <a:t>dinamikus </a:t>
+            </a:r>
+            <a:r>
+              <a:rPr lang="hu-HU" sz="1800" b="1" kern="100" dirty="0" err="1">
+                <a:effectLst/>
+                <a:latin typeface="Aptos" panose="020B0004020202020204" pitchFamily="34" charset="0"/>
+                <a:ea typeface="Aptos" panose="020B0004020202020204" pitchFamily="34" charset="0"/>
+                <a:cs typeface="Times New Roman" panose="02020603050405020304" pitchFamily="18" charset="0"/>
+              </a:rPr>
+              <a:t>routing</a:t>
+            </a:r>
+            <a:r>
+              <a:rPr lang="hu-HU" sz="1800" kern="100" dirty="0">
+                <a:effectLst/>
+                <a:latin typeface="Aptos" panose="020B0004020202020204" pitchFamily="34" charset="0"/>
+                <a:ea typeface="Aptos" panose="020B0004020202020204" pitchFamily="34" charset="0"/>
+                <a:cs typeface="Times New Roman" panose="02020603050405020304" pitchFamily="18" charset="0"/>
+              </a:rPr>
+              <a:t> pedig garantálja, hogy a hálózat emberi beavatkozás nélkül, magától lekövesse az útvonalmódosításokat.</a:t>
+            </a:r>
+          </a:p>
+          <a:p>
+            <a:endParaRPr lang="hu-HU" dirty="0"/>
+          </a:p>
+        </p:txBody>
+      </p:sp>
+      <p:sp>
+        <p:nvSpPr>
+          <p:cNvPr id="4" name="Dia számának helye 3"/>
+          <p:cNvSpPr>
+            <a:spLocks noGrp="1"/>
+          </p:cNvSpPr>
+          <p:nvPr>
+            <p:ph type="sldNum" sz="quarter" idx="5"/>
+          </p:nvPr>
+        </p:nvSpPr>
+        <p:spPr/>
+        <p:txBody>
+          <a:bodyPr/>
+          <a:lstStyle/>
+          <a:p>
+            <a:fld id="{1087266A-CB85-4818-B702-CBAEB43B1A09}" type="slidenum">
+              <a:rPr lang="hu-HU" smtClean="0"/>
+              <a:t>5</a:t>
+            </a:fld>
+            <a:endParaRPr lang="hu-HU"/>
+          </a:p>
+        </p:txBody>
+      </p:sp>
+    </p:spTree>
+    <p:extLst>
+      <p:ext uri="{BB962C8B-B14F-4D97-AF65-F5344CB8AC3E}">
+        <p14:creationId xmlns:p14="http://schemas.microsoft.com/office/powerpoint/2010/main" val="1005820079"/>
+      </p:ext>
+    </p:extLst>
+  </p:cSld>
+  <p:clrMapOvr>
+    <a:masterClrMapping/>
+  </p:clrMapOvr>
+</p:notes>
+</file>
+
+<file path=ppt/notesSlides/notesSlide5.xml><?xml version="1.0" encoding="utf-8"?>
+<p:notes xmlns:a="http://schemas.openxmlformats.org/drawingml/2006/main" xmlns:r="http://schemas.openxmlformats.org/officeDocument/2006/relationships" xmlns:p="http://schemas.openxmlformats.org/presentationml/2006/main">
+  <p:cSld>
+    <p:spTree>
+      <p:nvGrpSpPr>
+        <p:cNvPr id="1" name=""/>
+        <p:cNvGrpSpPr/>
+        <p:nvPr/>
+      </p:nvGrpSpPr>
+      <p:grpSpPr>
+        <a:xfrm>
+          <a:off x="0" y="0"/>
+          <a:ext cx="0" cy="0"/>
+          <a:chOff x="0" y="0"/>
+          <a:chExt cx="0" cy="0"/>
+        </a:xfrm>
+      </p:grpSpPr>
+      <p:sp>
+        <p:nvSpPr>
+          <p:cNvPr id="2" name="Diakép helye 1"/>
+          <p:cNvSpPr>
+            <a:spLocks noGrp="1" noRot="1" noChangeAspect="1"/>
+          </p:cNvSpPr>
+          <p:nvPr>
+            <p:ph type="sldImg"/>
+          </p:nvPr>
+        </p:nvSpPr>
+        <p:spPr/>
+      </p:sp>
+      <p:sp>
+        <p:nvSpPr>
+          <p:cNvPr id="3" name="Jegyzetek helye 2"/>
+          <p:cNvSpPr>
+            <a:spLocks noGrp="1"/>
+          </p:cNvSpPr>
+          <p:nvPr>
+            <p:ph type="body" idx="1"/>
+          </p:nvPr>
+        </p:nvSpPr>
+        <p:spPr/>
+        <p:txBody>
+          <a:bodyPr/>
+          <a:lstStyle/>
+          <a:p>
+            <a:pPr marL="0" marR="0" lvl="0" indent="0" algn="l" defTabSz="914400" rtl="0" eaLnBrk="1" fontAlgn="auto" latinLnBrk="0" hangingPunct="1">
+              <a:lnSpc>
+                <a:spcPct val="100000"/>
+              </a:lnSpc>
+              <a:spcBef>
+                <a:spcPts val="0"/>
+              </a:spcBef>
+              <a:spcAft>
+                <a:spcPts val="0"/>
+              </a:spcAft>
+              <a:buClrTx/>
+              <a:buSzTx/>
+              <a:buFontTx/>
+              <a:buNone/>
+              <a:tabLst/>
+              <a:defRPr/>
+            </a:pPr>
+            <a:r>
+              <a:rPr lang="hu-HU" dirty="0"/>
+              <a:t>PATRIK -- </a:t>
+            </a:r>
+            <a:r>
+              <a:rPr lang="hu-HU" sz="1800" kern="100" dirty="0">
+                <a:effectLst/>
+                <a:latin typeface="Aptos" panose="020B0004020202020204" pitchFamily="34" charset="0"/>
+                <a:ea typeface="Aptos" panose="020B0004020202020204" pitchFamily="34" charset="0"/>
+                <a:cs typeface="Times New Roman" panose="02020603050405020304" pitchFamily="18" charset="0"/>
+              </a:rPr>
+              <a:t>Az irodai hálózatnál a biztonság fokozása érdekében </a:t>
+            </a:r>
+            <a:r>
+              <a:rPr lang="hu-HU" sz="1800" b="1" kern="100" dirty="0">
+                <a:effectLst/>
+                <a:latin typeface="Aptos" panose="020B0004020202020204" pitchFamily="34" charset="0"/>
+                <a:ea typeface="Aptos" panose="020B0004020202020204" pitchFamily="34" charset="0"/>
+                <a:cs typeface="Times New Roman" panose="02020603050405020304" pitchFamily="18" charset="0"/>
+              </a:rPr>
+              <a:t>ACL-</a:t>
+            </a:r>
+            <a:r>
+              <a:rPr lang="hu-HU" sz="1800" b="1" kern="100" dirty="0" err="1">
+                <a:effectLst/>
+                <a:latin typeface="Aptos" panose="020B0004020202020204" pitchFamily="34" charset="0"/>
+                <a:ea typeface="Aptos" panose="020B0004020202020204" pitchFamily="34" charset="0"/>
+                <a:cs typeface="Times New Roman" panose="02020603050405020304" pitchFamily="18" charset="0"/>
+              </a:rPr>
+              <a:t>eket</a:t>
+            </a:r>
+            <a:r>
+              <a:rPr lang="hu-HU" sz="1800" b="1" kern="100" dirty="0">
+                <a:effectLst/>
+                <a:latin typeface="Aptos" panose="020B0004020202020204" pitchFamily="34" charset="0"/>
+                <a:ea typeface="Aptos" panose="020B0004020202020204" pitchFamily="34" charset="0"/>
+                <a:cs typeface="Times New Roman" panose="02020603050405020304" pitchFamily="18" charset="0"/>
+              </a:rPr>
+              <a:t> (Access </a:t>
+            </a:r>
+            <a:r>
+              <a:rPr lang="hu-HU" sz="1800" b="1" kern="100" dirty="0" err="1">
+                <a:effectLst/>
+                <a:latin typeface="Aptos" panose="020B0004020202020204" pitchFamily="34" charset="0"/>
+                <a:ea typeface="Aptos" panose="020B0004020202020204" pitchFamily="34" charset="0"/>
+                <a:cs typeface="Times New Roman" panose="02020603050405020304" pitchFamily="18" charset="0"/>
+              </a:rPr>
+              <a:t>Control</a:t>
+            </a:r>
+            <a:r>
+              <a:rPr lang="hu-HU" sz="1800" b="1" kern="100" dirty="0">
+                <a:effectLst/>
+                <a:latin typeface="Aptos" panose="020B0004020202020204" pitchFamily="34" charset="0"/>
+                <a:ea typeface="Aptos" panose="020B0004020202020204" pitchFamily="34" charset="0"/>
+                <a:cs typeface="Times New Roman" panose="02020603050405020304" pitchFamily="18" charset="0"/>
+              </a:rPr>
+              <a:t> List)</a:t>
+            </a:r>
+            <a:r>
+              <a:rPr lang="hu-HU" sz="1800" kern="100" dirty="0">
+                <a:effectLst/>
+                <a:latin typeface="Aptos" panose="020B0004020202020204" pitchFamily="34" charset="0"/>
+                <a:ea typeface="Aptos" panose="020B0004020202020204" pitchFamily="34" charset="0"/>
+                <a:cs typeface="Times New Roman" panose="02020603050405020304" pitchFamily="18" charset="0"/>
+              </a:rPr>
+              <a:t> konfiguráltunk. Ez a gyakorlatban úgy néz ki, hogy a </a:t>
+            </a:r>
+            <a:r>
+              <a:rPr lang="hu-HU" sz="1800" b="1" kern="100" dirty="0">
+                <a:effectLst/>
+                <a:latin typeface="Aptos" panose="020B0004020202020204" pitchFamily="34" charset="0"/>
+                <a:ea typeface="Aptos" panose="020B0004020202020204" pitchFamily="34" charset="0"/>
+                <a:cs typeface="Times New Roman" panose="02020603050405020304" pitchFamily="18" charset="0"/>
+              </a:rPr>
+              <a:t>Pénzügy forgalmát szigorúan korlátoztuk</a:t>
+            </a:r>
+            <a:r>
+              <a:rPr lang="hu-HU" sz="1800" kern="100" dirty="0">
+                <a:effectLst/>
+                <a:latin typeface="Aptos" panose="020B0004020202020204" pitchFamily="34" charset="0"/>
+                <a:ea typeface="Aptos" panose="020B0004020202020204" pitchFamily="34" charset="0"/>
+                <a:cs typeface="Times New Roman" panose="02020603050405020304" pitchFamily="18" charset="0"/>
+              </a:rPr>
+              <a:t>, hogy a szenzitív adatokhoz csak az férhessen hozzá, akinek valóban dolga van vele, míg a </a:t>
+            </a:r>
+            <a:r>
+              <a:rPr lang="hu-HU" sz="1800" b="1" kern="100" dirty="0">
+                <a:effectLst/>
+                <a:latin typeface="Aptos" panose="020B0004020202020204" pitchFamily="34" charset="0"/>
+                <a:ea typeface="Aptos" panose="020B0004020202020204" pitchFamily="34" charset="0"/>
+                <a:cs typeface="Times New Roman" panose="02020603050405020304" pitchFamily="18" charset="0"/>
+              </a:rPr>
+              <a:t>HR részleg</a:t>
+            </a:r>
+            <a:r>
+              <a:rPr lang="hu-HU" sz="1800" kern="100" dirty="0">
+                <a:effectLst/>
+                <a:latin typeface="Aptos" panose="020B0004020202020204" pitchFamily="34" charset="0"/>
+                <a:ea typeface="Aptos" panose="020B0004020202020204" pitchFamily="34" charset="0"/>
+                <a:cs typeface="Times New Roman" panose="02020603050405020304" pitchFamily="18" charset="0"/>
+              </a:rPr>
+              <a:t> számára szabadabb, de továbbra is kontrollált hozzáférést biztosítottunk. Itt is a </a:t>
+            </a:r>
+            <a:r>
+              <a:rPr lang="hu-HU" sz="1800" b="1" kern="100" dirty="0">
+                <a:effectLst/>
+                <a:latin typeface="Aptos" panose="020B0004020202020204" pitchFamily="34" charset="0"/>
+                <a:ea typeface="Aptos" panose="020B0004020202020204" pitchFamily="34" charset="0"/>
+                <a:cs typeface="Times New Roman" panose="02020603050405020304" pitchFamily="18" charset="0"/>
+              </a:rPr>
+              <a:t>dinamikus </a:t>
+            </a:r>
+            <a:r>
+              <a:rPr lang="hu-HU" sz="1800" b="1" kern="100" dirty="0" err="1">
+                <a:effectLst/>
+                <a:latin typeface="Aptos" panose="020B0004020202020204" pitchFamily="34" charset="0"/>
+                <a:ea typeface="Aptos" panose="020B0004020202020204" pitchFamily="34" charset="0"/>
+                <a:cs typeface="Times New Roman" panose="02020603050405020304" pitchFamily="18" charset="0"/>
+              </a:rPr>
+              <a:t>routing</a:t>
+            </a:r>
+            <a:r>
+              <a:rPr lang="hu-HU" sz="1800" kern="100" dirty="0">
+                <a:effectLst/>
+                <a:latin typeface="Aptos" panose="020B0004020202020204" pitchFamily="34" charset="0"/>
+                <a:ea typeface="Aptos" panose="020B0004020202020204" pitchFamily="34" charset="0"/>
+                <a:cs typeface="Times New Roman" panose="02020603050405020304" pitchFamily="18" charset="0"/>
+              </a:rPr>
+              <a:t> felel a hálózati utak stabilitásáért, így a belső adatforgalom mindig a leggyorsabb útvonalon éri el a szervereket, függetlenül attól, hogy melyik részleg indította a lekérést.</a:t>
+            </a:r>
+          </a:p>
+          <a:p>
+            <a:endParaRPr lang="hu-HU" dirty="0"/>
+          </a:p>
+        </p:txBody>
+      </p:sp>
+      <p:sp>
+        <p:nvSpPr>
+          <p:cNvPr id="4" name="Dia számának helye 3"/>
+          <p:cNvSpPr>
+            <a:spLocks noGrp="1"/>
+          </p:cNvSpPr>
+          <p:nvPr>
+            <p:ph type="sldNum" sz="quarter" idx="5"/>
+          </p:nvPr>
+        </p:nvSpPr>
+        <p:spPr/>
+        <p:txBody>
+          <a:bodyPr/>
+          <a:lstStyle/>
+          <a:p>
+            <a:fld id="{1087266A-CB85-4818-B702-CBAEB43B1A09}" type="slidenum">
+              <a:rPr lang="hu-HU" smtClean="0"/>
+              <a:t>6</a:t>
+            </a:fld>
+            <a:endParaRPr lang="hu-HU"/>
+          </a:p>
+        </p:txBody>
+      </p:sp>
+    </p:spTree>
+    <p:extLst>
+      <p:ext uri="{BB962C8B-B14F-4D97-AF65-F5344CB8AC3E}">
+        <p14:creationId xmlns:p14="http://schemas.microsoft.com/office/powerpoint/2010/main" val="1841477956"/>
+      </p:ext>
+    </p:extLst>
+  </p:cSld>
+  <p:clrMapOvr>
+    <a:masterClrMapping/>
+  </p:clrMapOvr>
+</p:notes>
+</file>
+
+<file path=ppt/notesSlides/notesSlide6.xml><?xml version="1.0" encoding="utf-8"?>
+<p:notes xmlns:a="http://schemas.openxmlformats.org/drawingml/2006/main" xmlns:r="http://schemas.openxmlformats.org/officeDocument/2006/relationships" xmlns:p="http://schemas.openxmlformats.org/presentationml/2006/main">
+  <p:cSld>
+    <p:spTree>
+      <p:nvGrpSpPr>
+        <p:cNvPr id="1" name=""/>
+        <p:cNvGrpSpPr/>
+        <p:nvPr/>
+      </p:nvGrpSpPr>
+      <p:grpSpPr>
+        <a:xfrm>
+          <a:off x="0" y="0"/>
+          <a:ext cx="0" cy="0"/>
+          <a:chOff x="0" y="0"/>
+          <a:chExt cx="0" cy="0"/>
+        </a:xfrm>
+      </p:grpSpPr>
+      <p:sp>
+        <p:nvSpPr>
+          <p:cNvPr id="2" name="Diakép helye 1"/>
+          <p:cNvSpPr>
+            <a:spLocks noGrp="1" noRot="1" noChangeAspect="1"/>
+          </p:cNvSpPr>
+          <p:nvPr>
+            <p:ph type="sldImg"/>
+          </p:nvPr>
+        </p:nvSpPr>
+        <p:spPr/>
+      </p:sp>
+      <p:sp>
+        <p:nvSpPr>
+          <p:cNvPr id="3" name="Jegyzetek helye 2"/>
+          <p:cNvSpPr>
+            <a:spLocks noGrp="1"/>
+          </p:cNvSpPr>
+          <p:nvPr>
+            <p:ph type="body" idx="1"/>
+          </p:nvPr>
+        </p:nvSpPr>
+        <p:spPr/>
+        <p:txBody>
+          <a:bodyPr/>
+          <a:lstStyle/>
+          <a:p>
+            <a:pPr marL="0" marR="0" lvl="0" indent="0" algn="l" defTabSz="914400" rtl="0" eaLnBrk="1" fontAlgn="auto" latinLnBrk="0" hangingPunct="1">
+              <a:lnSpc>
+                <a:spcPct val="100000"/>
+              </a:lnSpc>
+              <a:spcBef>
+                <a:spcPts val="0"/>
+              </a:spcBef>
+              <a:spcAft>
+                <a:spcPts val="0"/>
+              </a:spcAft>
+              <a:buClrTx/>
+              <a:buSzTx/>
+              <a:buFontTx/>
+              <a:buNone/>
+              <a:tabLst/>
+              <a:defRPr/>
+            </a:pPr>
+            <a:r>
+              <a:rPr lang="hu-HU" dirty="0"/>
+              <a:t>MARCI -- </a:t>
+            </a:r>
+            <a:r>
+              <a:rPr lang="hu-HU" sz="1800" kern="100" dirty="0">
+                <a:effectLst/>
+                <a:latin typeface="Aptos" panose="020B0004020202020204" pitchFamily="34" charset="0"/>
+                <a:ea typeface="Aptos" panose="020B0004020202020204" pitchFamily="34" charset="0"/>
+                <a:cs typeface="Times New Roman" panose="02020603050405020304" pitchFamily="18" charset="0"/>
+              </a:rPr>
+              <a:t>Mivel a diszpécser központ fizikailag közel található a többi egységhez, a kapcsolatot nagy sebességű, közvetlen összeköttetéssel oldottuk meg. A </a:t>
+            </a:r>
+            <a:r>
+              <a:rPr lang="hu-HU" sz="1800" b="1" kern="100" dirty="0">
+                <a:effectLst/>
+                <a:latin typeface="Aptos" panose="020B0004020202020204" pitchFamily="34" charset="0"/>
+                <a:ea typeface="Aptos" panose="020B0004020202020204" pitchFamily="34" charset="0"/>
+                <a:cs typeface="Times New Roman" panose="02020603050405020304" pitchFamily="18" charset="0"/>
+              </a:rPr>
+              <a:t>VPN-t</a:t>
+            </a:r>
+            <a:r>
+              <a:rPr lang="hu-HU" sz="1800" kern="100" dirty="0">
+                <a:effectLst/>
+                <a:latin typeface="Aptos" panose="020B0004020202020204" pitchFamily="34" charset="0"/>
+                <a:ea typeface="Aptos" panose="020B0004020202020204" pitchFamily="34" charset="0"/>
+                <a:cs typeface="Times New Roman" panose="02020603050405020304" pitchFamily="18" charset="0"/>
+              </a:rPr>
+              <a:t> itt elsősorban a </a:t>
+            </a:r>
+            <a:r>
+              <a:rPr lang="hu-HU" sz="1800" b="1" kern="100" dirty="0">
+                <a:effectLst/>
+                <a:latin typeface="Aptos" panose="020B0004020202020204" pitchFamily="34" charset="0"/>
+                <a:ea typeface="Aptos" panose="020B0004020202020204" pitchFamily="34" charset="0"/>
+                <a:cs typeface="Times New Roman" panose="02020603050405020304" pitchFamily="18" charset="0"/>
+              </a:rPr>
+              <a:t>biztonságos távoli elérés</a:t>
+            </a:r>
+            <a:r>
+              <a:rPr lang="hu-HU" sz="1800" kern="100" dirty="0">
+                <a:effectLst/>
+                <a:latin typeface="Aptos" panose="020B0004020202020204" pitchFamily="34" charset="0"/>
+                <a:ea typeface="Aptos" panose="020B0004020202020204" pitchFamily="34" charset="0"/>
+                <a:cs typeface="Times New Roman" panose="02020603050405020304" pitchFamily="18" charset="0"/>
+              </a:rPr>
+              <a:t> miatt tartottuk meg, hogy a rendszergazdák vagy a vezetőség kívülről is titkosított csatornán keresztül, biztonságosan felügyelhessék a folyamatokat. Ez a megoldás egyesíti a helyi hálózat gyorsaságát a távoli munka rugalmasságával, miközben a </a:t>
+            </a:r>
+            <a:r>
+              <a:rPr lang="hu-HU" sz="1800" b="1" kern="100" dirty="0">
+                <a:effectLst/>
+                <a:latin typeface="Aptos" panose="020B0004020202020204" pitchFamily="34" charset="0"/>
+                <a:ea typeface="Aptos" panose="020B0004020202020204" pitchFamily="34" charset="0"/>
+                <a:cs typeface="Times New Roman" panose="02020603050405020304" pitchFamily="18" charset="0"/>
+              </a:rPr>
+              <a:t>dinamikus </a:t>
+            </a:r>
+            <a:r>
+              <a:rPr lang="hu-HU" sz="1800" b="1" kern="100" dirty="0" err="1">
+                <a:effectLst/>
+                <a:latin typeface="Aptos" panose="020B0004020202020204" pitchFamily="34" charset="0"/>
+                <a:ea typeface="Aptos" panose="020B0004020202020204" pitchFamily="34" charset="0"/>
+                <a:cs typeface="Times New Roman" panose="02020603050405020304" pitchFamily="18" charset="0"/>
+              </a:rPr>
+              <a:t>routing</a:t>
+            </a:r>
+            <a:r>
+              <a:rPr lang="hu-HU" sz="1800" kern="100" dirty="0">
+                <a:effectLst/>
+                <a:latin typeface="Aptos" panose="020B0004020202020204" pitchFamily="34" charset="0"/>
+                <a:ea typeface="Aptos" panose="020B0004020202020204" pitchFamily="34" charset="0"/>
+                <a:cs typeface="Times New Roman" panose="02020603050405020304" pitchFamily="18" charset="0"/>
+              </a:rPr>
+              <a:t> folyamatosan optimalizálja az adatforgalmat ezen a kiemelt fontosságú szakaszon.</a:t>
+            </a:r>
+          </a:p>
+          <a:p>
+            <a:endParaRPr lang="hu-HU" dirty="0"/>
+          </a:p>
+        </p:txBody>
+      </p:sp>
+      <p:sp>
+        <p:nvSpPr>
+          <p:cNvPr id="4" name="Dia számának helye 3"/>
+          <p:cNvSpPr>
+            <a:spLocks noGrp="1"/>
+          </p:cNvSpPr>
+          <p:nvPr>
+            <p:ph type="sldNum" sz="quarter" idx="5"/>
+          </p:nvPr>
+        </p:nvSpPr>
+        <p:spPr/>
+        <p:txBody>
+          <a:bodyPr/>
+          <a:lstStyle/>
+          <a:p>
+            <a:fld id="{1087266A-CB85-4818-B702-CBAEB43B1A09}" type="slidenum">
+              <a:rPr lang="hu-HU" smtClean="0"/>
+              <a:t>7</a:t>
+            </a:fld>
+            <a:endParaRPr lang="hu-HU"/>
+          </a:p>
+        </p:txBody>
+      </p:sp>
+    </p:spTree>
+    <p:extLst>
+      <p:ext uri="{BB962C8B-B14F-4D97-AF65-F5344CB8AC3E}">
+        <p14:creationId xmlns:p14="http://schemas.microsoft.com/office/powerpoint/2010/main" val="2991107547"/>
+      </p:ext>
+    </p:extLst>
+  </p:cSld>
+  <p:clrMapOvr>
+    <a:masterClrMapping/>
+  </p:clrMapOvr>
+</p:notes>
+</file>
+
+<file path=ppt/notesSlides/notesSlide7.xml><?xml version="1.0" encoding="utf-8"?>
+<p:notes xmlns:a="http://schemas.openxmlformats.org/drawingml/2006/main" xmlns:r="http://schemas.openxmlformats.org/officeDocument/2006/relationships" xmlns:p="http://schemas.openxmlformats.org/presentationml/2006/main">
+  <p:cSld>
+    <p:spTree>
+      <p:nvGrpSpPr>
+        <p:cNvPr id="1" name=""/>
+        <p:cNvGrpSpPr/>
+        <p:nvPr/>
+      </p:nvGrpSpPr>
+      <p:grpSpPr>
+        <a:xfrm>
+          <a:off x="0" y="0"/>
+          <a:ext cx="0" cy="0"/>
+          <a:chOff x="0" y="0"/>
+          <a:chExt cx="0" cy="0"/>
+        </a:xfrm>
+      </p:grpSpPr>
+      <p:sp>
+        <p:nvSpPr>
+          <p:cNvPr id="2" name="Diakép helye 1"/>
+          <p:cNvSpPr>
+            <a:spLocks noGrp="1" noRot="1" noChangeAspect="1"/>
+          </p:cNvSpPr>
+          <p:nvPr>
+            <p:ph type="sldImg"/>
+          </p:nvPr>
+        </p:nvSpPr>
+        <p:spPr/>
+      </p:sp>
+      <p:sp>
+        <p:nvSpPr>
+          <p:cNvPr id="3" name="Jegyzetek helye 2"/>
+          <p:cNvSpPr>
+            <a:spLocks noGrp="1"/>
+          </p:cNvSpPr>
+          <p:nvPr>
+            <p:ph type="body" idx="1"/>
+          </p:nvPr>
+        </p:nvSpPr>
+        <p:spPr/>
+        <p:txBody>
+          <a:bodyPr/>
+          <a:lstStyle/>
+          <a:p>
+            <a:pPr marL="0" marR="0" lvl="0" indent="0" algn="l" defTabSz="914400" rtl="0" eaLnBrk="1" fontAlgn="auto" latinLnBrk="0" hangingPunct="1">
+              <a:lnSpc>
+                <a:spcPct val="100000"/>
+              </a:lnSpc>
+              <a:spcBef>
+                <a:spcPts val="0"/>
+              </a:spcBef>
+              <a:spcAft>
+                <a:spcPts val="0"/>
+              </a:spcAft>
+              <a:buClrTx/>
+              <a:buSzTx/>
+              <a:buFontTx/>
+              <a:buNone/>
+              <a:tabLst/>
+              <a:defRPr/>
+            </a:pPr>
+            <a:r>
+              <a:rPr lang="hu-HU" dirty="0"/>
+              <a:t>PATRIK -- </a:t>
+            </a:r>
+            <a:r>
+              <a:rPr lang="hu-HU" sz="1800" kern="100" dirty="0">
+                <a:effectLst/>
+                <a:latin typeface="Aptos" panose="020B0004020202020204" pitchFamily="34" charset="0"/>
+                <a:ea typeface="Aptos" panose="020B0004020202020204" pitchFamily="34" charset="0"/>
+                <a:cs typeface="Times New Roman" panose="02020603050405020304" pitchFamily="18" charset="0"/>
+              </a:rPr>
+              <a:t>A szállás hálózatánál a legfontosabb szempont az elkülönítés volt. Mivel ez egy publikusabb zóna, egy </a:t>
+            </a:r>
+            <a:r>
+              <a:rPr lang="hu-HU" sz="1800" b="1" kern="100" dirty="0">
+                <a:effectLst/>
+                <a:latin typeface="Aptos" panose="020B0004020202020204" pitchFamily="34" charset="0"/>
+                <a:ea typeface="Aptos" panose="020B0004020202020204" pitchFamily="34" charset="0"/>
+                <a:cs typeface="Times New Roman" panose="02020603050405020304" pitchFamily="18" charset="0"/>
+              </a:rPr>
+              <a:t>szigorú ACL-t (Access </a:t>
+            </a:r>
+            <a:r>
+              <a:rPr lang="hu-HU" sz="1800" b="1" kern="100" dirty="0" err="1">
+                <a:effectLst/>
+                <a:latin typeface="Aptos" panose="020B0004020202020204" pitchFamily="34" charset="0"/>
+                <a:ea typeface="Aptos" panose="020B0004020202020204" pitchFamily="34" charset="0"/>
+                <a:cs typeface="Times New Roman" panose="02020603050405020304" pitchFamily="18" charset="0"/>
+              </a:rPr>
+              <a:t>Control</a:t>
+            </a:r>
+            <a:r>
+              <a:rPr lang="hu-HU" sz="1800" b="1" kern="100" dirty="0">
+                <a:effectLst/>
+                <a:latin typeface="Aptos" panose="020B0004020202020204" pitchFamily="34" charset="0"/>
+                <a:ea typeface="Aptos" panose="020B0004020202020204" pitchFamily="34" charset="0"/>
+                <a:cs typeface="Times New Roman" panose="02020603050405020304" pitchFamily="18" charset="0"/>
+              </a:rPr>
+              <a:t> List)</a:t>
+            </a:r>
+            <a:r>
+              <a:rPr lang="hu-HU" sz="1800" kern="100" dirty="0">
+                <a:effectLst/>
+                <a:latin typeface="Aptos" panose="020B0004020202020204" pitchFamily="34" charset="0"/>
+                <a:ea typeface="Aptos" panose="020B0004020202020204" pitchFamily="34" charset="0"/>
+                <a:cs typeface="Times New Roman" panose="02020603050405020304" pitchFamily="18" charset="0"/>
+              </a:rPr>
+              <a:t> állítottunk be, ami teljesen </a:t>
+            </a:r>
+            <a:r>
+              <a:rPr lang="hu-HU" sz="1800" b="1" kern="100" dirty="0">
+                <a:effectLst/>
+                <a:latin typeface="Aptos" panose="020B0004020202020204" pitchFamily="34" charset="0"/>
+                <a:ea typeface="Aptos" panose="020B0004020202020204" pitchFamily="34" charset="0"/>
+                <a:cs typeface="Times New Roman" panose="02020603050405020304" pitchFamily="18" charset="0"/>
+              </a:rPr>
+              <a:t>letiltja a forgalmat a belső hálózatunk felé</a:t>
+            </a:r>
+            <a:r>
+              <a:rPr lang="hu-HU" sz="1800" kern="100" dirty="0">
+                <a:effectLst/>
+                <a:latin typeface="Aptos" panose="020B0004020202020204" pitchFamily="34" charset="0"/>
+                <a:ea typeface="Aptos" panose="020B0004020202020204" pitchFamily="34" charset="0"/>
+                <a:cs typeface="Times New Roman" panose="02020603050405020304" pitchFamily="18" charset="0"/>
+              </a:rPr>
+              <a:t>. Így hiába csatlakozik valaki a szálláson a netre, esélye sincs 'beleszólni' a vállalati szerverekhez vagy az irodai gépekhez. A </a:t>
+            </a:r>
+            <a:r>
+              <a:rPr lang="hu-HU" sz="1800" b="1" kern="100" dirty="0">
+                <a:effectLst/>
+                <a:latin typeface="Aptos" panose="020B0004020202020204" pitchFamily="34" charset="0"/>
+                <a:ea typeface="Aptos" panose="020B0004020202020204" pitchFamily="34" charset="0"/>
+                <a:cs typeface="Times New Roman" panose="02020603050405020304" pitchFamily="18" charset="0"/>
+              </a:rPr>
+              <a:t>DHCP</a:t>
+            </a:r>
+            <a:r>
+              <a:rPr lang="hu-HU" sz="1800" kern="100" dirty="0">
+                <a:effectLst/>
+                <a:latin typeface="Aptos" panose="020B0004020202020204" pitchFamily="34" charset="0"/>
+                <a:ea typeface="Aptos" panose="020B0004020202020204" pitchFamily="34" charset="0"/>
+                <a:cs typeface="Times New Roman" panose="02020603050405020304" pitchFamily="18" charset="0"/>
+              </a:rPr>
+              <a:t> itt is automatikusan kiosztja a címeket a vendégeknek, a </a:t>
+            </a:r>
+            <a:r>
+              <a:rPr lang="hu-HU" sz="1800" b="1" kern="100" dirty="0" err="1">
+                <a:effectLst/>
+                <a:latin typeface="Aptos" panose="020B0004020202020204" pitchFamily="34" charset="0"/>
+                <a:ea typeface="Aptos" panose="020B0004020202020204" pitchFamily="34" charset="0"/>
+                <a:cs typeface="Times New Roman" panose="02020603050405020304" pitchFamily="18" charset="0"/>
+              </a:rPr>
+              <a:t>dual-band</a:t>
+            </a:r>
+            <a:r>
+              <a:rPr lang="hu-HU" sz="1800" b="1" kern="100" dirty="0">
+                <a:effectLst/>
+                <a:latin typeface="Aptos" panose="020B0004020202020204" pitchFamily="34" charset="0"/>
+                <a:ea typeface="Aptos" panose="020B0004020202020204" pitchFamily="34" charset="0"/>
+                <a:cs typeface="Times New Roman" panose="02020603050405020304" pitchFamily="18" charset="0"/>
+              </a:rPr>
+              <a:t> WiFi</a:t>
+            </a:r>
+            <a:r>
+              <a:rPr lang="hu-HU" sz="1800" kern="100" dirty="0">
+                <a:effectLst/>
+                <a:latin typeface="Aptos" panose="020B0004020202020204" pitchFamily="34" charset="0"/>
+                <a:ea typeface="Aptos" panose="020B0004020202020204" pitchFamily="34" charset="0"/>
+                <a:cs typeface="Times New Roman" panose="02020603050405020304" pitchFamily="18" charset="0"/>
+              </a:rPr>
+              <a:t> pedig bírja a terhelést, de a biztonsági falunk garantálja, hogy a szállás forgalma megálljon a saját határain belül.</a:t>
+            </a:r>
+          </a:p>
+          <a:p>
+            <a:endParaRPr lang="hu-HU" dirty="0"/>
+          </a:p>
+        </p:txBody>
+      </p:sp>
+      <p:sp>
+        <p:nvSpPr>
+          <p:cNvPr id="4" name="Dia számának helye 3"/>
+          <p:cNvSpPr>
+            <a:spLocks noGrp="1"/>
+          </p:cNvSpPr>
+          <p:nvPr>
+            <p:ph type="sldNum" sz="quarter" idx="5"/>
+          </p:nvPr>
+        </p:nvSpPr>
+        <p:spPr/>
+        <p:txBody>
+          <a:bodyPr/>
+          <a:lstStyle/>
+          <a:p>
+            <a:fld id="{1087266A-CB85-4818-B702-CBAEB43B1A09}" type="slidenum">
+              <a:rPr lang="hu-HU" smtClean="0"/>
+              <a:t>8</a:t>
+            </a:fld>
+            <a:endParaRPr lang="hu-HU"/>
+          </a:p>
+        </p:txBody>
+      </p:sp>
+    </p:spTree>
+    <p:extLst>
+      <p:ext uri="{BB962C8B-B14F-4D97-AF65-F5344CB8AC3E}">
+        <p14:creationId xmlns:p14="http://schemas.microsoft.com/office/powerpoint/2010/main" val="4141374688"/>
+      </p:ext>
+    </p:extLst>
+  </p:cSld>
+  <p:clrMapOvr>
+    <a:masterClrMapping/>
+  </p:clrMapOvr>
+</p:notes>
+</file>
+
+<file path=ppt/notesSlides/notesSlide8.xml><?xml version="1.0" encoding="utf-8"?>
+<p:notes xmlns:a="http://schemas.openxmlformats.org/drawingml/2006/main" xmlns:r="http://schemas.openxmlformats.org/officeDocument/2006/relationships" xmlns:p="http://schemas.openxmlformats.org/presentationml/2006/main">
+  <p:cSld>
+    <p:spTree>
+      <p:nvGrpSpPr>
+        <p:cNvPr id="1" name=""/>
+        <p:cNvGrpSpPr/>
+        <p:nvPr/>
+      </p:nvGrpSpPr>
+      <p:grpSpPr>
+        <a:xfrm>
+          <a:off x="0" y="0"/>
+          <a:ext cx="0" cy="0"/>
+          <a:chOff x="0" y="0"/>
+          <a:chExt cx="0" cy="0"/>
+        </a:xfrm>
+      </p:grpSpPr>
+      <p:sp>
+        <p:nvSpPr>
+          <p:cNvPr id="2" name="Diakép helye 1"/>
+          <p:cNvSpPr>
+            <a:spLocks noGrp="1" noRot="1" noChangeAspect="1"/>
+          </p:cNvSpPr>
+          <p:nvPr>
+            <p:ph type="sldImg"/>
+          </p:nvPr>
+        </p:nvSpPr>
+        <p:spPr/>
+      </p:sp>
+      <p:sp>
+        <p:nvSpPr>
+          <p:cNvPr id="3" name="Jegyzetek helye 2"/>
+          <p:cNvSpPr>
+            <a:spLocks noGrp="1"/>
+          </p:cNvSpPr>
+          <p:nvPr>
+            <p:ph type="body" idx="1"/>
+          </p:nvPr>
+        </p:nvSpPr>
+        <p:spPr/>
+        <p:txBody>
+          <a:bodyPr/>
+          <a:lstStyle/>
+          <a:p>
+            <a:pPr marL="0" marR="0" lvl="0" indent="0" algn="l" defTabSz="914400" rtl="0" eaLnBrk="1" fontAlgn="auto" latinLnBrk="0" hangingPunct="1">
+              <a:lnSpc>
+                <a:spcPct val="100000"/>
+              </a:lnSpc>
+              <a:spcBef>
+                <a:spcPts val="0"/>
+              </a:spcBef>
+              <a:spcAft>
+                <a:spcPts val="0"/>
+              </a:spcAft>
+              <a:buClrTx/>
+              <a:buSzTx/>
+              <a:buFontTx/>
+              <a:buNone/>
+              <a:tabLst/>
+              <a:defRPr/>
+            </a:pPr>
+            <a:r>
+              <a:rPr lang="hu-HU" dirty="0"/>
+              <a:t>MARCI -- </a:t>
+            </a:r>
+            <a:r>
+              <a:rPr lang="hu-HU" sz="1800" kern="100" dirty="0">
+                <a:effectLst/>
+                <a:latin typeface="Aptos" panose="020B0004020202020204" pitchFamily="34" charset="0"/>
+                <a:ea typeface="Aptos" panose="020B0004020202020204" pitchFamily="34" charset="0"/>
+                <a:cs typeface="Times New Roman" panose="02020603050405020304" pitchFamily="18" charset="0"/>
+              </a:rPr>
+              <a:t>A portai részlegnél a modern épületfelügyeletet modelleztük, ahol </a:t>
+            </a:r>
+            <a:r>
+              <a:rPr lang="hu-HU" sz="1800" b="1" kern="100" dirty="0" err="1">
+                <a:effectLst/>
+                <a:latin typeface="Aptos" panose="020B0004020202020204" pitchFamily="34" charset="0"/>
+                <a:ea typeface="Aptos" panose="020B0004020202020204" pitchFamily="34" charset="0"/>
+                <a:cs typeface="Times New Roman" panose="02020603050405020304" pitchFamily="18" charset="0"/>
+              </a:rPr>
+              <a:t>IoT</a:t>
+            </a:r>
+            <a:r>
+              <a:rPr lang="hu-HU" sz="1800" b="1" kern="100" dirty="0">
+                <a:effectLst/>
+                <a:latin typeface="Aptos" panose="020B0004020202020204" pitchFamily="34" charset="0"/>
+                <a:ea typeface="Aptos" panose="020B0004020202020204" pitchFamily="34" charset="0"/>
+                <a:cs typeface="Times New Roman" panose="02020603050405020304" pitchFamily="18" charset="0"/>
+              </a:rPr>
+              <a:t> (Internet of </a:t>
+            </a:r>
+            <a:r>
+              <a:rPr lang="hu-HU" sz="1800" b="1" kern="100" dirty="0" err="1">
+                <a:effectLst/>
+                <a:latin typeface="Aptos" panose="020B0004020202020204" pitchFamily="34" charset="0"/>
+                <a:ea typeface="Aptos" panose="020B0004020202020204" pitchFamily="34" charset="0"/>
+                <a:cs typeface="Times New Roman" panose="02020603050405020304" pitchFamily="18" charset="0"/>
+              </a:rPr>
+              <a:t>Things</a:t>
+            </a:r>
+            <a:r>
+              <a:rPr lang="hu-HU" sz="1800" b="1" kern="100" dirty="0">
+                <a:effectLst/>
+                <a:latin typeface="Aptos" panose="020B0004020202020204" pitchFamily="34" charset="0"/>
+                <a:ea typeface="Aptos" panose="020B0004020202020204" pitchFamily="34" charset="0"/>
+                <a:cs typeface="Times New Roman" panose="02020603050405020304" pitchFamily="18" charset="0"/>
+              </a:rPr>
+              <a:t>) eszközöket</a:t>
+            </a:r>
+            <a:r>
+              <a:rPr lang="hu-HU" sz="1800" kern="100" dirty="0">
+                <a:effectLst/>
+                <a:latin typeface="Aptos" panose="020B0004020202020204" pitchFamily="34" charset="0"/>
+                <a:ea typeface="Aptos" panose="020B0004020202020204" pitchFamily="34" charset="0"/>
+                <a:cs typeface="Times New Roman" panose="02020603050405020304" pitchFamily="18" charset="0"/>
+              </a:rPr>
+              <a:t> – például egy okos ajtót és a hozzá tartozó vezérlőt – kapcsoltunk a hálózatra. Ezek az eszközök egy dedikált </a:t>
+            </a:r>
+            <a:r>
+              <a:rPr lang="hu-HU" sz="1800" b="1" kern="100" dirty="0" err="1">
+                <a:effectLst/>
+                <a:latin typeface="Aptos" panose="020B0004020202020204" pitchFamily="34" charset="0"/>
+                <a:ea typeface="Aptos" panose="020B0004020202020204" pitchFamily="34" charset="0"/>
+                <a:cs typeface="Times New Roman" panose="02020603050405020304" pitchFamily="18" charset="0"/>
+              </a:rPr>
+              <a:t>IoT</a:t>
+            </a:r>
+            <a:r>
+              <a:rPr lang="hu-HU" sz="1800" b="1" kern="100" dirty="0">
+                <a:effectLst/>
+                <a:latin typeface="Aptos" panose="020B0004020202020204" pitchFamily="34" charset="0"/>
+                <a:ea typeface="Aptos" panose="020B0004020202020204" pitchFamily="34" charset="0"/>
+                <a:cs typeface="Times New Roman" panose="02020603050405020304" pitchFamily="18" charset="0"/>
+              </a:rPr>
+              <a:t> szerveren</a:t>
+            </a:r>
+            <a:r>
+              <a:rPr lang="hu-HU" sz="1800" kern="100" dirty="0">
+                <a:effectLst/>
+                <a:latin typeface="Aptos" panose="020B0004020202020204" pitchFamily="34" charset="0"/>
+                <a:ea typeface="Aptos" panose="020B0004020202020204" pitchFamily="34" charset="0"/>
+                <a:cs typeface="Times New Roman" panose="02020603050405020304" pitchFamily="18" charset="0"/>
+              </a:rPr>
+              <a:t> keresztül kommunikálnak, így a beléptetés és a megfigyelés távolról, központilag is kezelhető. A </a:t>
+            </a:r>
+            <a:r>
+              <a:rPr lang="hu-HU" sz="1800" b="1" kern="100" dirty="0">
+                <a:effectLst/>
+                <a:latin typeface="Aptos" panose="020B0004020202020204" pitchFamily="34" charset="0"/>
+                <a:ea typeface="Aptos" panose="020B0004020202020204" pitchFamily="34" charset="0"/>
+                <a:cs typeface="Times New Roman" panose="02020603050405020304" pitchFamily="18" charset="0"/>
+              </a:rPr>
+              <a:t>dinamikus </a:t>
+            </a:r>
+            <a:r>
+              <a:rPr lang="hu-HU" sz="1800" b="1" kern="100" dirty="0" err="1">
+                <a:effectLst/>
+                <a:latin typeface="Aptos" panose="020B0004020202020204" pitchFamily="34" charset="0"/>
+                <a:ea typeface="Aptos" panose="020B0004020202020204" pitchFamily="34" charset="0"/>
+                <a:cs typeface="Times New Roman" panose="02020603050405020304" pitchFamily="18" charset="0"/>
+              </a:rPr>
+              <a:t>routing</a:t>
+            </a:r>
+            <a:r>
+              <a:rPr lang="hu-HU" sz="1800" kern="100" dirty="0">
+                <a:effectLst/>
+                <a:latin typeface="Aptos" panose="020B0004020202020204" pitchFamily="34" charset="0"/>
+                <a:ea typeface="Aptos" panose="020B0004020202020204" pitchFamily="34" charset="0"/>
+                <a:cs typeface="Times New Roman" panose="02020603050405020304" pitchFamily="18" charset="0"/>
+              </a:rPr>
+              <a:t> itt is biztosítja a stabil adatkapcsolatot, a </a:t>
+            </a:r>
+            <a:r>
+              <a:rPr lang="hu-HU" sz="1800" b="1" kern="100" dirty="0">
+                <a:effectLst/>
+                <a:latin typeface="Aptos" panose="020B0004020202020204" pitchFamily="34" charset="0"/>
+                <a:ea typeface="Aptos" panose="020B0004020202020204" pitchFamily="34" charset="0"/>
+                <a:cs typeface="Times New Roman" panose="02020603050405020304" pitchFamily="18" charset="0"/>
+              </a:rPr>
+              <a:t>DHCP</a:t>
+            </a:r>
+            <a:r>
+              <a:rPr lang="hu-HU" sz="1800" kern="100" dirty="0">
+                <a:effectLst/>
+                <a:latin typeface="Aptos" panose="020B0004020202020204" pitchFamily="34" charset="0"/>
+                <a:ea typeface="Aptos" panose="020B0004020202020204" pitchFamily="34" charset="0"/>
+                <a:cs typeface="Times New Roman" panose="02020603050405020304" pitchFamily="18" charset="0"/>
+              </a:rPr>
+              <a:t> pedig egyszerűvé teszi az új okoseszközök hálózatra illesztését, legyen szó akár egy új kameráról vagy egy szenzorról.</a:t>
+            </a:r>
+          </a:p>
+          <a:p>
+            <a:endParaRPr lang="hu-HU" dirty="0"/>
+          </a:p>
+        </p:txBody>
+      </p:sp>
+      <p:sp>
+        <p:nvSpPr>
+          <p:cNvPr id="4" name="Dia számának helye 3"/>
+          <p:cNvSpPr>
+            <a:spLocks noGrp="1"/>
+          </p:cNvSpPr>
+          <p:nvPr>
+            <p:ph type="sldNum" sz="quarter" idx="5"/>
+          </p:nvPr>
+        </p:nvSpPr>
+        <p:spPr/>
+        <p:txBody>
+          <a:bodyPr/>
+          <a:lstStyle/>
+          <a:p>
+            <a:fld id="{1087266A-CB85-4818-B702-CBAEB43B1A09}" type="slidenum">
+              <a:rPr lang="hu-HU" smtClean="0"/>
+              <a:t>9</a:t>
+            </a:fld>
+            <a:endParaRPr lang="hu-HU"/>
+          </a:p>
+        </p:txBody>
+      </p:sp>
+    </p:spTree>
+    <p:extLst>
+      <p:ext uri="{BB962C8B-B14F-4D97-AF65-F5344CB8AC3E}">
+        <p14:creationId xmlns:p14="http://schemas.microsoft.com/office/powerpoint/2010/main" val="906989866"/>
+      </p:ext>
+    </p:extLst>
+  </p:cSld>
+  <p:clrMapOvr>
+    <a:masterClrMapping/>
+  </p:clrMapOvr>
+</p:notes>
+</file>
+
+<file path=ppt/notesSlides/notesSlide9.xml><?xml version="1.0" encoding="utf-8"?>
+<p:notes xmlns:a="http://schemas.openxmlformats.org/drawingml/2006/main" xmlns:r="http://schemas.openxmlformats.org/officeDocument/2006/relationships" xmlns:p="http://schemas.openxmlformats.org/presentationml/2006/main">
+  <p:cSld>
+    <p:spTree>
+      <p:nvGrpSpPr>
+        <p:cNvPr id="1" name=""/>
+        <p:cNvGrpSpPr/>
+        <p:nvPr/>
+      </p:nvGrpSpPr>
+      <p:grpSpPr>
+        <a:xfrm>
+          <a:off x="0" y="0"/>
+          <a:ext cx="0" cy="0"/>
+          <a:chOff x="0" y="0"/>
+          <a:chExt cx="0" cy="0"/>
+        </a:xfrm>
+      </p:grpSpPr>
+      <p:sp>
+        <p:nvSpPr>
+          <p:cNvPr id="2" name="Diakép helye 1"/>
+          <p:cNvSpPr>
+            <a:spLocks noGrp="1" noRot="1" noChangeAspect="1"/>
+          </p:cNvSpPr>
+          <p:nvPr>
+            <p:ph type="sldImg"/>
+          </p:nvPr>
+        </p:nvSpPr>
+        <p:spPr/>
+      </p:sp>
+      <p:sp>
+        <p:nvSpPr>
+          <p:cNvPr id="3" name="Jegyzetek helye 2"/>
+          <p:cNvSpPr>
+            <a:spLocks noGrp="1"/>
+          </p:cNvSpPr>
+          <p:nvPr>
+            <p:ph type="body" idx="1"/>
+          </p:nvPr>
+        </p:nvSpPr>
+        <p:spPr/>
+        <p:txBody>
+          <a:bodyPr/>
+          <a:lstStyle/>
+          <a:p>
+            <a:pPr marL="0" marR="0" lvl="0" indent="0" algn="l" defTabSz="914400" rtl="0" eaLnBrk="1" fontAlgn="auto" latinLnBrk="0" hangingPunct="1">
+              <a:lnSpc>
+                <a:spcPct val="100000"/>
+              </a:lnSpc>
+              <a:spcBef>
+                <a:spcPts val="0"/>
+              </a:spcBef>
+              <a:spcAft>
+                <a:spcPts val="0"/>
+              </a:spcAft>
+              <a:buClrTx/>
+              <a:buSzTx/>
+              <a:buFontTx/>
+              <a:buNone/>
+              <a:tabLst/>
+              <a:defRPr/>
+            </a:pPr>
+            <a:r>
+              <a:rPr lang="hu-HU" dirty="0"/>
+              <a:t>PATRIK -- </a:t>
+            </a:r>
+            <a:r>
+              <a:rPr lang="hu-HU" sz="1800" kern="100" dirty="0">
+                <a:effectLst/>
+                <a:latin typeface="Aptos" panose="020B0004020202020204" pitchFamily="34" charset="0"/>
+                <a:ea typeface="Aptos" panose="020B0004020202020204" pitchFamily="34" charset="0"/>
+                <a:cs typeface="Times New Roman" panose="02020603050405020304" pitchFamily="18" charset="0"/>
+              </a:rPr>
+              <a:t>Az egészségügyi részlegnél a legmagasabb </a:t>
+            </a:r>
+            <a:r>
+              <a:rPr lang="hu-HU" sz="1800" b="1" kern="100" dirty="0" err="1">
+                <a:effectLst/>
+                <a:latin typeface="Aptos" panose="020B0004020202020204" pitchFamily="34" charset="0"/>
+                <a:ea typeface="Aptos" panose="020B0004020202020204" pitchFamily="34" charset="0"/>
+                <a:cs typeface="Times New Roman" panose="02020603050405020304" pitchFamily="18" charset="0"/>
+              </a:rPr>
+              <a:t>Security</a:t>
+            </a:r>
+            <a:r>
+              <a:rPr lang="hu-HU" sz="1800" b="1" kern="100" dirty="0">
+                <a:effectLst/>
+                <a:latin typeface="Aptos" panose="020B0004020202020204" pitchFamily="34" charset="0"/>
+                <a:ea typeface="Aptos" panose="020B0004020202020204" pitchFamily="34" charset="0"/>
+                <a:cs typeface="Times New Roman" panose="02020603050405020304" pitchFamily="18" charset="0"/>
+              </a:rPr>
+              <a:t> leveleket</a:t>
+            </a:r>
+            <a:r>
+              <a:rPr lang="hu-HU" sz="1800" kern="100" dirty="0">
+                <a:effectLst/>
+                <a:latin typeface="Aptos" panose="020B0004020202020204" pitchFamily="34" charset="0"/>
+                <a:ea typeface="Aptos" panose="020B0004020202020204" pitchFamily="34" charset="0"/>
+                <a:cs typeface="Times New Roman" panose="02020603050405020304" pitchFamily="18" charset="0"/>
+              </a:rPr>
+              <a:t> alkalmaztuk, hiszen itt kezeljük a legérzékenyebb adatokat. A </a:t>
+            </a:r>
+            <a:r>
+              <a:rPr lang="hu-HU" sz="1800" b="1" kern="100" dirty="0">
+                <a:effectLst/>
+                <a:latin typeface="Aptos" panose="020B0004020202020204" pitchFamily="34" charset="0"/>
+                <a:ea typeface="Aptos" panose="020B0004020202020204" pitchFamily="34" charset="0"/>
+                <a:cs typeface="Times New Roman" panose="02020603050405020304" pitchFamily="18" charset="0"/>
+              </a:rPr>
+              <a:t>tűzfalat</a:t>
+            </a:r>
+            <a:r>
+              <a:rPr lang="hu-HU" sz="1800" kern="100" dirty="0">
+                <a:effectLst/>
+                <a:latin typeface="Aptos" panose="020B0004020202020204" pitchFamily="34" charset="0"/>
+                <a:ea typeface="Aptos" panose="020B0004020202020204" pitchFamily="34" charset="0"/>
+                <a:cs typeface="Times New Roman" panose="02020603050405020304" pitchFamily="18" charset="0"/>
+              </a:rPr>
+              <a:t> úgy konfiguráltuk, hogy kifelé minden forgalmat engedélyezzen, de befelé egy szigorú szűrőként működik: </a:t>
+            </a:r>
+            <a:r>
+              <a:rPr lang="hu-HU" sz="1800" b="1" kern="100" dirty="0">
+                <a:effectLst/>
+                <a:latin typeface="Aptos" panose="020B0004020202020204" pitchFamily="34" charset="0"/>
+                <a:ea typeface="Aptos" panose="020B0004020202020204" pitchFamily="34" charset="0"/>
+                <a:cs typeface="Times New Roman" panose="02020603050405020304" pitchFamily="18" charset="0"/>
+              </a:rPr>
+              <a:t>kívülről semmi nem juthat be</a:t>
+            </a:r>
+            <a:r>
+              <a:rPr lang="hu-HU" sz="1800" kern="100" dirty="0">
+                <a:effectLst/>
+                <a:latin typeface="Aptos" panose="020B0004020202020204" pitchFamily="34" charset="0"/>
+                <a:ea typeface="Aptos" panose="020B0004020202020204" pitchFamily="34" charset="0"/>
+                <a:cs typeface="Times New Roman" panose="02020603050405020304" pitchFamily="18" charset="0"/>
+              </a:rPr>
+              <a:t> a hálózatba, csak az, ami válasz egy belső kérésre. Ezt fejeltük meg egy plusz </a:t>
+            </a:r>
+            <a:r>
+              <a:rPr lang="hu-HU" sz="1800" b="1" kern="100" dirty="0">
+                <a:effectLst/>
+                <a:latin typeface="Aptos" panose="020B0004020202020204" pitchFamily="34" charset="0"/>
+                <a:ea typeface="Aptos" panose="020B0004020202020204" pitchFamily="34" charset="0"/>
+                <a:cs typeface="Times New Roman" panose="02020603050405020304" pitchFamily="18" charset="0"/>
+              </a:rPr>
+              <a:t>ACL-el</a:t>
+            </a:r>
+            <a:r>
+              <a:rPr lang="hu-HU" sz="1800" kern="100" dirty="0">
+                <a:effectLst/>
+                <a:latin typeface="Aptos" panose="020B0004020202020204" pitchFamily="34" charset="0"/>
+                <a:ea typeface="Aptos" panose="020B0004020202020204" pitchFamily="34" charset="0"/>
+                <a:cs typeface="Times New Roman" panose="02020603050405020304" pitchFamily="18" charset="0"/>
+              </a:rPr>
+              <a:t>, ami még a belső hálózaton belül is korlátoz: a szerverekhez és a kritikus eszközökhöz kizárólag az </a:t>
+            </a:r>
+            <a:r>
+              <a:rPr lang="hu-HU" sz="1800" b="1" kern="100" dirty="0" err="1">
+                <a:effectLst/>
+                <a:latin typeface="Aptos" panose="020B0004020202020204" pitchFamily="34" charset="0"/>
+                <a:ea typeface="Aptos" panose="020B0004020202020204" pitchFamily="34" charset="0"/>
+                <a:cs typeface="Times New Roman" panose="02020603050405020304" pitchFamily="18" charset="0"/>
+              </a:rPr>
+              <a:t>Admin</a:t>
+            </a:r>
+            <a:r>
+              <a:rPr lang="hu-HU" sz="1800" b="1" kern="100" dirty="0">
+                <a:effectLst/>
+                <a:latin typeface="Aptos" panose="020B0004020202020204" pitchFamily="34" charset="0"/>
+                <a:ea typeface="Aptos" panose="020B0004020202020204" pitchFamily="34" charset="0"/>
+                <a:cs typeface="Times New Roman" panose="02020603050405020304" pitchFamily="18" charset="0"/>
+              </a:rPr>
+              <a:t> szobából</a:t>
+            </a:r>
+            <a:r>
+              <a:rPr lang="hu-HU" sz="1800" kern="100" dirty="0">
+                <a:effectLst/>
+                <a:latin typeface="Aptos" panose="020B0004020202020204" pitchFamily="34" charset="0"/>
+                <a:ea typeface="Aptos" panose="020B0004020202020204" pitchFamily="34" charset="0"/>
+                <a:cs typeface="Times New Roman" panose="02020603050405020304" pitchFamily="18" charset="0"/>
+              </a:rPr>
+              <a:t> lehet hozzáférni. Ez a többrétegű védelem garantálja, hogy se külső támadás, se egy véletlen belső hiba ne veszélyeztesse az egészségügyi adatbázist.</a:t>
+            </a:r>
+          </a:p>
+          <a:p>
+            <a:endParaRPr lang="hu-HU" dirty="0"/>
+          </a:p>
+        </p:txBody>
+      </p:sp>
+      <p:sp>
+        <p:nvSpPr>
+          <p:cNvPr id="4" name="Dia számának helye 3"/>
+          <p:cNvSpPr>
+            <a:spLocks noGrp="1"/>
+          </p:cNvSpPr>
+          <p:nvPr>
+            <p:ph type="sldNum" sz="quarter" idx="5"/>
+          </p:nvPr>
+        </p:nvSpPr>
+        <p:spPr/>
+        <p:txBody>
+          <a:bodyPr/>
+          <a:lstStyle/>
+          <a:p>
+            <a:fld id="{1087266A-CB85-4818-B702-CBAEB43B1A09}" type="slidenum">
+              <a:rPr lang="hu-HU" smtClean="0"/>
+              <a:t>10</a:t>
+            </a:fld>
+            <a:endParaRPr lang="hu-HU"/>
+          </a:p>
+        </p:txBody>
+      </p:sp>
+    </p:spTree>
+    <p:extLst>
+      <p:ext uri="{BB962C8B-B14F-4D97-AF65-F5344CB8AC3E}">
+        <p14:creationId xmlns:p14="http://schemas.microsoft.com/office/powerpoint/2010/main" val="168289589"/>
+      </p:ext>
+    </p:extLst>
+  </p:cSld>
+  <p:clrMapOvr>
+    <a:masterClrMapping/>
+  </p:clrMapOvr>
+</p:notes>
+</file>
+
 <file path=ppt/slideLayouts/slideLayout1.xml><?xml version="1.0" encoding="utf-8"?>
 <p:sldLayout xmlns:a="http://schemas.openxmlformats.org/drawingml/2006/main" xmlns:r="http://schemas.openxmlformats.org/officeDocument/2006/relationships" xmlns:p="http://schemas.openxmlformats.org/presentationml/2006/main" type="title" preserve="1">
   <p:cSld name="Címdia">
@@ -317,7 +4842,7 @@
           <a:p>
             <a:fld id="{D25B39C7-3761-4B48-AAEE-5F77047FB7CA}" type="datetimeFigureOut">
               <a:rPr lang="hu-HU" smtClean="0"/>
-              <a:t>2026. 02. 17.</a:t>
+              <a:t>2026. 02. 22.</a:t>
             </a:fld>
             <a:endParaRPr lang="hu-HU" dirty="0"/>
           </a:p>
@@ -615,7 +5140,7 @@
           <a:p>
             <a:fld id="{D25B39C7-3761-4B48-AAEE-5F77047FB7CA}" type="datetimeFigureOut">
               <a:rPr lang="hu-HU" smtClean="0"/>
-              <a:t>2026. 02. 17.</a:t>
+              <a:t>2026. 02. 22.</a:t>
             </a:fld>
             <a:endParaRPr lang="hu-HU" dirty="0"/>
           </a:p>
@@ -807,7 +5332,7 @@
           <a:p>
             <a:fld id="{D25B39C7-3761-4B48-AAEE-5F77047FB7CA}" type="datetimeFigureOut">
               <a:rPr lang="hu-HU" smtClean="0"/>
-              <a:t>2026. 02. 17.</a:t>
+              <a:t>2026. 02. 22.</a:t>
             </a:fld>
             <a:endParaRPr lang="hu-HU" dirty="0"/>
           </a:p>
@@ -1068,7 +5593,7 @@
           <a:p>
             <a:fld id="{D25B39C7-3761-4B48-AAEE-5F77047FB7CA}" type="datetimeFigureOut">
               <a:rPr lang="hu-HU" smtClean="0"/>
-              <a:t>2026. 02. 17.</a:t>
+              <a:t>2026. 02. 22.</a:t>
             </a:fld>
             <a:endParaRPr lang="hu-HU" dirty="0"/>
           </a:p>
@@ -1492,7 +6017,7 @@
           <a:p>
             <a:fld id="{D25B39C7-3761-4B48-AAEE-5F77047FB7CA}" type="datetimeFigureOut">
               <a:rPr lang="hu-HU" smtClean="0"/>
-              <a:t>2026. 02. 17.</a:t>
+              <a:t>2026. 02. 22.</a:t>
             </a:fld>
             <a:endParaRPr lang="hu-HU" dirty="0"/>
           </a:p>
@@ -2029,7 +6554,7 @@
           <a:p>
             <a:fld id="{D25B39C7-3761-4B48-AAEE-5F77047FB7CA}" type="datetimeFigureOut">
               <a:rPr lang="hu-HU" smtClean="0"/>
-              <a:t>2026. 02. 17.</a:t>
+              <a:t>2026. 02. 22.</a:t>
             </a:fld>
             <a:endParaRPr lang="hu-HU" dirty="0"/>
           </a:p>
@@ -2893,7 +7418,7 @@
           <a:p>
             <a:fld id="{D25B39C7-3761-4B48-AAEE-5F77047FB7CA}" type="datetimeFigureOut">
               <a:rPr lang="hu-HU" smtClean="0"/>
-              <a:t>2026. 02. 17.</a:t>
+              <a:t>2026. 02. 22.</a:t>
             </a:fld>
             <a:endParaRPr lang="hu-HU" dirty="0"/>
           </a:p>
@@ -3063,7 +7588,7 @@
           <a:p>
             <a:fld id="{D25B39C7-3761-4B48-AAEE-5F77047FB7CA}" type="datetimeFigureOut">
               <a:rPr lang="hu-HU" smtClean="0"/>
-              <a:t>2026. 02. 17.</a:t>
+              <a:t>2026. 02. 22.</a:t>
             </a:fld>
             <a:endParaRPr lang="hu-HU" dirty="0"/>
           </a:p>
@@ -3247,7 +7772,7 @@
           <a:p>
             <a:fld id="{D25B39C7-3761-4B48-AAEE-5F77047FB7CA}" type="datetimeFigureOut">
               <a:rPr lang="hu-HU" smtClean="0"/>
-              <a:t>2026. 02. 17.</a:t>
+              <a:t>2026. 02. 22.</a:t>
             </a:fld>
             <a:endParaRPr lang="hu-HU" dirty="0"/>
           </a:p>
@@ -3417,7 +7942,7 @@
           <a:p>
             <a:fld id="{D25B39C7-3761-4B48-AAEE-5F77047FB7CA}" type="datetimeFigureOut">
               <a:rPr lang="hu-HU" smtClean="0"/>
-              <a:t>2026. 02. 17.</a:t>
+              <a:t>2026. 02. 22.</a:t>
             </a:fld>
             <a:endParaRPr lang="hu-HU" dirty="0"/>
           </a:p>
@@ -3661,7 +8186,7 @@
           <a:p>
             <a:fld id="{D25B39C7-3761-4B48-AAEE-5F77047FB7CA}" type="datetimeFigureOut">
               <a:rPr lang="hu-HU" smtClean="0"/>
-              <a:t>2026. 02. 17.</a:t>
+              <a:t>2026. 02. 22.</a:t>
             </a:fld>
             <a:endParaRPr lang="hu-HU" dirty="0"/>
           </a:p>
@@ -3897,7 +8422,7 @@
           <a:p>
             <a:fld id="{D25B39C7-3761-4B48-AAEE-5F77047FB7CA}" type="datetimeFigureOut">
               <a:rPr lang="hu-HU" smtClean="0"/>
-              <a:t>2026. 02. 17.</a:t>
+              <a:t>2026. 02. 22.</a:t>
             </a:fld>
             <a:endParaRPr lang="hu-HU" dirty="0"/>
           </a:p>
@@ -4363,7 +8888,7 @@
           <a:p>
             <a:fld id="{D25B39C7-3761-4B48-AAEE-5F77047FB7CA}" type="datetimeFigureOut">
               <a:rPr lang="hu-HU" smtClean="0"/>
-              <a:t>2026. 02. 17.</a:t>
+              <a:t>2026. 02. 22.</a:t>
             </a:fld>
             <a:endParaRPr lang="hu-HU" dirty="0"/>
           </a:p>
@@ -4481,7 +9006,7 @@
           <a:p>
             <a:fld id="{D25B39C7-3761-4B48-AAEE-5F77047FB7CA}" type="datetimeFigureOut">
               <a:rPr lang="hu-HU" smtClean="0"/>
-              <a:t>2026. 02. 17.</a:t>
+              <a:t>2026. 02. 22.</a:t>
             </a:fld>
             <a:endParaRPr lang="hu-HU" dirty="0"/>
           </a:p>
@@ -4576,7 +9101,7 @@
           <a:p>
             <a:fld id="{D25B39C7-3761-4B48-AAEE-5F77047FB7CA}" type="datetimeFigureOut">
               <a:rPr lang="hu-HU" smtClean="0"/>
-              <a:t>2026. 02. 17.</a:t>
+              <a:t>2026. 02. 22.</a:t>
             </a:fld>
             <a:endParaRPr lang="hu-HU" dirty="0"/>
           </a:p>
@@ -4831,7 +9356,7 @@
           <a:p>
             <a:fld id="{D25B39C7-3761-4B48-AAEE-5F77047FB7CA}" type="datetimeFigureOut">
               <a:rPr lang="hu-HU" smtClean="0"/>
-              <a:t>2026. 02. 17.</a:t>
+              <a:t>2026. 02. 22.</a:t>
             </a:fld>
             <a:endParaRPr lang="hu-HU" dirty="0"/>
           </a:p>
@@ -5131,7 +9656,7 @@
           <a:p>
             <a:fld id="{D25B39C7-3761-4B48-AAEE-5F77047FB7CA}" type="datetimeFigureOut">
               <a:rPr lang="hu-HU" smtClean="0"/>
-              <a:t>2026. 02. 17.</a:t>
+              <a:t>2026. 02. 22.</a:t>
             </a:fld>
             <a:endParaRPr lang="hu-HU" dirty="0"/>
           </a:p>
@@ -5365,7 +9890,7 @@
           <a:p>
             <a:fld id="{D25B39C7-3761-4B48-AAEE-5F77047FB7CA}" type="datetimeFigureOut">
               <a:rPr lang="hu-HU" smtClean="0"/>
-              <a:t>2026. 02. 17.</a:t>
+              <a:t>2026. 02. 22.</a:t>
             </a:fld>
             <a:endParaRPr lang="hu-HU" dirty="0"/>
           </a:p>
@@ -6071,7 +10596,7 @@
                   <a:schemeClr val="tx1"/>
                 </a:solidFill>
               </a:rPr>
-              <a:t>Vanguard-Network</a:t>
+              <a:t>Shadowhawk-Fort</a:t>
             </a:r>
           </a:p>
         </p:txBody>
@@ -6235,6 +10760,16 @@
                   <a:schemeClr val="tx1"/>
                 </a:solidFill>
               </a:rPr>
+              <a:t>ACL</a:t>
+            </a:r>
+          </a:p>
+          <a:p>
+            <a:r>
+              <a:rPr lang="hu-HU" sz="2800" dirty="0">
+                <a:solidFill>
+                  <a:schemeClr val="tx1"/>
+                </a:solidFill>
+              </a:rPr>
               <a:t>Dinamikus routing</a:t>
             </a:r>
           </a:p>
@@ -6255,7 +10790,7 @@
           <p:nvPr/>
         </p:nvPicPr>
         <p:blipFill>
-          <a:blip r:embed="rId2"/>
+          <a:blip r:embed="rId3"/>
           <a:stretch>
             <a:fillRect/>
           </a:stretch>
@@ -6411,7 +10946,7 @@
           <p:nvPr/>
         </p:nvPicPr>
         <p:blipFill>
-          <a:blip r:embed="rId2"/>
+          <a:blip r:embed="rId3"/>
           <a:stretch>
             <a:fillRect/>
           </a:stretch>
@@ -6587,7 +11122,7 @@
           <p:nvPr/>
         </p:nvPicPr>
         <p:blipFill>
-          <a:blip r:embed="rId2"/>
+          <a:blip r:embed="rId3"/>
           <a:stretch>
             <a:fillRect/>
           </a:stretch>
@@ -6746,7 +11281,7 @@
           <p:nvPr/>
         </p:nvPicPr>
         <p:blipFill>
-          <a:blip r:embed="rId2"/>
+          <a:blip r:embed="rId3"/>
           <a:stretch>
             <a:fillRect/>
           </a:stretch>
@@ -6900,7 +11435,7 @@
           <p:nvPr/>
         </p:nvPicPr>
         <p:blipFill>
-          <a:blip r:embed="rId2"/>
+          <a:blip r:embed="rId3"/>
           <a:stretch>
             <a:fillRect/>
           </a:stretch>
@@ -7044,7 +11579,7 @@
           <p:nvPr/>
         </p:nvPicPr>
         <p:blipFill>
-          <a:blip r:embed="rId2">
+          <a:blip r:embed="rId3">
             <a:extLst>
               <a:ext uri="{28A0092B-C50C-407E-A947-70E740481C1C}">
                 <a14:useLocalDpi xmlns:a14="http://schemas.microsoft.com/office/drawing/2010/main"/>
@@ -7151,7 +11686,7 @@
           <p:nvPr/>
         </p:nvPicPr>
         <p:blipFill>
-          <a:blip r:embed="rId2"/>
+          <a:blip r:embed="rId3"/>
           <a:stretch>
             <a:fillRect/>
           </a:stretch>
@@ -7397,7 +11932,7 @@
           </p:nvPr>
         </p:nvPicPr>
         <p:blipFill>
-          <a:blip r:embed="rId2"/>
+          <a:blip r:embed="rId3"/>
           <a:stretch>
             <a:fillRect/>
           </a:stretch>
@@ -7427,7 +11962,7 @@
           <p:nvPr/>
         </p:nvPicPr>
         <p:blipFill>
-          <a:blip r:embed="rId3"/>
+          <a:blip r:embed="rId4"/>
           <a:stretch>
             <a:fillRect/>
           </a:stretch>
@@ -7457,7 +11992,7 @@
           <p:nvPr/>
         </p:nvPicPr>
         <p:blipFill>
-          <a:blip r:embed="rId4">
+          <a:blip r:embed="rId5">
             <a:extLst>
               <a:ext uri="{28A0092B-C50C-407E-A947-70E740481C1C}">
                 <a14:useLocalDpi xmlns:a14="http://schemas.microsoft.com/office/drawing/2010/main" val="0"/>
@@ -7720,7 +12255,7 @@
           <p:nvPr/>
         </p:nvPicPr>
         <p:blipFill>
-          <a:blip r:embed="rId2">
+          <a:blip r:embed="rId3">
             <a:extLst>
               <a:ext uri="{28A0092B-C50C-407E-A947-70E740481C1C}">
                 <a14:useLocalDpi xmlns:a14="http://schemas.microsoft.com/office/drawing/2010/main" val="0"/>
@@ -7769,7 +12304,7 @@
           </p:nvPr>
         </p:nvPicPr>
         <p:blipFill>
-          <a:blip r:embed="rId3">
+          <a:blip r:embed="rId4">
             <a:extLst>
               <a:ext uri="{28A0092B-C50C-407E-A947-70E740481C1C}">
                 <a14:useLocalDpi xmlns:a14="http://schemas.microsoft.com/office/drawing/2010/main" val="0"/>
@@ -7797,6 +12332,9 @@
   <p:clrMapOvr>
     <a:masterClrMapping/>
   </p:clrMapOvr>
+  <p:transition spd="slow">
+    <p:push dir="u"/>
+  </p:transition>
 </p:sld>
 </file>
 
@@ -8132,7 +12670,7 @@
           <p:nvPr/>
         </p:nvPicPr>
         <p:blipFill>
-          <a:blip r:embed="rId2"/>
+          <a:blip r:embed="rId3"/>
           <a:stretch>
             <a:fillRect/>
           </a:stretch>
@@ -8162,7 +12700,7 @@
           <p:nvPr/>
         </p:nvPicPr>
         <p:blipFill>
-          <a:blip r:embed="rId3"/>
+          <a:blip r:embed="rId4"/>
           <a:stretch>
             <a:fillRect/>
           </a:stretch>
@@ -8192,7 +12730,7 @@
           <p:nvPr/>
         </p:nvPicPr>
         <p:blipFill>
-          <a:blip r:embed="rId4"/>
+          <a:blip r:embed="rId5"/>
           <a:stretch>
             <a:fillRect/>
           </a:stretch>
@@ -8222,7 +12760,7 @@
           <p:nvPr/>
         </p:nvPicPr>
         <p:blipFill>
-          <a:blip r:embed="rId5"/>
+          <a:blip r:embed="rId6"/>
           <a:stretch>
             <a:fillRect/>
           </a:stretch>
@@ -8386,7 +12924,7 @@
           <p:nvPr/>
         </p:nvPicPr>
         <p:blipFill>
-          <a:blip r:embed="rId2">
+          <a:blip r:embed="rId3">
             <a:extLst>
               <a:ext uri="{28A0092B-C50C-407E-A947-70E740481C1C}">
                 <a14:useLocalDpi xmlns:a14="http://schemas.microsoft.com/office/drawing/2010/main" val="0"/>
@@ -8436,7 +12974,7 @@
           <p:nvPr/>
         </p:nvPicPr>
         <p:blipFill>
-          <a:blip r:embed="rId3">
+          <a:blip r:embed="rId4">
             <a:extLst>
               <a:ext uri="{28A0092B-C50C-407E-A947-70E740481C1C}">
                 <a14:useLocalDpi xmlns:a14="http://schemas.microsoft.com/office/drawing/2010/main" val="0"/>
@@ -8540,7 +13078,7 @@
           <p:nvPr/>
         </p:nvPicPr>
         <p:blipFill>
-          <a:blip r:embed="rId2"/>
+          <a:blip r:embed="rId3"/>
           <a:srcRect t="4680"/>
           <a:stretch/>
         </p:blipFill>
@@ -8927,7 +13465,7 @@
           <p:nvPr/>
         </p:nvPicPr>
         <p:blipFill>
-          <a:blip r:embed="rId2">
+          <a:blip r:embed="rId3">
             <a:extLst>
               <a:ext uri="{28A0092B-C50C-407E-A947-70E740481C1C}">
                 <a14:useLocalDpi xmlns:a14="http://schemas.microsoft.com/office/drawing/2010/main"/>
@@ -9128,7 +13666,7 @@
           <p:nvPr/>
         </p:nvPicPr>
         <p:blipFill>
-          <a:blip r:embed="rId2"/>
+          <a:blip r:embed="rId3"/>
           <a:stretch>
             <a:fillRect/>
           </a:stretch>
@@ -9320,7 +13858,7 @@
           <p:nvPr/>
         </p:nvPicPr>
         <p:blipFill>
-          <a:blip r:embed="rId2"/>
+          <a:blip r:embed="rId3"/>
           <a:stretch>
             <a:fillRect/>
           </a:stretch>
@@ -9470,7 +14008,7 @@
           <p:nvPr/>
         </p:nvPicPr>
         <p:blipFill>
-          <a:blip r:embed="rId2"/>
+          <a:blip r:embed="rId3"/>
           <a:stretch>
             <a:fillRect/>
           </a:stretch>
@@ -9637,7 +14175,30 @@
                   <a:schemeClr val="tx1"/>
                 </a:solidFill>
               </a:rPr>
-              <a:t>Dinamikus routing</a:t>
+              <a:t>Dinamikus </a:t>
+            </a:r>
+            <a:r>
+              <a:rPr lang="hu-HU" sz="3000" dirty="0" err="1">
+                <a:solidFill>
+                  <a:schemeClr val="tx1"/>
+                </a:solidFill>
+              </a:rPr>
+              <a:t>routing</a:t>
+            </a:r>
+            <a:endParaRPr lang="hu-HU" sz="3000" dirty="0">
+              <a:solidFill>
+                <a:schemeClr val="tx1"/>
+              </a:solidFill>
+            </a:endParaRPr>
+          </a:p>
+          <a:p>
+            <a:r>
+              <a:rPr lang="hu-HU" sz="3000" dirty="0">
+                <a:solidFill>
+                  <a:schemeClr val="tx1"/>
+                </a:solidFill>
+              </a:rPr>
+              <a:t>ACL</a:t>
             </a:r>
           </a:p>
           <a:p>
@@ -9663,7 +14224,7 @@
           <p:nvPr/>
         </p:nvPicPr>
         <p:blipFill>
-          <a:blip r:embed="rId2"/>
+          <a:blip r:embed="rId3"/>
           <a:stretch>
             <a:fillRect/>
           </a:stretch>
@@ -9833,7 +14394,7 @@
           <p:nvPr/>
         </p:nvPicPr>
         <p:blipFill>
-          <a:blip r:embed="rId2"/>
+          <a:blip r:embed="rId3"/>
           <a:stretch>
             <a:fillRect/>
           </a:stretch>
@@ -10104,4 +14665,319 @@
     </a:ext>
   </a:extLst>
 </a:theme>
+</file>
+
+<file path=ppt/theme/theme2.xml><?xml version="1.0" encoding="utf-8"?>
+<a:theme xmlns:a="http://schemas.openxmlformats.org/drawingml/2006/main" name="Office-téma">
+  <a:themeElements>
+    <a:clrScheme name="Office">
+      <a:dk1>
+        <a:sysClr val="windowText" lastClr="000000"/>
+      </a:dk1>
+      <a:lt1>
+        <a:sysClr val="window" lastClr="FFFFFF"/>
+      </a:lt1>
+      <a:dk2>
+        <a:srgbClr val="0E2841"/>
+      </a:dk2>
+      <a:lt2>
+        <a:srgbClr val="E8E8E8"/>
+      </a:lt2>
+      <a:accent1>
+        <a:srgbClr val="156082"/>
+      </a:accent1>
+      <a:accent2>
+        <a:srgbClr val="E97132"/>
+      </a:accent2>
+      <a:accent3>
+        <a:srgbClr val="196B24"/>
+      </a:accent3>
+      <a:accent4>
+        <a:srgbClr val="0F9ED5"/>
+      </a:accent4>
+      <a:accent5>
+        <a:srgbClr val="A02B93"/>
+      </a:accent5>
+      <a:accent6>
+        <a:srgbClr val="4EA72E"/>
+      </a:accent6>
+      <a:hlink>
+        <a:srgbClr val="467886"/>
+      </a:hlink>
+      <a:folHlink>
+        <a:srgbClr val="96607D"/>
+      </a:folHlink>
+    </a:clrScheme>
+    <a:fontScheme name="Office">
+      <a:majorFont>
+        <a:latin typeface="Aptos Display" panose="02110004020202020204"/>
+        <a:ea typeface=""/>
+        <a:cs typeface=""/>
+        <a:font script="Jpan" typeface="游ゴシック Light"/>
+        <a:font script="Hang" typeface="맑은 고딕"/>
+        <a:font script="Hans" typeface="等线 Light"/>
+        <a:font script="Hant" typeface="新細明體"/>
+        <a:font script="Arab" typeface="Times New Roman"/>
+        <a:font script="Hebr" typeface="Times New Roman"/>
+        <a:font script="Thai" typeface="Angsana New"/>
+        <a:font script="Ethi" typeface="Nyala"/>
+        <a:font script="Beng" typeface="Vrinda"/>
+        <a:font script="Gujr" typeface="Shruti"/>
+        <a:font script="Khmr" typeface="MoolBoran"/>
+        <a:font script="Knda" typeface="Tunga"/>
+        <a:font script="Guru" typeface="Raavi"/>
+        <a:font script="Cans" typeface="Euphemia"/>
+        <a:font script="Cher" typeface="Plantagenet Cherokee"/>
+        <a:font script="Yiii" typeface="Microsoft Yi Baiti"/>
+        <a:font script="Tibt" typeface="Microsoft Himalaya"/>
+        <a:font script="Thaa" typeface="MV Boli"/>
+        <a:font script="Deva" typeface="Mangal"/>
+        <a:font script="Telu" typeface="Gautami"/>
+        <a:font script="Taml" typeface="Latha"/>
+        <a:font script="Syrc" typeface="Estrangelo Edessa"/>
+        <a:font script="Orya" typeface="Kalinga"/>
+        <a:font script="Mlym" typeface="Kartika"/>
+        <a:font script="Laoo" typeface="DokChampa"/>
+        <a:font script="Sinh" typeface="Iskoola Pota"/>
+        <a:font script="Mong" typeface="Mongolian Baiti"/>
+        <a:font script="Viet" typeface="Times New Roman"/>
+        <a:font script="Uigh" typeface="Microsoft Uighur"/>
+        <a:font script="Geor" typeface="Sylfaen"/>
+        <a:font script="Armn" typeface="Arial"/>
+        <a:font script="Bugi" typeface="Leelawadee UI"/>
+        <a:font script="Bopo" typeface="Microsoft JhengHei"/>
+        <a:font script="Java" typeface="Javanese Text"/>
+        <a:font script="Lisu" typeface="Segoe UI"/>
+        <a:font script="Mymr" typeface="Myanmar Text"/>
+        <a:font script="Nkoo" typeface="Ebrima"/>
+        <a:font script="Olck" typeface="Nirmala UI"/>
+        <a:font script="Osma" typeface="Ebrima"/>
+        <a:font script="Phag" typeface="Phagspa"/>
+        <a:font script="Syrn" typeface="Estrangelo Edessa"/>
+        <a:font script="Syrj" typeface="Estrangelo Edessa"/>
+        <a:font script="Syre" typeface="Estrangelo Edessa"/>
+        <a:font script="Sora" typeface="Nirmala UI"/>
+        <a:font script="Tale" typeface="Microsoft Tai Le"/>
+        <a:font script="Talu" typeface="Microsoft New Tai Lue"/>
+        <a:font script="Tfng" typeface="Ebrima"/>
+      </a:majorFont>
+      <a:minorFont>
+        <a:latin typeface="Aptos" panose="02110004020202020204"/>
+        <a:ea typeface=""/>
+        <a:cs typeface=""/>
+        <a:font script="Jpan" typeface="游ゴシック"/>
+        <a:font script="Hang" typeface="맑은 고딕"/>
+        <a:font script="Hans" typeface="等线"/>
+        <a:font script="Hant" typeface="新細明體"/>
+        <a:font script="Arab" typeface="Arial"/>
+        <a:font script="Hebr" typeface="Arial"/>
+        <a:font script="Thai" typeface="Cordia New"/>
+        <a:font script="Ethi" typeface="Nyala"/>
+        <a:font script="Beng" typeface="Vrinda"/>
+        <a:font script="Gujr" typeface="Shruti"/>
+        <a:font script="Khmr" typeface="DaunPenh"/>
+        <a:font script="Knda" typeface="Tunga"/>
+        <a:font script="Guru" typeface="Raavi"/>
+        <a:font script="Cans" typeface="Euphemia"/>
+        <a:font script="Cher" typeface="Plantagenet Cherokee"/>
+        <a:font script="Yiii" typeface="Microsoft Yi Baiti"/>
+        <a:font script="Tibt" typeface="Microsoft Himalaya"/>
+        <a:font script="Thaa" typeface="MV Boli"/>
+        <a:font script="Deva" typeface="Mangal"/>
+        <a:font script="Telu" typeface="Gautami"/>
+        <a:font script="Taml" typeface="Latha"/>
+        <a:font script="Syrc" typeface="Estrangelo Edessa"/>
+        <a:font script="Orya" typeface="Kalinga"/>
+        <a:font script="Mlym" typeface="Kartika"/>
+        <a:font script="Laoo" typeface="DokChampa"/>
+        <a:font script="Sinh" typeface="Iskoola Pota"/>
+        <a:font script="Mong" typeface="Mongolian Baiti"/>
+        <a:font script="Viet" typeface="Arial"/>
+        <a:font script="Uigh" typeface="Microsoft Uighur"/>
+        <a:font script="Geor" typeface="Sylfaen"/>
+        <a:font script="Armn" typeface="Arial"/>
+        <a:font script="Bugi" typeface="Leelawadee UI"/>
+        <a:font script="Bopo" typeface="Microsoft JhengHei"/>
+        <a:font script="Java" typeface="Javanese Text"/>
+        <a:font script="Lisu" typeface="Segoe UI"/>
+        <a:font script="Mymr" typeface="Myanmar Text"/>
+        <a:font script="Nkoo" typeface="Ebrima"/>
+        <a:font script="Olck" typeface="Nirmala UI"/>
+        <a:font script="Osma" typeface="Ebrima"/>
+        <a:font script="Phag" typeface="Phagspa"/>
+        <a:font script="Syrn" typeface="Estrangelo Edessa"/>
+        <a:font script="Syrj" typeface="Estrangelo Edessa"/>
+        <a:font script="Syre" typeface="Estrangelo Edessa"/>
+        <a:font script="Sora" typeface="Nirmala UI"/>
+        <a:font script="Tale" typeface="Microsoft Tai Le"/>
+        <a:font script="Talu" typeface="Microsoft New Tai Lue"/>
+        <a:font script="Tfng" typeface="Ebrima"/>
+      </a:minorFont>
+    </a:fontScheme>
+    <a:fmtScheme name="Office">
+      <a:fillStyleLst>
+        <a:solidFill>
+          <a:schemeClr val="phClr"/>
+        </a:solidFill>
+        <a:gradFill rotWithShape="1">
+          <a:gsLst>
+            <a:gs pos="0">
+              <a:schemeClr val="phClr">
+                <a:lumMod val="110000"/>
+                <a:satMod val="105000"/>
+                <a:tint val="67000"/>
+              </a:schemeClr>
+            </a:gs>
+            <a:gs pos="50000">
+              <a:schemeClr val="phClr">
+                <a:lumMod val="105000"/>
+                <a:satMod val="103000"/>
+                <a:tint val="73000"/>
+              </a:schemeClr>
+            </a:gs>
+            <a:gs pos="100000">
+              <a:schemeClr val="phClr">
+                <a:lumMod val="105000"/>
+                <a:satMod val="109000"/>
+                <a:tint val="81000"/>
+              </a:schemeClr>
+            </a:gs>
+          </a:gsLst>
+          <a:lin ang="5400000" scaled="0"/>
+        </a:gradFill>
+        <a:gradFill rotWithShape="1">
+          <a:gsLst>
+            <a:gs pos="0">
+              <a:schemeClr val="phClr">
+                <a:satMod val="103000"/>
+                <a:lumMod val="102000"/>
+                <a:tint val="94000"/>
+              </a:schemeClr>
+            </a:gs>
+            <a:gs pos="50000">
+              <a:schemeClr val="phClr">
+                <a:satMod val="110000"/>
+                <a:lumMod val="100000"/>
+                <a:shade val="100000"/>
+              </a:schemeClr>
+            </a:gs>
+            <a:gs pos="100000">
+              <a:schemeClr val="phClr">
+                <a:lumMod val="99000"/>
+                <a:satMod val="120000"/>
+                <a:shade val="78000"/>
+              </a:schemeClr>
+            </a:gs>
+          </a:gsLst>
+          <a:lin ang="5400000" scaled="0"/>
+        </a:gradFill>
+      </a:fillStyleLst>
+      <a:lnStyleLst>
+        <a:ln w="12700" cap="flat" cmpd="sng" algn="ctr">
+          <a:solidFill>
+            <a:schemeClr val="phClr"/>
+          </a:solidFill>
+          <a:prstDash val="solid"/>
+          <a:miter lim="800000"/>
+        </a:ln>
+        <a:ln w="19050" cap="flat" cmpd="sng" algn="ctr">
+          <a:solidFill>
+            <a:schemeClr val="phClr"/>
+          </a:solidFill>
+          <a:prstDash val="solid"/>
+          <a:miter lim="800000"/>
+        </a:ln>
+        <a:ln w="25400" cap="flat" cmpd="sng" algn="ctr">
+          <a:solidFill>
+            <a:schemeClr val="phClr"/>
+          </a:solidFill>
+          <a:prstDash val="solid"/>
+          <a:miter lim="800000"/>
+        </a:ln>
+      </a:lnStyleLst>
+      <a:effectStyleLst>
+        <a:effectStyle>
+          <a:effectLst/>
+        </a:effectStyle>
+        <a:effectStyle>
+          <a:effectLst/>
+        </a:effectStyle>
+        <a:effectStyle>
+          <a:effectLst>
+            <a:outerShdw blurRad="57150" dist="19050" dir="5400000" algn="ctr" rotWithShape="0">
+              <a:srgbClr val="000000">
+                <a:alpha val="63000"/>
+              </a:srgbClr>
+            </a:outerShdw>
+          </a:effectLst>
+        </a:effectStyle>
+      </a:effectStyleLst>
+      <a:bgFillStyleLst>
+        <a:solidFill>
+          <a:schemeClr val="phClr"/>
+        </a:solidFill>
+        <a:solidFill>
+          <a:schemeClr val="phClr">
+            <a:tint val="95000"/>
+            <a:satMod val="170000"/>
+          </a:schemeClr>
+        </a:solidFill>
+        <a:gradFill rotWithShape="1">
+          <a:gsLst>
+            <a:gs pos="0">
+              <a:schemeClr val="phClr">
+                <a:tint val="93000"/>
+                <a:satMod val="150000"/>
+                <a:shade val="98000"/>
+                <a:lumMod val="102000"/>
+              </a:schemeClr>
+            </a:gs>
+            <a:gs pos="50000">
+              <a:schemeClr val="phClr">
+                <a:tint val="98000"/>
+                <a:satMod val="130000"/>
+                <a:shade val="90000"/>
+                <a:lumMod val="103000"/>
+              </a:schemeClr>
+            </a:gs>
+            <a:gs pos="100000">
+              <a:schemeClr val="phClr">
+                <a:shade val="63000"/>
+                <a:satMod val="120000"/>
+              </a:schemeClr>
+            </a:gs>
+          </a:gsLst>
+          <a:lin ang="5400000" scaled="0"/>
+        </a:gradFill>
+      </a:bgFillStyleLst>
+    </a:fmtScheme>
+  </a:themeElements>
+  <a:objectDefaults>
+    <a:lnDef>
+      <a:spPr/>
+      <a:bodyPr/>
+      <a:lstStyle/>
+      <a:style>
+        <a:lnRef idx="2">
+          <a:schemeClr val="accent1"/>
+        </a:lnRef>
+        <a:fillRef idx="0">
+          <a:schemeClr val="accent1"/>
+        </a:fillRef>
+        <a:effectRef idx="1">
+          <a:schemeClr val="accent1"/>
+        </a:effectRef>
+        <a:fontRef idx="minor">
+          <a:schemeClr val="tx1"/>
+        </a:fontRef>
+      </a:style>
+    </a:lnDef>
+  </a:objectDefaults>
+  <a:extraClrSchemeLst/>
+  <a:extLst>
+    <a:ext uri="{05A4C25C-085E-4340-85A3-A5531E510DB2}">
+      <thm15:themeFamily xmlns:thm15="http://schemas.microsoft.com/office/thememl/2012/main" name="Office Theme" id="{2E142A2C-CD16-42D6-873A-C26D2A0506FA}" vid="{1BDDFF52-6CD6-40A5-AB3C-68EB2F1E4D0A}"/>
+    </a:ext>
+  </a:extLst>
+</a:theme>
 </file>